--- a/docs/content/05-teaching-resources/slides/specialism/05-identifying-and-managing-risk.pptx
+++ b/docs/content/05-teaching-resources/slides/specialism/05-identifying-and-managing-risk.pptx
@@ -10,10 +10,14 @@
     <p:sldId id="258" r:id="rId9"/>
     <p:sldId id="259" r:id="rId10"/>
     <p:sldId id="260" r:id="rId11"/>
-    <p:sldId id="261" r:id="rId12"/>
+    <p:sldId id="261" r:id="rId13"/>
     <p:sldId id="262" r:id="rId14"/>
     <p:sldId id="263" r:id="rId15"/>
     <p:sldId id="264" r:id="rId16"/>
+    <p:sldId id="265" r:id="rId17"/>
+    <p:sldId id="266" r:id="rId18"/>
+    <p:sldId id="267" r:id="rId19"/>
+    <p:sldId id="268" r:id="rId20"/>
   </p:sldIdLst>
   <p:sldSz cx="12191695" cy="6858000" type="screen4x3"/>
   <p:notesSz cx="6858000" cy="9144000"/>
@@ -510,7 +514,22 @@
           <a:lstStyle/>
           <a:p>
             <a:r>
-              <a:t>Give students a few minutes to answer on mini whiteboards or paper, then reveal the answers on the next slide.</a:t>
+              <a:t>Answers:</a:t>
+            </a:r>
+          </a:p>
+          <a:p>
+            <a:r>
+              <a:t>1. E.g. security, compatibility, delivery, legal, engagement.</a:t>
+            </a:r>
+          </a:p>
+          <a:p>
+            <a:r>
+              <a:t>2. Likelihood weighed against seriousness and impact.</a:t>
+            </a:r>
+          </a:p>
+          <a:p>
+            <a:r>
+              <a:t>3. E.g. failing on older devices or other systems.</a:t>
             </a:r>
           </a:p>
         </p:txBody>
@@ -580,7 +599,22 @@
           <a:lstStyle/>
           <a:p>
             <a:r>
-              <a:t>Talk through any answers the class found difficult.</a:t>
+              <a:t>Answers:</a:t>
+            </a:r>
+          </a:p>
+          <a:p>
+            <a:r>
+              <a:t>1. What you'll do if a risk happens.</a:t>
+            </a:r>
+          </a:p>
+          <a:p>
+            <a:r>
+              <a:t>2. Risks change over time.</a:t>
+            </a:r>
+          </a:p>
+          <a:p>
+            <a:r>
+              <a:t>3. E.g. backup, security, business continuity.</a:t>
             </a:r>
           </a:p>
         </p:txBody>
@@ -606,6 +640,146 @@
 </file>
 
 <file path=ppt/notesSlides/notesSlide3.xml><?xml version="1.0" encoding="utf-8"?>
+<p:notes xmlns:a="http://schemas.openxmlformats.org/drawingml/2006/main" xmlns:p="http://schemas.openxmlformats.org/presentationml/2006/main" xmlns:r="http://schemas.openxmlformats.org/officeDocument/2006/relationships">
+  <p:cSld>
+    <p:spTree>
+      <p:nvGrpSpPr>
+        <p:cNvPr id="1" name=""/>
+        <p:cNvGrpSpPr/>
+        <p:nvPr/>
+      </p:nvGrpSpPr>
+      <p:grpSpPr>
+        <a:xfrm>
+          <a:off x="0" y="0"/>
+          <a:ext cx="0" cy="0"/>
+          <a:chOff x="0" y="0"/>
+          <a:chExt cx="0" cy="0"/>
+        </a:xfrm>
+      </p:grpSpPr>
+      <p:sp>
+        <p:nvSpPr>
+          <p:cNvPr id="2" name="Slide Image Placeholder 1"/>
+          <p:cNvSpPr>
+            <a:spLocks noGrp="1"/>
+          </p:cNvSpPr>
+          <p:nvPr>
+            <p:ph type="sldImg" idx="2"/>
+          </p:nvPr>
+        </p:nvSpPr>
+        <p:spPr/>
+      </p:sp>
+      <p:sp>
+        <p:nvSpPr>
+          <p:cNvPr id="3" name="Notes Placeholder 2"/>
+          <p:cNvSpPr>
+            <a:spLocks noGrp="1"/>
+          </p:cNvSpPr>
+          <p:nvPr>
+            <p:ph type="body" idx="3" sz="quarter"/>
+          </p:nvPr>
+        </p:nvSpPr>
+        <p:spPr/>
+        <p:txBody>
+          <a:bodyPr/>
+          <a:lstStyle/>
+          <a:p>
+            <a:r>
+              <a:t>Give students a few minutes to answer on mini whiteboards or paper, then reveal the answers on the next slide.</a:t>
+            </a:r>
+          </a:p>
+        </p:txBody>
+      </p:sp>
+      <p:sp>
+        <p:nvSpPr>
+          <p:cNvPr id="4" name="Slide Number Placeholder 3"/>
+          <p:cNvSpPr>
+            <a:spLocks noGrp="1"/>
+          </p:cNvSpPr>
+          <p:nvPr>
+            <p:ph type="sldNum" idx="5" sz="quarter"/>
+          </p:nvPr>
+        </p:nvSpPr>
+        <p:spPr/>
+      </p:sp>
+    </p:spTree>
+  </p:cSld>
+  <p:clrMapOvr>
+    <a:masterClrMapping/>
+  </p:clrMapOvr>
+</p:notes>
+</file>
+
+<file path=ppt/notesSlides/notesSlide4.xml><?xml version="1.0" encoding="utf-8"?>
+<p:notes xmlns:a="http://schemas.openxmlformats.org/drawingml/2006/main" xmlns:p="http://schemas.openxmlformats.org/presentationml/2006/main" xmlns:r="http://schemas.openxmlformats.org/officeDocument/2006/relationships">
+  <p:cSld>
+    <p:spTree>
+      <p:nvGrpSpPr>
+        <p:cNvPr id="1" name=""/>
+        <p:cNvGrpSpPr/>
+        <p:nvPr/>
+      </p:nvGrpSpPr>
+      <p:grpSpPr>
+        <a:xfrm>
+          <a:off x="0" y="0"/>
+          <a:ext cx="0" cy="0"/>
+          <a:chOff x="0" y="0"/>
+          <a:chExt cx="0" cy="0"/>
+        </a:xfrm>
+      </p:grpSpPr>
+      <p:sp>
+        <p:nvSpPr>
+          <p:cNvPr id="2" name="Slide Image Placeholder 1"/>
+          <p:cNvSpPr>
+            <a:spLocks noGrp="1"/>
+          </p:cNvSpPr>
+          <p:nvPr>
+            <p:ph type="sldImg" idx="2"/>
+          </p:nvPr>
+        </p:nvSpPr>
+        <p:spPr/>
+      </p:sp>
+      <p:sp>
+        <p:nvSpPr>
+          <p:cNvPr id="3" name="Notes Placeholder 2"/>
+          <p:cNvSpPr>
+            <a:spLocks noGrp="1"/>
+          </p:cNvSpPr>
+          <p:nvPr>
+            <p:ph type="body" idx="3" sz="quarter"/>
+          </p:nvPr>
+        </p:nvSpPr>
+        <p:spPr/>
+        <p:txBody>
+          <a:bodyPr/>
+          <a:lstStyle/>
+          <a:p>
+            <a:r>
+              <a:t>Talk through any answers the class found difficult.</a:t>
+            </a:r>
+          </a:p>
+        </p:txBody>
+      </p:sp>
+      <p:sp>
+        <p:nvSpPr>
+          <p:cNvPr id="4" name="Slide Number Placeholder 3"/>
+          <p:cNvSpPr>
+            <a:spLocks noGrp="1"/>
+          </p:cNvSpPr>
+          <p:nvPr>
+            <p:ph type="sldNum" idx="5" sz="quarter"/>
+          </p:nvPr>
+        </p:nvSpPr>
+        <p:spPr/>
+      </p:sp>
+    </p:spTree>
+  </p:cSld>
+  <p:clrMapOvr>
+    <a:masterClrMapping/>
+  </p:clrMapOvr>
+</p:notes>
+</file>
+
+<file path=ppt/notesSlides/notesSlide5.xml><?xml version="1.0" encoding="utf-8"?>
 <p:notes xmlns:a="http://schemas.openxmlformats.org/drawingml/2006/main" xmlns:p="http://schemas.openxmlformats.org/presentationml/2006/main" xmlns:r="http://schemas.openxmlformats.org/officeDocument/2006/relationships">
   <p:cSld>
     <p:spTree>
@@ -3975,6 +4149,2172 @@
 </p:sld>
 </file>
 
+<file path=ppt/slides/slide10.xml><?xml version="1.0" encoding="utf-8"?>
+<p:sld xmlns:a="http://schemas.openxmlformats.org/drawingml/2006/main" xmlns:p="http://schemas.openxmlformats.org/presentationml/2006/main" xmlns:r="http://schemas.openxmlformats.org/officeDocument/2006/relationships">
+  <p:cSld>
+    <p:bg>
+      <p:bgPr>
+        <a:solidFill>
+          <a:srgbClr val="FFFFFF"/>
+        </a:solidFill>
+        <a:effectLst/>
+      </p:bgPr>
+    </p:bg>
+    <p:spTree>
+      <p:nvGrpSpPr>
+        <p:cNvPr id="1" name=""/>
+        <p:cNvGrpSpPr/>
+        <p:nvPr/>
+      </p:nvGrpSpPr>
+      <p:grpSpPr/>
+      <p:sp>
+        <p:nvSpPr>
+          <p:cNvPr id="2" name="TextBox 1"/>
+          <p:cNvSpPr txBox="1"/>
+          <p:nvPr/>
+        </p:nvSpPr>
+        <p:spPr>
+          <a:xfrm>
+            <a:off x="548640" y="320040"/>
+            <a:ext cx="11094415" cy="274320"/>
+          </a:xfrm>
+          <a:prstGeom prst="rect">
+            <a:avLst/>
+          </a:prstGeom>
+          <a:noFill/>
+        </p:spPr>
+        <p:txBody>
+          <a:bodyPr wrap="square" anchor="t" lIns="0" rIns="0" tIns="0" bIns="0"/>
+          <a:lstStyle/>
+          <a:p>
+            <a:pPr algn="l"/>
+            <a:r>
+              <a:rPr sz="1100" b="1" i="0">
+                <a:solidFill>
+                  <a:srgbClr val="54595D"/>
+                </a:solidFill>
+                <a:latin typeface="Calibri"/>
+              </a:rPr>
+              <a:t>OCCUPATIONAL SPECIALISM  ·  Specialism Content Area 2</a:t>
+            </a:r>
+          </a:p>
+        </p:txBody>
+      </p:sp>
+      <p:sp>
+        <p:nvSpPr>
+          <p:cNvPr id="3" name="TextBox 2"/>
+          <p:cNvSpPr txBox="1"/>
+          <p:nvPr/>
+        </p:nvSpPr>
+        <p:spPr>
+          <a:xfrm>
+            <a:off x="548640" y="566928"/>
+            <a:ext cx="11094415" cy="822960"/>
+          </a:xfrm>
+          <a:prstGeom prst="rect">
+            <a:avLst/>
+          </a:prstGeom>
+          <a:noFill/>
+        </p:spPr>
+        <p:txBody>
+          <a:bodyPr wrap="square" anchor="ctr" lIns="0" rIns="0" tIns="0" bIns="0"/>
+          <a:lstStyle/>
+          <a:p>
+            <a:pPr algn="l"/>
+            <a:r>
+              <a:rPr sz="3200" b="1" i="0">
+                <a:solidFill>
+                  <a:srgbClr val="03306E"/>
+                </a:solidFill>
+                <a:latin typeface="Cambria"/>
+              </a:rPr>
+              <a:t>Check your understanding</a:t>
+            </a:r>
+          </a:p>
+        </p:txBody>
+      </p:sp>
+      <p:sp>
+        <p:nvSpPr>
+          <p:cNvPr id="4" name="TextBox 3"/>
+          <p:cNvSpPr txBox="1"/>
+          <p:nvPr/>
+        </p:nvSpPr>
+        <p:spPr>
+          <a:xfrm>
+            <a:off x="548640" y="6446520"/>
+            <a:ext cx="8229600" cy="274320"/>
+          </a:xfrm>
+          <a:prstGeom prst="rect">
+            <a:avLst/>
+          </a:prstGeom>
+          <a:noFill/>
+        </p:spPr>
+        <p:txBody>
+          <a:bodyPr wrap="square" anchor="t" lIns="0" rIns="0" tIns="0" bIns="0"/>
+          <a:lstStyle/>
+          <a:p>
+            <a:pPr algn="l"/>
+            <a:r>
+              <a:rPr sz="1000" b="0" i="0">
+                <a:solidFill>
+                  <a:srgbClr val="54595D"/>
+                </a:solidFill>
+                <a:latin typeface="Calibri"/>
+              </a:rPr>
+              <a:t>Digital Software Development T Level  ·  Identifying and Managing Risk</a:t>
+            </a:r>
+          </a:p>
+        </p:txBody>
+      </p:sp>
+      <p:sp>
+        <p:nvSpPr>
+          <p:cNvPr id="5" name="TextBox 4"/>
+          <p:cNvSpPr txBox="1"/>
+          <p:nvPr/>
+        </p:nvSpPr>
+        <p:spPr>
+          <a:xfrm>
+            <a:off x="10728655" y="6446520"/>
+            <a:ext cx="914400" cy="274320"/>
+          </a:xfrm>
+          <a:prstGeom prst="rect">
+            <a:avLst/>
+          </a:prstGeom>
+          <a:noFill/>
+        </p:spPr>
+        <p:txBody>
+          <a:bodyPr wrap="square" anchor="t" lIns="0" rIns="0" tIns="0" bIns="0"/>
+          <a:lstStyle/>
+          <a:p>
+            <a:pPr algn="r"/>
+            <a:r>
+              <a:rPr sz="1000" b="0" i="0">
+                <a:solidFill>
+                  <a:srgbClr val="54595D"/>
+                </a:solidFill>
+                <a:latin typeface="Calibri"/>
+              </a:rPr>
+              <a:t>10</a:t>
+            </a:r>
+          </a:p>
+        </p:txBody>
+      </p:sp>
+      <p:sp>
+        <p:nvSpPr>
+          <p:cNvPr id="6" name="Oval 5"/>
+          <p:cNvSpPr/>
+          <p:nvPr/>
+        </p:nvSpPr>
+        <p:spPr>
+          <a:xfrm>
+            <a:off x="548640" y="1618488"/>
+            <a:ext cx="411480" cy="411480"/>
+          </a:xfrm>
+          <a:prstGeom prst="ellipse">
+            <a:avLst/>
+          </a:prstGeom>
+          <a:solidFill>
+            <a:srgbClr val="33C17A"/>
+          </a:solidFill>
+          <a:ln>
+            <a:noFill/>
+          </a:ln>
+          <a:effectLst/>
+        </p:spPr>
+        <p:style>
+          <a:lnRef idx="1">
+            <a:schemeClr val="accent1"/>
+          </a:lnRef>
+          <a:fillRef idx="3">
+            <a:schemeClr val="accent1"/>
+          </a:fillRef>
+          <a:effectRef idx="2">
+            <a:schemeClr val="accent1"/>
+          </a:effectRef>
+          <a:fontRef idx="minor">
+            <a:schemeClr val="lt1"/>
+          </a:fontRef>
+        </p:style>
+        <p:txBody>
+          <a:bodyPr rtlCol="0" anchor="ctr" lIns="0" rIns="0" tIns="0" bIns="0"/>
+          <a:lstStyle/>
+          <a:p>
+            <a:pPr algn="ctr"/>
+            <a:r>
+              <a:rPr sz="1400" b="1">
+                <a:solidFill>
+                  <a:srgbClr val="202122"/>
+                </a:solidFill>
+                <a:latin typeface="Calibri"/>
+              </a:rPr>
+              <a:t>1</a:t>
+            </a:r>
+          </a:p>
+        </p:txBody>
+      </p:sp>
+      <p:sp>
+        <p:nvSpPr>
+          <p:cNvPr id="7" name="TextBox 6"/>
+          <p:cNvSpPr txBox="1"/>
+          <p:nvPr/>
+        </p:nvSpPr>
+        <p:spPr>
+          <a:xfrm>
+            <a:off x="1234440" y="1600200"/>
+            <a:ext cx="10408615" cy="1429512"/>
+          </a:xfrm>
+          <a:prstGeom prst="rect">
+            <a:avLst/>
+          </a:prstGeom>
+          <a:noFill/>
+        </p:spPr>
+        <p:txBody>
+          <a:bodyPr wrap="square" anchor="t" lIns="0" rIns="0" tIns="0" bIns="0"/>
+          <a:lstStyle/>
+          <a:p>
+            <a:pPr algn="l"/>
+            <a:r>
+              <a:rPr sz="2200" b="0" i="0">
+                <a:solidFill>
+                  <a:srgbClr val="202122"/>
+                </a:solidFill>
+                <a:latin typeface="Calibri"/>
+              </a:rPr>
+              <a:t>What two things are weighed in risk assessment?</a:t>
+            </a:r>
+          </a:p>
+        </p:txBody>
+      </p:sp>
+      <p:sp>
+        <p:nvSpPr>
+          <p:cNvPr id="8" name="Oval 7"/>
+          <p:cNvSpPr/>
+          <p:nvPr/>
+        </p:nvSpPr>
+        <p:spPr>
+          <a:xfrm>
+            <a:off x="548640" y="3212592"/>
+            <a:ext cx="411480" cy="411480"/>
+          </a:xfrm>
+          <a:prstGeom prst="ellipse">
+            <a:avLst/>
+          </a:prstGeom>
+          <a:solidFill>
+            <a:srgbClr val="33C17A"/>
+          </a:solidFill>
+          <a:ln>
+            <a:noFill/>
+          </a:ln>
+          <a:effectLst/>
+        </p:spPr>
+        <p:style>
+          <a:lnRef idx="1">
+            <a:schemeClr val="accent1"/>
+          </a:lnRef>
+          <a:fillRef idx="3">
+            <a:schemeClr val="accent1"/>
+          </a:fillRef>
+          <a:effectRef idx="2">
+            <a:schemeClr val="accent1"/>
+          </a:effectRef>
+          <a:fontRef idx="minor">
+            <a:schemeClr val="lt1"/>
+          </a:fontRef>
+        </p:style>
+        <p:txBody>
+          <a:bodyPr rtlCol="0" anchor="ctr" lIns="0" rIns="0" tIns="0" bIns="0"/>
+          <a:lstStyle/>
+          <a:p>
+            <a:pPr algn="ctr"/>
+            <a:r>
+              <a:rPr sz="1400" b="1">
+                <a:solidFill>
+                  <a:srgbClr val="202122"/>
+                </a:solidFill>
+                <a:latin typeface="Calibri"/>
+              </a:rPr>
+              <a:t>2</a:t>
+            </a:r>
+          </a:p>
+        </p:txBody>
+      </p:sp>
+      <p:sp>
+        <p:nvSpPr>
+          <p:cNvPr id="9" name="TextBox 8"/>
+          <p:cNvSpPr txBox="1"/>
+          <p:nvPr/>
+        </p:nvSpPr>
+        <p:spPr>
+          <a:xfrm>
+            <a:off x="1234440" y="3194304"/>
+            <a:ext cx="10408615" cy="1429512"/>
+          </a:xfrm>
+          <a:prstGeom prst="rect">
+            <a:avLst/>
+          </a:prstGeom>
+          <a:noFill/>
+        </p:spPr>
+        <p:txBody>
+          <a:bodyPr wrap="square" anchor="t" lIns="0" rIns="0" tIns="0" bIns="0"/>
+          <a:lstStyle/>
+          <a:p>
+            <a:pPr algn="l"/>
+            <a:r>
+              <a:rPr sz="2200" b="0" i="0">
+                <a:solidFill>
+                  <a:srgbClr val="202122"/>
+                </a:solidFill>
+                <a:latin typeface="Calibri"/>
+              </a:rPr>
+              <a:t>What is a contingency plan?</a:t>
+            </a:r>
+          </a:p>
+        </p:txBody>
+      </p:sp>
+      <p:sp>
+        <p:nvSpPr>
+          <p:cNvPr id="10" name="Oval 9"/>
+          <p:cNvSpPr/>
+          <p:nvPr/>
+        </p:nvSpPr>
+        <p:spPr>
+          <a:xfrm>
+            <a:off x="548640" y="4806695"/>
+            <a:ext cx="411480" cy="411480"/>
+          </a:xfrm>
+          <a:prstGeom prst="ellipse">
+            <a:avLst/>
+          </a:prstGeom>
+          <a:solidFill>
+            <a:srgbClr val="33C17A"/>
+          </a:solidFill>
+          <a:ln>
+            <a:noFill/>
+          </a:ln>
+          <a:effectLst/>
+        </p:spPr>
+        <p:style>
+          <a:lnRef idx="1">
+            <a:schemeClr val="accent1"/>
+          </a:lnRef>
+          <a:fillRef idx="3">
+            <a:schemeClr val="accent1"/>
+          </a:fillRef>
+          <a:effectRef idx="2">
+            <a:schemeClr val="accent1"/>
+          </a:effectRef>
+          <a:fontRef idx="minor">
+            <a:schemeClr val="lt1"/>
+          </a:fontRef>
+        </p:style>
+        <p:txBody>
+          <a:bodyPr rtlCol="0" anchor="ctr" lIns="0" rIns="0" tIns="0" bIns="0"/>
+          <a:lstStyle/>
+          <a:p>
+            <a:pPr algn="ctr"/>
+            <a:r>
+              <a:rPr sz="1400" b="1">
+                <a:solidFill>
+                  <a:srgbClr val="202122"/>
+                </a:solidFill>
+                <a:latin typeface="Calibri"/>
+              </a:rPr>
+              <a:t>3</a:t>
+            </a:r>
+          </a:p>
+        </p:txBody>
+      </p:sp>
+      <p:sp>
+        <p:nvSpPr>
+          <p:cNvPr id="11" name="TextBox 10"/>
+          <p:cNvSpPr txBox="1"/>
+          <p:nvPr/>
+        </p:nvSpPr>
+        <p:spPr>
+          <a:xfrm>
+            <a:off x="1234440" y="4788408"/>
+            <a:ext cx="10408615" cy="1429512"/>
+          </a:xfrm>
+          <a:prstGeom prst="rect">
+            <a:avLst/>
+          </a:prstGeom>
+          <a:noFill/>
+        </p:spPr>
+        <p:txBody>
+          <a:bodyPr wrap="square" anchor="t" lIns="0" rIns="0" tIns="0" bIns="0"/>
+          <a:lstStyle/>
+          <a:p>
+            <a:pPr algn="l"/>
+            <a:r>
+              <a:rPr sz="2200" b="0" i="0">
+                <a:solidFill>
+                  <a:srgbClr val="202122"/>
+                </a:solidFill>
+                <a:latin typeface="Calibri"/>
+              </a:rPr>
+              <a:t>Give one organisational policy that reduces risk.</a:t>
+            </a:r>
+          </a:p>
+        </p:txBody>
+      </p:sp>
+    </p:spTree>
+  </p:cSld>
+  <p:clrMapOvr>
+    <a:masterClrMapping/>
+  </p:clrMapOvr>
+</p:sld>
+</file>
+
+<file path=ppt/slides/slide11.xml><?xml version="1.0" encoding="utf-8"?>
+<p:sld xmlns:a="http://schemas.openxmlformats.org/drawingml/2006/main" xmlns:p="http://schemas.openxmlformats.org/presentationml/2006/main" xmlns:r="http://schemas.openxmlformats.org/officeDocument/2006/relationships">
+  <p:cSld>
+    <p:bg>
+      <p:bgPr>
+        <a:solidFill>
+          <a:srgbClr val="FFFFFF"/>
+        </a:solidFill>
+        <a:effectLst/>
+      </p:bgPr>
+    </p:bg>
+    <p:spTree>
+      <p:nvGrpSpPr>
+        <p:cNvPr id="1" name=""/>
+        <p:cNvGrpSpPr/>
+        <p:nvPr/>
+      </p:nvGrpSpPr>
+      <p:grpSpPr/>
+      <p:sp>
+        <p:nvSpPr>
+          <p:cNvPr id="2" name="TextBox 1"/>
+          <p:cNvSpPr txBox="1"/>
+          <p:nvPr/>
+        </p:nvSpPr>
+        <p:spPr>
+          <a:xfrm>
+            <a:off x="548640" y="320040"/>
+            <a:ext cx="11094415" cy="274320"/>
+          </a:xfrm>
+          <a:prstGeom prst="rect">
+            <a:avLst/>
+          </a:prstGeom>
+          <a:noFill/>
+        </p:spPr>
+        <p:txBody>
+          <a:bodyPr wrap="square" anchor="t" lIns="0" rIns="0" tIns="0" bIns="0"/>
+          <a:lstStyle/>
+          <a:p>
+            <a:pPr algn="l"/>
+            <a:r>
+              <a:rPr sz="1100" b="1" i="0">
+                <a:solidFill>
+                  <a:srgbClr val="54595D"/>
+                </a:solidFill>
+                <a:latin typeface="Calibri"/>
+              </a:rPr>
+              <a:t>OCCUPATIONAL SPECIALISM  ·  Specialism Content Area 2</a:t>
+            </a:r>
+          </a:p>
+        </p:txBody>
+      </p:sp>
+      <p:sp>
+        <p:nvSpPr>
+          <p:cNvPr id="3" name="TextBox 2"/>
+          <p:cNvSpPr txBox="1"/>
+          <p:nvPr/>
+        </p:nvSpPr>
+        <p:spPr>
+          <a:xfrm>
+            <a:off x="548640" y="566928"/>
+            <a:ext cx="11094415" cy="822960"/>
+          </a:xfrm>
+          <a:prstGeom prst="rect">
+            <a:avLst/>
+          </a:prstGeom>
+          <a:noFill/>
+        </p:spPr>
+        <p:txBody>
+          <a:bodyPr wrap="square" anchor="ctr" lIns="0" rIns="0" tIns="0" bIns="0"/>
+          <a:lstStyle/>
+          <a:p>
+            <a:pPr algn="l"/>
+            <a:r>
+              <a:rPr sz="3200" b="1" i="0">
+                <a:solidFill>
+                  <a:srgbClr val="03306E"/>
+                </a:solidFill>
+                <a:latin typeface="Cambria"/>
+              </a:rPr>
+              <a:t>Answers</a:t>
+            </a:r>
+          </a:p>
+        </p:txBody>
+      </p:sp>
+      <p:sp>
+        <p:nvSpPr>
+          <p:cNvPr id="4" name="TextBox 3"/>
+          <p:cNvSpPr txBox="1"/>
+          <p:nvPr/>
+        </p:nvSpPr>
+        <p:spPr>
+          <a:xfrm>
+            <a:off x="548640" y="6446520"/>
+            <a:ext cx="8229600" cy="274320"/>
+          </a:xfrm>
+          <a:prstGeom prst="rect">
+            <a:avLst/>
+          </a:prstGeom>
+          <a:noFill/>
+        </p:spPr>
+        <p:txBody>
+          <a:bodyPr wrap="square" anchor="t" lIns="0" rIns="0" tIns="0" bIns="0"/>
+          <a:lstStyle/>
+          <a:p>
+            <a:pPr algn="l"/>
+            <a:r>
+              <a:rPr sz="1000" b="0" i="0">
+                <a:solidFill>
+                  <a:srgbClr val="54595D"/>
+                </a:solidFill>
+                <a:latin typeface="Calibri"/>
+              </a:rPr>
+              <a:t>Digital Software Development T Level  ·  Identifying and Managing Risk</a:t>
+            </a:r>
+          </a:p>
+        </p:txBody>
+      </p:sp>
+      <p:sp>
+        <p:nvSpPr>
+          <p:cNvPr id="5" name="TextBox 4"/>
+          <p:cNvSpPr txBox="1"/>
+          <p:nvPr/>
+        </p:nvSpPr>
+        <p:spPr>
+          <a:xfrm>
+            <a:off x="10728655" y="6446520"/>
+            <a:ext cx="914400" cy="274320"/>
+          </a:xfrm>
+          <a:prstGeom prst="rect">
+            <a:avLst/>
+          </a:prstGeom>
+          <a:noFill/>
+        </p:spPr>
+        <p:txBody>
+          <a:bodyPr wrap="square" anchor="t" lIns="0" rIns="0" tIns="0" bIns="0"/>
+          <a:lstStyle/>
+          <a:p>
+            <a:pPr algn="r"/>
+            <a:r>
+              <a:rPr sz="1000" b="0" i="0">
+                <a:solidFill>
+                  <a:srgbClr val="54595D"/>
+                </a:solidFill>
+                <a:latin typeface="Calibri"/>
+              </a:rPr>
+              <a:t>11</a:t>
+            </a:r>
+          </a:p>
+        </p:txBody>
+      </p:sp>
+      <p:sp>
+        <p:nvSpPr>
+          <p:cNvPr id="6" name="Oval 5"/>
+          <p:cNvSpPr/>
+          <p:nvPr/>
+        </p:nvSpPr>
+        <p:spPr>
+          <a:xfrm>
+            <a:off x="548640" y="1618488"/>
+            <a:ext cx="411480" cy="411480"/>
+          </a:xfrm>
+          <a:prstGeom prst="ellipse">
+            <a:avLst/>
+          </a:prstGeom>
+          <a:solidFill>
+            <a:srgbClr val="33C17A"/>
+          </a:solidFill>
+          <a:ln>
+            <a:noFill/>
+          </a:ln>
+          <a:effectLst/>
+        </p:spPr>
+        <p:style>
+          <a:lnRef idx="1">
+            <a:schemeClr val="accent1"/>
+          </a:lnRef>
+          <a:fillRef idx="3">
+            <a:schemeClr val="accent1"/>
+          </a:fillRef>
+          <a:effectRef idx="2">
+            <a:schemeClr val="accent1"/>
+          </a:effectRef>
+          <a:fontRef idx="minor">
+            <a:schemeClr val="lt1"/>
+          </a:fontRef>
+        </p:style>
+        <p:txBody>
+          <a:bodyPr rtlCol="0" anchor="ctr" lIns="0" rIns="0" tIns="0" bIns="0"/>
+          <a:lstStyle/>
+          <a:p>
+            <a:pPr algn="ctr"/>
+            <a:r>
+              <a:rPr sz="1400" b="1">
+                <a:solidFill>
+                  <a:srgbClr val="202122"/>
+                </a:solidFill>
+                <a:latin typeface="Calibri"/>
+              </a:rPr>
+              <a:t>1</a:t>
+            </a:r>
+          </a:p>
+        </p:txBody>
+      </p:sp>
+      <p:sp>
+        <p:nvSpPr>
+          <p:cNvPr id="7" name="TextBox 6"/>
+          <p:cNvSpPr txBox="1"/>
+          <p:nvPr/>
+        </p:nvSpPr>
+        <p:spPr>
+          <a:xfrm>
+            <a:off x="1234440" y="1600200"/>
+            <a:ext cx="10408615" cy="1429512"/>
+          </a:xfrm>
+          <a:prstGeom prst="rect">
+            <a:avLst/>
+          </a:prstGeom>
+          <a:noFill/>
+        </p:spPr>
+        <p:txBody>
+          <a:bodyPr wrap="square" anchor="t" lIns="0" rIns="0" tIns="0" bIns="0"/>
+          <a:lstStyle/>
+          <a:p>
+            <a:pPr algn="l"/>
+            <a:r>
+              <a:rPr sz="1800" b="0" i="0">
+                <a:solidFill>
+                  <a:srgbClr val="54595D"/>
+                </a:solidFill>
+                <a:latin typeface="Calibri"/>
+              </a:rPr>
+              <a:t>What two things are weighed in risk assessment?</a:t>
+            </a:r>
+          </a:p>
+          <a:p>
+            <a:r>
+              <a:rPr sz="1800" b="1">
+                <a:solidFill>
+                  <a:srgbClr val="03306E"/>
+                </a:solidFill>
+                <a:latin typeface="Calibri"/>
+              </a:rPr>
+              <a:t>Likelihood and seriousness (impact).</a:t>
+            </a:r>
+          </a:p>
+        </p:txBody>
+      </p:sp>
+      <p:sp>
+        <p:nvSpPr>
+          <p:cNvPr id="8" name="Oval 7"/>
+          <p:cNvSpPr/>
+          <p:nvPr/>
+        </p:nvSpPr>
+        <p:spPr>
+          <a:xfrm>
+            <a:off x="548640" y="3212592"/>
+            <a:ext cx="411480" cy="411480"/>
+          </a:xfrm>
+          <a:prstGeom prst="ellipse">
+            <a:avLst/>
+          </a:prstGeom>
+          <a:solidFill>
+            <a:srgbClr val="33C17A"/>
+          </a:solidFill>
+          <a:ln>
+            <a:noFill/>
+          </a:ln>
+          <a:effectLst/>
+        </p:spPr>
+        <p:style>
+          <a:lnRef idx="1">
+            <a:schemeClr val="accent1"/>
+          </a:lnRef>
+          <a:fillRef idx="3">
+            <a:schemeClr val="accent1"/>
+          </a:fillRef>
+          <a:effectRef idx="2">
+            <a:schemeClr val="accent1"/>
+          </a:effectRef>
+          <a:fontRef idx="minor">
+            <a:schemeClr val="lt1"/>
+          </a:fontRef>
+        </p:style>
+        <p:txBody>
+          <a:bodyPr rtlCol="0" anchor="ctr" lIns="0" rIns="0" tIns="0" bIns="0"/>
+          <a:lstStyle/>
+          <a:p>
+            <a:pPr algn="ctr"/>
+            <a:r>
+              <a:rPr sz="1400" b="1">
+                <a:solidFill>
+                  <a:srgbClr val="202122"/>
+                </a:solidFill>
+                <a:latin typeface="Calibri"/>
+              </a:rPr>
+              <a:t>2</a:t>
+            </a:r>
+          </a:p>
+        </p:txBody>
+      </p:sp>
+      <p:sp>
+        <p:nvSpPr>
+          <p:cNvPr id="9" name="TextBox 8"/>
+          <p:cNvSpPr txBox="1"/>
+          <p:nvPr/>
+        </p:nvSpPr>
+        <p:spPr>
+          <a:xfrm>
+            <a:off x="1234440" y="3194304"/>
+            <a:ext cx="10408615" cy="1429512"/>
+          </a:xfrm>
+          <a:prstGeom prst="rect">
+            <a:avLst/>
+          </a:prstGeom>
+          <a:noFill/>
+        </p:spPr>
+        <p:txBody>
+          <a:bodyPr wrap="square" anchor="t" lIns="0" rIns="0" tIns="0" bIns="0"/>
+          <a:lstStyle/>
+          <a:p>
+            <a:pPr algn="l"/>
+            <a:r>
+              <a:rPr sz="1800" b="0" i="0">
+                <a:solidFill>
+                  <a:srgbClr val="54595D"/>
+                </a:solidFill>
+                <a:latin typeface="Calibri"/>
+              </a:rPr>
+              <a:t>What is a contingency plan?</a:t>
+            </a:r>
+          </a:p>
+          <a:p>
+            <a:r>
+              <a:rPr sz="1800" b="1">
+                <a:solidFill>
+                  <a:srgbClr val="03306E"/>
+                </a:solidFill>
+                <a:latin typeface="Calibri"/>
+              </a:rPr>
+              <a:t>A plan for what to do if the risk happens.</a:t>
+            </a:r>
+          </a:p>
+        </p:txBody>
+      </p:sp>
+      <p:sp>
+        <p:nvSpPr>
+          <p:cNvPr id="10" name="Oval 9"/>
+          <p:cNvSpPr/>
+          <p:nvPr/>
+        </p:nvSpPr>
+        <p:spPr>
+          <a:xfrm>
+            <a:off x="548640" y="4806695"/>
+            <a:ext cx="411480" cy="411480"/>
+          </a:xfrm>
+          <a:prstGeom prst="ellipse">
+            <a:avLst/>
+          </a:prstGeom>
+          <a:solidFill>
+            <a:srgbClr val="33C17A"/>
+          </a:solidFill>
+          <a:ln>
+            <a:noFill/>
+          </a:ln>
+          <a:effectLst/>
+        </p:spPr>
+        <p:style>
+          <a:lnRef idx="1">
+            <a:schemeClr val="accent1"/>
+          </a:lnRef>
+          <a:fillRef idx="3">
+            <a:schemeClr val="accent1"/>
+          </a:fillRef>
+          <a:effectRef idx="2">
+            <a:schemeClr val="accent1"/>
+          </a:effectRef>
+          <a:fontRef idx="minor">
+            <a:schemeClr val="lt1"/>
+          </a:fontRef>
+        </p:style>
+        <p:txBody>
+          <a:bodyPr rtlCol="0" anchor="ctr" lIns="0" rIns="0" tIns="0" bIns="0"/>
+          <a:lstStyle/>
+          <a:p>
+            <a:pPr algn="ctr"/>
+            <a:r>
+              <a:rPr sz="1400" b="1">
+                <a:solidFill>
+                  <a:srgbClr val="202122"/>
+                </a:solidFill>
+                <a:latin typeface="Calibri"/>
+              </a:rPr>
+              <a:t>3</a:t>
+            </a:r>
+          </a:p>
+        </p:txBody>
+      </p:sp>
+      <p:sp>
+        <p:nvSpPr>
+          <p:cNvPr id="11" name="TextBox 10"/>
+          <p:cNvSpPr txBox="1"/>
+          <p:nvPr/>
+        </p:nvSpPr>
+        <p:spPr>
+          <a:xfrm>
+            <a:off x="1234440" y="4788408"/>
+            <a:ext cx="10408615" cy="1429512"/>
+          </a:xfrm>
+          <a:prstGeom prst="rect">
+            <a:avLst/>
+          </a:prstGeom>
+          <a:noFill/>
+        </p:spPr>
+        <p:txBody>
+          <a:bodyPr wrap="square" anchor="t" lIns="0" rIns="0" tIns="0" bIns="0"/>
+          <a:lstStyle/>
+          <a:p>
+            <a:pPr algn="l"/>
+            <a:r>
+              <a:rPr sz="1800" b="0" i="0">
+                <a:solidFill>
+                  <a:srgbClr val="54595D"/>
+                </a:solidFill>
+                <a:latin typeface="Calibri"/>
+              </a:rPr>
+              <a:t>Give one organisational policy that reduces risk.</a:t>
+            </a:r>
+          </a:p>
+          <a:p>
+            <a:r>
+              <a:rPr sz="1800" b="1">
+                <a:solidFill>
+                  <a:srgbClr val="03306E"/>
+                </a:solidFill>
+                <a:latin typeface="Calibri"/>
+              </a:rPr>
+              <a:t>E.g. backup, security, business continuity or disaster recovery policy.</a:t>
+            </a:r>
+          </a:p>
+        </p:txBody>
+      </p:sp>
+    </p:spTree>
+  </p:cSld>
+  <p:clrMapOvr>
+    <a:masterClrMapping/>
+  </p:clrMapOvr>
+</p:sld>
+</file>
+
+<file path=ppt/slides/slide12.xml><?xml version="1.0" encoding="utf-8"?>
+<p:sld xmlns:a="http://schemas.openxmlformats.org/drawingml/2006/main" xmlns:p="http://schemas.openxmlformats.org/presentationml/2006/main" xmlns:r="http://schemas.openxmlformats.org/officeDocument/2006/relationships">
+  <p:cSld>
+    <p:bg>
+      <p:bgPr>
+        <a:solidFill>
+          <a:srgbClr val="FFFFFF"/>
+        </a:solidFill>
+        <a:effectLst/>
+      </p:bgPr>
+    </p:bg>
+    <p:spTree>
+      <p:nvGrpSpPr>
+        <p:cNvPr id="1" name=""/>
+        <p:cNvGrpSpPr/>
+        <p:nvPr/>
+      </p:nvGrpSpPr>
+      <p:grpSpPr/>
+      <p:sp>
+        <p:nvSpPr>
+          <p:cNvPr id="2" name="TextBox 1"/>
+          <p:cNvSpPr txBox="1"/>
+          <p:nvPr/>
+        </p:nvSpPr>
+        <p:spPr>
+          <a:xfrm>
+            <a:off x="548640" y="320040"/>
+            <a:ext cx="11094415" cy="274320"/>
+          </a:xfrm>
+          <a:prstGeom prst="rect">
+            <a:avLst/>
+          </a:prstGeom>
+          <a:noFill/>
+        </p:spPr>
+        <p:txBody>
+          <a:bodyPr wrap="square" anchor="t" lIns="0" rIns="0" tIns="0" bIns="0"/>
+          <a:lstStyle/>
+          <a:p>
+            <a:pPr algn="l"/>
+            <a:r>
+              <a:rPr sz="1100" b="1" i="0">
+                <a:solidFill>
+                  <a:srgbClr val="54595D"/>
+                </a:solidFill>
+                <a:latin typeface="Calibri"/>
+              </a:rPr>
+              <a:t>OCCUPATIONAL SPECIALISM  ·  Specialism Content Area 2</a:t>
+            </a:r>
+          </a:p>
+        </p:txBody>
+      </p:sp>
+      <p:sp>
+        <p:nvSpPr>
+          <p:cNvPr id="3" name="TextBox 2"/>
+          <p:cNvSpPr txBox="1"/>
+          <p:nvPr/>
+        </p:nvSpPr>
+        <p:spPr>
+          <a:xfrm>
+            <a:off x="548640" y="566928"/>
+            <a:ext cx="11094415" cy="822960"/>
+          </a:xfrm>
+          <a:prstGeom prst="rect">
+            <a:avLst/>
+          </a:prstGeom>
+          <a:noFill/>
+        </p:spPr>
+        <p:txBody>
+          <a:bodyPr wrap="square" anchor="ctr" lIns="0" rIns="0" tIns="0" bIns="0"/>
+          <a:lstStyle/>
+          <a:p>
+            <a:pPr algn="l"/>
+            <a:r>
+              <a:rPr sz="3200" b="1" i="0">
+                <a:solidFill>
+                  <a:srgbClr val="03306E"/>
+                </a:solidFill>
+                <a:latin typeface="Cambria"/>
+              </a:rPr>
+              <a:t>Activity: Risk register</a:t>
+            </a:r>
+          </a:p>
+        </p:txBody>
+      </p:sp>
+      <p:sp>
+        <p:nvSpPr>
+          <p:cNvPr id="4" name="TextBox 3"/>
+          <p:cNvSpPr txBox="1"/>
+          <p:nvPr/>
+        </p:nvSpPr>
+        <p:spPr>
+          <a:xfrm>
+            <a:off x="548640" y="6446520"/>
+            <a:ext cx="8229600" cy="274320"/>
+          </a:xfrm>
+          <a:prstGeom prst="rect">
+            <a:avLst/>
+          </a:prstGeom>
+          <a:noFill/>
+        </p:spPr>
+        <p:txBody>
+          <a:bodyPr wrap="square" anchor="t" lIns="0" rIns="0" tIns="0" bIns="0"/>
+          <a:lstStyle/>
+          <a:p>
+            <a:pPr algn="l"/>
+            <a:r>
+              <a:rPr sz="1000" b="0" i="0">
+                <a:solidFill>
+                  <a:srgbClr val="54595D"/>
+                </a:solidFill>
+                <a:latin typeface="Calibri"/>
+              </a:rPr>
+              <a:t>Digital Software Development T Level  ·  Identifying and Managing Risk</a:t>
+            </a:r>
+          </a:p>
+        </p:txBody>
+      </p:sp>
+      <p:sp>
+        <p:nvSpPr>
+          <p:cNvPr id="5" name="TextBox 4"/>
+          <p:cNvSpPr txBox="1"/>
+          <p:nvPr/>
+        </p:nvSpPr>
+        <p:spPr>
+          <a:xfrm>
+            <a:off x="10728655" y="6446520"/>
+            <a:ext cx="914400" cy="274320"/>
+          </a:xfrm>
+          <a:prstGeom prst="rect">
+            <a:avLst/>
+          </a:prstGeom>
+          <a:noFill/>
+        </p:spPr>
+        <p:txBody>
+          <a:bodyPr wrap="square" anchor="t" lIns="0" rIns="0" tIns="0" bIns="0"/>
+          <a:lstStyle/>
+          <a:p>
+            <a:pPr algn="r"/>
+            <a:r>
+              <a:rPr sz="1000" b="0" i="0">
+                <a:solidFill>
+                  <a:srgbClr val="54595D"/>
+                </a:solidFill>
+                <a:latin typeface="Calibri"/>
+              </a:rPr>
+              <a:t>12</a:t>
+            </a:r>
+          </a:p>
+        </p:txBody>
+      </p:sp>
+      <p:sp>
+        <p:nvSpPr>
+          <p:cNvPr id="6" name="Rounded Rectangle 5"/>
+          <p:cNvSpPr/>
+          <p:nvPr/>
+        </p:nvSpPr>
+        <p:spPr>
+          <a:xfrm>
+            <a:off x="548640" y="1508760"/>
+            <a:ext cx="2011680" cy="457200"/>
+          </a:xfrm>
+          <a:prstGeom prst="roundRect">
+            <a:avLst>
+              <a:gd name="adj" fmla="val 50000"/>
+            </a:avLst>
+          </a:prstGeom>
+          <a:solidFill>
+            <a:srgbClr val="33C17A"/>
+          </a:solidFill>
+          <a:ln>
+            <a:noFill/>
+          </a:ln>
+          <a:effectLst/>
+        </p:spPr>
+        <p:style>
+          <a:lnRef idx="1">
+            <a:schemeClr val="accent1"/>
+          </a:lnRef>
+          <a:fillRef idx="3">
+            <a:schemeClr val="accent1"/>
+          </a:fillRef>
+          <a:effectRef idx="2">
+            <a:schemeClr val="accent1"/>
+          </a:effectRef>
+          <a:fontRef idx="minor">
+            <a:schemeClr val="lt1"/>
+          </a:fontRef>
+        </p:style>
+        <p:txBody>
+          <a:bodyPr rtlCol="0" anchor="ctr"/>
+          <a:lstStyle/>
+          <a:p/>
+        </p:txBody>
+      </p:sp>
+      <p:sp>
+        <p:nvSpPr>
+          <p:cNvPr id="7" name="TextBox 6"/>
+          <p:cNvSpPr txBox="1"/>
+          <p:nvPr/>
+        </p:nvSpPr>
+        <p:spPr>
+          <a:xfrm>
+            <a:off x="548640" y="1508760"/>
+            <a:ext cx="2011680" cy="457200"/>
+          </a:xfrm>
+          <a:prstGeom prst="rect">
+            <a:avLst/>
+          </a:prstGeom>
+          <a:noFill/>
+        </p:spPr>
+        <p:txBody>
+          <a:bodyPr wrap="square" anchor="ctr" lIns="0" rIns="0" tIns="0" bIns="0"/>
+          <a:lstStyle/>
+          <a:p>
+            <a:pPr algn="ctr"/>
+            <a:r>
+              <a:rPr sz="1400" b="1" i="0">
+                <a:solidFill>
+                  <a:srgbClr val="202122"/>
+                </a:solidFill>
+                <a:latin typeface="Calibri"/>
+              </a:rPr>
+              <a:t>25 minutes</a:t>
+            </a:r>
+          </a:p>
+        </p:txBody>
+      </p:sp>
+      <p:sp>
+        <p:nvSpPr>
+          <p:cNvPr id="8" name="TextBox 7"/>
+          <p:cNvSpPr txBox="1"/>
+          <p:nvPr/>
+        </p:nvSpPr>
+        <p:spPr>
+          <a:xfrm>
+            <a:off x="2743200" y="1508760"/>
+            <a:ext cx="4754880" cy="457200"/>
+          </a:xfrm>
+          <a:prstGeom prst="rect">
+            <a:avLst/>
+          </a:prstGeom>
+          <a:noFill/>
+        </p:spPr>
+        <p:txBody>
+          <a:bodyPr wrap="square" anchor="ctr" lIns="0" rIns="0" tIns="0" bIns="0"/>
+          <a:lstStyle/>
+          <a:p>
+            <a:pPr algn="l"/>
+            <a:r>
+              <a:rPr sz="1400" b="0" i="1">
+                <a:solidFill>
+                  <a:srgbClr val="54595D"/>
+                </a:solidFill>
+                <a:latin typeface="Calibri"/>
+              </a:rPr>
+              <a:t>Pairs</a:t>
+            </a:r>
+          </a:p>
+        </p:txBody>
+      </p:sp>
+      <p:sp>
+        <p:nvSpPr>
+          <p:cNvPr id="9" name="Oval 8"/>
+          <p:cNvSpPr/>
+          <p:nvPr/>
+        </p:nvSpPr>
+        <p:spPr>
+          <a:xfrm>
+            <a:off x="548640" y="2482596"/>
+            <a:ext cx="384048" cy="384048"/>
+          </a:xfrm>
+          <a:prstGeom prst="ellipse">
+            <a:avLst/>
+          </a:prstGeom>
+          <a:solidFill>
+            <a:srgbClr val="0645AD"/>
+          </a:solidFill>
+          <a:ln>
+            <a:noFill/>
+          </a:ln>
+          <a:effectLst/>
+        </p:spPr>
+        <p:style>
+          <a:lnRef idx="1">
+            <a:schemeClr val="accent1"/>
+          </a:lnRef>
+          <a:fillRef idx="3">
+            <a:schemeClr val="accent1"/>
+          </a:fillRef>
+          <a:effectRef idx="2">
+            <a:schemeClr val="accent1"/>
+          </a:effectRef>
+          <a:fontRef idx="minor">
+            <a:schemeClr val="lt1"/>
+          </a:fontRef>
+        </p:style>
+        <p:txBody>
+          <a:bodyPr rtlCol="0" anchor="ctr" lIns="0" rIns="0" tIns="0" bIns="0"/>
+          <a:lstStyle/>
+          <a:p>
+            <a:pPr algn="ctr"/>
+            <a:r>
+              <a:rPr sz="1300" b="1">
+                <a:solidFill>
+                  <a:srgbClr val="FFFFFF"/>
+                </a:solidFill>
+                <a:latin typeface="Calibri"/>
+              </a:rPr>
+              <a:t>1</a:t>
+            </a:r>
+          </a:p>
+        </p:txBody>
+      </p:sp>
+      <p:sp>
+        <p:nvSpPr>
+          <p:cNvPr id="10" name="TextBox 9"/>
+          <p:cNvSpPr txBox="1"/>
+          <p:nvPr/>
+        </p:nvSpPr>
+        <p:spPr>
+          <a:xfrm>
+            <a:off x="1143000" y="2240280"/>
+            <a:ext cx="5943600" cy="868680"/>
+          </a:xfrm>
+          <a:prstGeom prst="rect">
+            <a:avLst/>
+          </a:prstGeom>
+          <a:noFill/>
+        </p:spPr>
+        <p:txBody>
+          <a:bodyPr wrap="square" anchor="ctr" lIns="0" rIns="0" tIns="0" bIns="0"/>
+          <a:lstStyle/>
+          <a:p>
+            <a:pPr algn="l"/>
+            <a:r>
+              <a:rPr sz="1700" b="0" i="0">
+                <a:solidFill>
+                  <a:srgbClr val="202122"/>
+                </a:solidFill>
+                <a:latin typeface="Calibri"/>
+              </a:rPr>
+              <a:t>Build a risk register for a new online booking system.</a:t>
+            </a:r>
+          </a:p>
+        </p:txBody>
+      </p:sp>
+      <p:sp>
+        <p:nvSpPr>
+          <p:cNvPr id="11" name="Oval 10"/>
+          <p:cNvSpPr/>
+          <p:nvPr/>
+        </p:nvSpPr>
+        <p:spPr>
+          <a:xfrm>
+            <a:off x="548640" y="3461004"/>
+            <a:ext cx="384048" cy="384048"/>
+          </a:xfrm>
+          <a:prstGeom prst="ellipse">
+            <a:avLst/>
+          </a:prstGeom>
+          <a:solidFill>
+            <a:srgbClr val="0645AD"/>
+          </a:solidFill>
+          <a:ln>
+            <a:noFill/>
+          </a:ln>
+          <a:effectLst/>
+        </p:spPr>
+        <p:style>
+          <a:lnRef idx="1">
+            <a:schemeClr val="accent1"/>
+          </a:lnRef>
+          <a:fillRef idx="3">
+            <a:schemeClr val="accent1"/>
+          </a:fillRef>
+          <a:effectRef idx="2">
+            <a:schemeClr val="accent1"/>
+          </a:effectRef>
+          <a:fontRef idx="minor">
+            <a:schemeClr val="lt1"/>
+          </a:fontRef>
+        </p:style>
+        <p:txBody>
+          <a:bodyPr rtlCol="0" anchor="ctr" lIns="0" rIns="0" tIns="0" bIns="0"/>
+          <a:lstStyle/>
+          <a:p>
+            <a:pPr algn="ctr"/>
+            <a:r>
+              <a:rPr sz="1300" b="1">
+                <a:solidFill>
+                  <a:srgbClr val="FFFFFF"/>
+                </a:solidFill>
+                <a:latin typeface="Calibri"/>
+              </a:rPr>
+              <a:t>2</a:t>
+            </a:r>
+          </a:p>
+        </p:txBody>
+      </p:sp>
+      <p:sp>
+        <p:nvSpPr>
+          <p:cNvPr id="12" name="TextBox 11"/>
+          <p:cNvSpPr txBox="1"/>
+          <p:nvPr/>
+        </p:nvSpPr>
+        <p:spPr>
+          <a:xfrm>
+            <a:off x="1143000" y="3218688"/>
+            <a:ext cx="5943600" cy="868680"/>
+          </a:xfrm>
+          <a:prstGeom prst="rect">
+            <a:avLst/>
+          </a:prstGeom>
+          <a:noFill/>
+        </p:spPr>
+        <p:txBody>
+          <a:bodyPr wrap="square" anchor="ctr" lIns="0" rIns="0" tIns="0" bIns="0"/>
+          <a:lstStyle/>
+          <a:p>
+            <a:pPr algn="l"/>
+            <a:r>
+              <a:rPr sz="1700" b="0" i="0">
+                <a:solidFill>
+                  <a:srgbClr val="202122"/>
+                </a:solidFill>
+                <a:latin typeface="Calibri"/>
+              </a:rPr>
+              <a:t>Include at least six risks.</a:t>
+            </a:r>
+          </a:p>
+        </p:txBody>
+      </p:sp>
+      <p:sp>
+        <p:nvSpPr>
+          <p:cNvPr id="13" name="Oval 12"/>
+          <p:cNvSpPr/>
+          <p:nvPr/>
+        </p:nvSpPr>
+        <p:spPr>
+          <a:xfrm>
+            <a:off x="548640" y="4439412"/>
+            <a:ext cx="384048" cy="384048"/>
+          </a:xfrm>
+          <a:prstGeom prst="ellipse">
+            <a:avLst/>
+          </a:prstGeom>
+          <a:solidFill>
+            <a:srgbClr val="0645AD"/>
+          </a:solidFill>
+          <a:ln>
+            <a:noFill/>
+          </a:ln>
+          <a:effectLst/>
+        </p:spPr>
+        <p:style>
+          <a:lnRef idx="1">
+            <a:schemeClr val="accent1"/>
+          </a:lnRef>
+          <a:fillRef idx="3">
+            <a:schemeClr val="accent1"/>
+          </a:fillRef>
+          <a:effectRef idx="2">
+            <a:schemeClr val="accent1"/>
+          </a:effectRef>
+          <a:fontRef idx="minor">
+            <a:schemeClr val="lt1"/>
+          </a:fontRef>
+        </p:style>
+        <p:txBody>
+          <a:bodyPr rtlCol="0" anchor="ctr" lIns="0" rIns="0" tIns="0" bIns="0"/>
+          <a:lstStyle/>
+          <a:p>
+            <a:pPr algn="ctr"/>
+            <a:r>
+              <a:rPr sz="1300" b="1">
+                <a:solidFill>
+                  <a:srgbClr val="FFFFFF"/>
+                </a:solidFill>
+                <a:latin typeface="Calibri"/>
+              </a:rPr>
+              <a:t>3</a:t>
+            </a:r>
+          </a:p>
+        </p:txBody>
+      </p:sp>
+      <p:sp>
+        <p:nvSpPr>
+          <p:cNvPr id="14" name="TextBox 13"/>
+          <p:cNvSpPr txBox="1"/>
+          <p:nvPr/>
+        </p:nvSpPr>
+        <p:spPr>
+          <a:xfrm>
+            <a:off x="1143000" y="4197096"/>
+            <a:ext cx="5943600" cy="868680"/>
+          </a:xfrm>
+          <a:prstGeom prst="rect">
+            <a:avLst/>
+          </a:prstGeom>
+          <a:noFill/>
+        </p:spPr>
+        <p:txBody>
+          <a:bodyPr wrap="square" anchor="ctr" lIns="0" rIns="0" tIns="0" bIns="0"/>
+          <a:lstStyle/>
+          <a:p>
+            <a:pPr algn="l"/>
+            <a:r>
+              <a:rPr sz="1700" b="0" i="0">
+                <a:solidFill>
+                  <a:srgbClr val="202122"/>
+                </a:solidFill>
+                <a:latin typeface="Calibri"/>
+              </a:rPr>
+              <a:t>Score likelihood and seriousness from 1 to 5.</a:t>
+            </a:r>
+          </a:p>
+        </p:txBody>
+      </p:sp>
+      <p:sp>
+        <p:nvSpPr>
+          <p:cNvPr id="15" name="Oval 14"/>
+          <p:cNvSpPr/>
+          <p:nvPr/>
+        </p:nvSpPr>
+        <p:spPr>
+          <a:xfrm>
+            <a:off x="548640" y="5417820"/>
+            <a:ext cx="384048" cy="384048"/>
+          </a:xfrm>
+          <a:prstGeom prst="ellipse">
+            <a:avLst/>
+          </a:prstGeom>
+          <a:solidFill>
+            <a:srgbClr val="0645AD"/>
+          </a:solidFill>
+          <a:ln>
+            <a:noFill/>
+          </a:ln>
+          <a:effectLst/>
+        </p:spPr>
+        <p:style>
+          <a:lnRef idx="1">
+            <a:schemeClr val="accent1"/>
+          </a:lnRef>
+          <a:fillRef idx="3">
+            <a:schemeClr val="accent1"/>
+          </a:fillRef>
+          <a:effectRef idx="2">
+            <a:schemeClr val="accent1"/>
+          </a:effectRef>
+          <a:fontRef idx="minor">
+            <a:schemeClr val="lt1"/>
+          </a:fontRef>
+        </p:style>
+        <p:txBody>
+          <a:bodyPr rtlCol="0" anchor="ctr" lIns="0" rIns="0" tIns="0" bIns="0"/>
+          <a:lstStyle/>
+          <a:p>
+            <a:pPr algn="ctr"/>
+            <a:r>
+              <a:rPr sz="1300" b="1">
+                <a:solidFill>
+                  <a:srgbClr val="FFFFFF"/>
+                </a:solidFill>
+                <a:latin typeface="Calibri"/>
+              </a:rPr>
+              <a:t>4</a:t>
+            </a:r>
+          </a:p>
+        </p:txBody>
+      </p:sp>
+      <p:sp>
+        <p:nvSpPr>
+          <p:cNvPr id="16" name="TextBox 15"/>
+          <p:cNvSpPr txBox="1"/>
+          <p:nvPr/>
+        </p:nvSpPr>
+        <p:spPr>
+          <a:xfrm>
+            <a:off x="1143000" y="5175504"/>
+            <a:ext cx="5943600" cy="868680"/>
+          </a:xfrm>
+          <a:prstGeom prst="rect">
+            <a:avLst/>
+          </a:prstGeom>
+          <a:noFill/>
+        </p:spPr>
+        <p:txBody>
+          <a:bodyPr wrap="square" anchor="ctr" lIns="0" rIns="0" tIns="0" bIns="0"/>
+          <a:lstStyle/>
+          <a:p>
+            <a:pPr algn="l"/>
+            <a:r>
+              <a:rPr sz="1700" b="0" i="0">
+                <a:solidFill>
+                  <a:srgbClr val="202122"/>
+                </a:solidFill>
+                <a:latin typeface="Calibri"/>
+              </a:rPr>
+              <a:t>Add mitigation, contingency and an owner for each.</a:t>
+            </a:r>
+          </a:p>
+        </p:txBody>
+      </p:sp>
+      <p:sp>
+        <p:nvSpPr>
+          <p:cNvPr id="17" name="Rounded Rectangle 16"/>
+          <p:cNvSpPr/>
+          <p:nvPr/>
+        </p:nvSpPr>
+        <p:spPr>
+          <a:xfrm>
+            <a:off x="7772400" y="1508760"/>
+            <a:ext cx="3867912" cy="4572000"/>
+          </a:xfrm>
+          <a:prstGeom prst="roundRect">
+            <a:avLst>
+              <a:gd name="adj" fmla="val 8000"/>
+            </a:avLst>
+          </a:prstGeom>
+          <a:solidFill>
+            <a:srgbClr val="EAF3FF"/>
+          </a:solidFill>
+          <a:ln>
+            <a:noFill/>
+          </a:ln>
+          <a:effectLst/>
+        </p:spPr>
+        <p:style>
+          <a:lnRef idx="1">
+            <a:schemeClr val="accent1"/>
+          </a:lnRef>
+          <a:fillRef idx="3">
+            <a:schemeClr val="accent1"/>
+          </a:fillRef>
+          <a:effectRef idx="2">
+            <a:schemeClr val="accent1"/>
+          </a:effectRef>
+          <a:fontRef idx="minor">
+            <a:schemeClr val="lt1"/>
+          </a:fontRef>
+        </p:style>
+        <p:txBody>
+          <a:bodyPr rtlCol="0" anchor="ctr"/>
+          <a:lstStyle/>
+          <a:p/>
+        </p:txBody>
+      </p:sp>
+      <p:sp>
+        <p:nvSpPr>
+          <p:cNvPr id="18" name="TextBox 17"/>
+          <p:cNvSpPr txBox="1"/>
+          <p:nvPr/>
+        </p:nvSpPr>
+        <p:spPr>
+          <a:xfrm>
+            <a:off x="8046720" y="1737360"/>
+            <a:ext cx="3291840" cy="365760"/>
+          </a:xfrm>
+          <a:prstGeom prst="rect">
+            <a:avLst/>
+          </a:prstGeom>
+          <a:noFill/>
+        </p:spPr>
+        <p:txBody>
+          <a:bodyPr wrap="square" anchor="t" lIns="0" rIns="0" tIns="0" bIns="0"/>
+          <a:lstStyle/>
+          <a:p>
+            <a:pPr algn="l"/>
+            <a:r>
+              <a:rPr sz="1300" b="1" i="0">
+                <a:solidFill>
+                  <a:srgbClr val="0645AD"/>
+                </a:solidFill>
+                <a:latin typeface="Calibri"/>
+              </a:rPr>
+              <a:t>SUCCESS CRITERIA</a:t>
+            </a:r>
+          </a:p>
+        </p:txBody>
+      </p:sp>
+      <p:sp>
+        <p:nvSpPr>
+          <p:cNvPr id="19" name="TextBox 18"/>
+          <p:cNvSpPr txBox="1"/>
+          <p:nvPr/>
+        </p:nvSpPr>
+        <p:spPr>
+          <a:xfrm>
+            <a:off x="8046720" y="2240280"/>
+            <a:ext cx="3337560" cy="3657600"/>
+          </a:xfrm>
+          <a:prstGeom prst="rect">
+            <a:avLst/>
+          </a:prstGeom>
+          <a:noFill/>
+        </p:spPr>
+        <p:txBody>
+          <a:bodyPr wrap="square" lIns="0" rIns="0" tIns="0" bIns="0">
+            <a:spAutoFit/>
+          </a:bodyPr>
+          <a:lstStyle/>
+          <a:p>
+            <a:pPr marL="274320" indent="-274320">
+              <a:spcAft>
+                <a:spcPts val="810"/>
+              </a:spcAft>
+              <a:buClr>
+                <a:srgbClr val="0645AD"/>
+              </a:buClr>
+              <a:buFont typeface="Arial"/>
+              <a:buChar char="•"/>
+            </a:pPr>
+            <a:r>
+              <a:rPr sz="1800" b="0">
+                <a:solidFill>
+                  <a:srgbClr val="202122"/>
+                </a:solidFill>
+                <a:latin typeface="Calibri"/>
+              </a:rPr>
+              <a:t>Covers security, legal and user risks</a:t>
+            </a:r>
+          </a:p>
+          <a:p>
+            <a:pPr marL="274320" indent="-274320">
+              <a:spcAft>
+                <a:spcPts val="810"/>
+              </a:spcAft>
+              <a:buClr>
+                <a:srgbClr val="0645AD"/>
+              </a:buClr>
+              <a:buFont typeface="Arial"/>
+              <a:buChar char="•"/>
+            </a:pPr>
+            <a:r>
+              <a:rPr sz="1800" b="0">
+                <a:solidFill>
+                  <a:srgbClr val="202122"/>
+                </a:solidFill>
+                <a:latin typeface="Calibri"/>
+              </a:rPr>
+              <a:t>Scores justified</a:t>
+            </a:r>
+          </a:p>
+          <a:p>
+            <a:pPr marL="274320" indent="-274320">
+              <a:spcAft>
+                <a:spcPts val="810"/>
+              </a:spcAft>
+              <a:buClr>
+                <a:srgbClr val="0645AD"/>
+              </a:buClr>
+              <a:buFont typeface="Arial"/>
+              <a:buChar char="•"/>
+            </a:pPr>
+            <a:r>
+              <a:rPr sz="1800" b="0">
+                <a:solidFill>
+                  <a:srgbClr val="202122"/>
+                </a:solidFill>
+                <a:latin typeface="Calibri"/>
+              </a:rPr>
+              <a:t>Every risk has an owner</a:t>
+            </a:r>
+          </a:p>
+        </p:txBody>
+      </p:sp>
+    </p:spTree>
+  </p:cSld>
+  <p:clrMapOvr>
+    <a:masterClrMapping/>
+  </p:clrMapOvr>
+</p:sld>
+</file>
+
+<file path=ppt/slides/slide13.xml><?xml version="1.0" encoding="utf-8"?>
+<p:sld xmlns:a="http://schemas.openxmlformats.org/drawingml/2006/main" xmlns:p="http://schemas.openxmlformats.org/presentationml/2006/main" xmlns:r="http://schemas.openxmlformats.org/officeDocument/2006/relationships">
+  <p:cSld>
+    <p:bg>
+      <p:bgPr>
+        <a:solidFill>
+          <a:srgbClr val="03306E"/>
+        </a:solidFill>
+        <a:effectLst/>
+      </p:bgPr>
+    </p:bg>
+    <p:spTree>
+      <p:nvGrpSpPr>
+        <p:cNvPr id="1" name=""/>
+        <p:cNvGrpSpPr/>
+        <p:nvPr/>
+      </p:nvGrpSpPr>
+      <p:grpSpPr/>
+      <p:sp>
+        <p:nvSpPr>
+          <p:cNvPr id="2" name="TextBox 1"/>
+          <p:cNvSpPr txBox="1"/>
+          <p:nvPr/>
+        </p:nvSpPr>
+        <p:spPr>
+          <a:xfrm>
+            <a:off x="548640" y="320040"/>
+            <a:ext cx="11094415" cy="274320"/>
+          </a:xfrm>
+          <a:prstGeom prst="rect">
+            <a:avLst/>
+          </a:prstGeom>
+          <a:noFill/>
+        </p:spPr>
+        <p:txBody>
+          <a:bodyPr wrap="square" anchor="t" lIns="0" rIns="0" tIns="0" bIns="0"/>
+          <a:lstStyle/>
+          <a:p>
+            <a:pPr algn="l"/>
+            <a:r>
+              <a:rPr sz="1100" b="1" i="0">
+                <a:solidFill>
+                  <a:srgbClr val="A9C8F0"/>
+                </a:solidFill>
+                <a:latin typeface="Calibri"/>
+              </a:rPr>
+              <a:t>OCCUPATIONAL SPECIALISM  ·  Specialism Content Area 2</a:t>
+            </a:r>
+          </a:p>
+        </p:txBody>
+      </p:sp>
+      <p:sp>
+        <p:nvSpPr>
+          <p:cNvPr id="3" name="TextBox 2"/>
+          <p:cNvSpPr txBox="1"/>
+          <p:nvPr/>
+        </p:nvSpPr>
+        <p:spPr>
+          <a:xfrm>
+            <a:off x="548640" y="566928"/>
+            <a:ext cx="11094415" cy="822960"/>
+          </a:xfrm>
+          <a:prstGeom prst="rect">
+            <a:avLst/>
+          </a:prstGeom>
+          <a:noFill/>
+        </p:spPr>
+        <p:txBody>
+          <a:bodyPr wrap="square" anchor="ctr" lIns="0" rIns="0" tIns="0" bIns="0"/>
+          <a:lstStyle/>
+          <a:p>
+            <a:pPr algn="l"/>
+            <a:r>
+              <a:rPr sz="3200" b="1" i="0">
+                <a:solidFill>
+                  <a:srgbClr val="FFFFFF"/>
+                </a:solidFill>
+                <a:latin typeface="Cambria"/>
+              </a:rPr>
+              <a:t>Exit ticket</a:t>
+            </a:r>
+          </a:p>
+        </p:txBody>
+      </p:sp>
+      <p:sp>
+        <p:nvSpPr>
+          <p:cNvPr id="4" name="Oval 3"/>
+          <p:cNvSpPr/>
+          <p:nvPr/>
+        </p:nvSpPr>
+        <p:spPr>
+          <a:xfrm>
+            <a:off x="548640" y="1737360"/>
+            <a:ext cx="502920" cy="502920"/>
+          </a:xfrm>
+          <a:prstGeom prst="ellipse">
+            <a:avLst/>
+          </a:prstGeom>
+          <a:solidFill>
+            <a:srgbClr val="33C17A"/>
+          </a:solidFill>
+          <a:ln>
+            <a:noFill/>
+          </a:ln>
+          <a:effectLst/>
+        </p:spPr>
+        <p:style>
+          <a:lnRef idx="1">
+            <a:schemeClr val="accent1"/>
+          </a:lnRef>
+          <a:fillRef idx="3">
+            <a:schemeClr val="accent1"/>
+          </a:fillRef>
+          <a:effectRef idx="2">
+            <a:schemeClr val="accent1"/>
+          </a:effectRef>
+          <a:fontRef idx="minor">
+            <a:schemeClr val="lt1"/>
+          </a:fontRef>
+        </p:style>
+        <p:txBody>
+          <a:bodyPr rtlCol="0" anchor="ctr" lIns="0" rIns="0" tIns="0" bIns="0"/>
+          <a:lstStyle/>
+          <a:p>
+            <a:pPr algn="ctr"/>
+            <a:r>
+              <a:rPr sz="1700" b="1">
+                <a:solidFill>
+                  <a:srgbClr val="202122"/>
+                </a:solidFill>
+                <a:latin typeface="Calibri"/>
+              </a:rPr>
+              <a:t>1</a:t>
+            </a:r>
+          </a:p>
+        </p:txBody>
+      </p:sp>
+      <p:sp>
+        <p:nvSpPr>
+          <p:cNvPr id="5" name="TextBox 4"/>
+          <p:cNvSpPr txBox="1"/>
+          <p:nvPr/>
+        </p:nvSpPr>
+        <p:spPr>
+          <a:xfrm>
+            <a:off x="1325880" y="1645920"/>
+            <a:ext cx="6583680" cy="822960"/>
+          </a:xfrm>
+          <a:prstGeom prst="rect">
+            <a:avLst/>
+          </a:prstGeom>
+          <a:noFill/>
+        </p:spPr>
+        <p:txBody>
+          <a:bodyPr wrap="square" anchor="ctr" lIns="0" rIns="0" tIns="0" bIns="0"/>
+          <a:lstStyle/>
+          <a:p>
+            <a:pPr algn="l"/>
+            <a:r>
+              <a:rPr sz="2000" b="0" i="0">
+                <a:solidFill>
+                  <a:srgbClr val="FFFFFF"/>
+                </a:solidFill>
+                <a:latin typeface="Calibri"/>
+              </a:rPr>
+              <a:t>Which risk would stop you launching?</a:t>
+            </a:r>
+          </a:p>
+        </p:txBody>
+      </p:sp>
+      <p:sp>
+        <p:nvSpPr>
+          <p:cNvPr id="6" name="Oval 5"/>
+          <p:cNvSpPr/>
+          <p:nvPr/>
+        </p:nvSpPr>
+        <p:spPr>
+          <a:xfrm>
+            <a:off x="548640" y="2697480"/>
+            <a:ext cx="502920" cy="502920"/>
+          </a:xfrm>
+          <a:prstGeom prst="ellipse">
+            <a:avLst/>
+          </a:prstGeom>
+          <a:solidFill>
+            <a:srgbClr val="33C17A"/>
+          </a:solidFill>
+          <a:ln>
+            <a:noFill/>
+          </a:ln>
+          <a:effectLst/>
+        </p:spPr>
+        <p:style>
+          <a:lnRef idx="1">
+            <a:schemeClr val="accent1"/>
+          </a:lnRef>
+          <a:fillRef idx="3">
+            <a:schemeClr val="accent1"/>
+          </a:fillRef>
+          <a:effectRef idx="2">
+            <a:schemeClr val="accent1"/>
+          </a:effectRef>
+          <a:fontRef idx="minor">
+            <a:schemeClr val="lt1"/>
+          </a:fontRef>
+        </p:style>
+        <p:txBody>
+          <a:bodyPr rtlCol="0" anchor="ctr" lIns="0" rIns="0" tIns="0" bIns="0"/>
+          <a:lstStyle/>
+          <a:p>
+            <a:pPr algn="ctr"/>
+            <a:r>
+              <a:rPr sz="1700" b="1">
+                <a:solidFill>
+                  <a:srgbClr val="202122"/>
+                </a:solidFill>
+                <a:latin typeface="Calibri"/>
+              </a:rPr>
+              <a:t>2</a:t>
+            </a:r>
+          </a:p>
+        </p:txBody>
+      </p:sp>
+      <p:sp>
+        <p:nvSpPr>
+          <p:cNvPr id="7" name="TextBox 6"/>
+          <p:cNvSpPr txBox="1"/>
+          <p:nvPr/>
+        </p:nvSpPr>
+        <p:spPr>
+          <a:xfrm>
+            <a:off x="1325880" y="2606040"/>
+            <a:ext cx="6583680" cy="822960"/>
+          </a:xfrm>
+          <a:prstGeom prst="rect">
+            <a:avLst/>
+          </a:prstGeom>
+          <a:noFill/>
+        </p:spPr>
+        <p:txBody>
+          <a:bodyPr wrap="square" anchor="ctr" lIns="0" rIns="0" tIns="0" bIns="0"/>
+          <a:lstStyle/>
+          <a:p>
+            <a:pPr algn="l"/>
+            <a:r>
+              <a:rPr sz="2000" b="0" i="0">
+                <a:solidFill>
+                  <a:srgbClr val="FFFFFF"/>
+                </a:solidFill>
+                <a:latin typeface="Calibri"/>
+              </a:rPr>
+              <a:t>Why monitor risks after launch?</a:t>
+            </a:r>
+          </a:p>
+        </p:txBody>
+      </p:sp>
+      <p:sp>
+        <p:nvSpPr>
+          <p:cNvPr id="8" name="Oval 7"/>
+          <p:cNvSpPr/>
+          <p:nvPr/>
+        </p:nvSpPr>
+        <p:spPr>
+          <a:xfrm>
+            <a:off x="548640" y="3657600"/>
+            <a:ext cx="502920" cy="502920"/>
+          </a:xfrm>
+          <a:prstGeom prst="ellipse">
+            <a:avLst/>
+          </a:prstGeom>
+          <a:solidFill>
+            <a:srgbClr val="33C17A"/>
+          </a:solidFill>
+          <a:ln>
+            <a:noFill/>
+          </a:ln>
+          <a:effectLst/>
+        </p:spPr>
+        <p:style>
+          <a:lnRef idx="1">
+            <a:schemeClr val="accent1"/>
+          </a:lnRef>
+          <a:fillRef idx="3">
+            <a:schemeClr val="accent1"/>
+          </a:fillRef>
+          <a:effectRef idx="2">
+            <a:schemeClr val="accent1"/>
+          </a:effectRef>
+          <a:fontRef idx="minor">
+            <a:schemeClr val="lt1"/>
+          </a:fontRef>
+        </p:style>
+        <p:txBody>
+          <a:bodyPr rtlCol="0" anchor="ctr" lIns="0" rIns="0" tIns="0" bIns="0"/>
+          <a:lstStyle/>
+          <a:p>
+            <a:pPr algn="ctr"/>
+            <a:r>
+              <a:rPr sz="1700" b="1">
+                <a:solidFill>
+                  <a:srgbClr val="202122"/>
+                </a:solidFill>
+                <a:latin typeface="Calibri"/>
+              </a:rPr>
+              <a:t>3</a:t>
+            </a:r>
+          </a:p>
+        </p:txBody>
+      </p:sp>
+      <p:sp>
+        <p:nvSpPr>
+          <p:cNvPr id="9" name="TextBox 8"/>
+          <p:cNvSpPr txBox="1"/>
+          <p:nvPr/>
+        </p:nvSpPr>
+        <p:spPr>
+          <a:xfrm>
+            <a:off x="1325880" y="3566160"/>
+            <a:ext cx="6583680" cy="822960"/>
+          </a:xfrm>
+          <a:prstGeom prst="rect">
+            <a:avLst/>
+          </a:prstGeom>
+          <a:noFill/>
+        </p:spPr>
+        <p:txBody>
+          <a:bodyPr wrap="square" anchor="ctr" lIns="0" rIns="0" tIns="0" bIns="0"/>
+          <a:lstStyle/>
+          <a:p>
+            <a:pPr algn="l"/>
+            <a:r>
+              <a:rPr sz="2000" b="0" i="0">
+                <a:solidFill>
+                  <a:srgbClr val="FFFFFF"/>
+                </a:solidFill>
+                <a:latin typeface="Calibri"/>
+              </a:rPr>
+              <a:t>Give one reward that might justify a risk.</a:t>
+            </a:r>
+          </a:p>
+        </p:txBody>
+      </p:sp>
+      <p:sp>
+        <p:nvSpPr>
+          <p:cNvPr id="10" name="Rounded Rectangle 9"/>
+          <p:cNvSpPr/>
+          <p:nvPr/>
+        </p:nvSpPr>
+        <p:spPr>
+          <a:xfrm>
+            <a:off x="8229600" y="1645920"/>
+            <a:ext cx="3410712" cy="2926080"/>
+          </a:xfrm>
+          <a:prstGeom prst="roundRect">
+            <a:avLst>
+              <a:gd name="adj" fmla="val 8000"/>
+            </a:avLst>
+          </a:prstGeom>
+          <a:solidFill>
+            <a:srgbClr val="0645AD"/>
+          </a:solidFill>
+          <a:ln>
+            <a:noFill/>
+          </a:ln>
+          <a:effectLst/>
+        </p:spPr>
+        <p:style>
+          <a:lnRef idx="1">
+            <a:schemeClr val="accent1"/>
+          </a:lnRef>
+          <a:fillRef idx="3">
+            <a:schemeClr val="accent1"/>
+          </a:fillRef>
+          <a:effectRef idx="2">
+            <a:schemeClr val="accent1"/>
+          </a:effectRef>
+          <a:fontRef idx="minor">
+            <a:schemeClr val="lt1"/>
+          </a:fontRef>
+        </p:style>
+        <p:txBody>
+          <a:bodyPr rtlCol="0" anchor="ctr"/>
+          <a:lstStyle/>
+          <a:p/>
+        </p:txBody>
+      </p:sp>
+      <p:sp>
+        <p:nvSpPr>
+          <p:cNvPr id="11" name="TextBox 10"/>
+          <p:cNvSpPr txBox="1"/>
+          <p:nvPr/>
+        </p:nvSpPr>
+        <p:spPr>
+          <a:xfrm>
+            <a:off x="8503920" y="1874519"/>
+            <a:ext cx="2926080" cy="365760"/>
+          </a:xfrm>
+          <a:prstGeom prst="rect">
+            <a:avLst/>
+          </a:prstGeom>
+          <a:noFill/>
+        </p:spPr>
+        <p:txBody>
+          <a:bodyPr wrap="square" anchor="t" lIns="0" rIns="0" tIns="0" bIns="0"/>
+          <a:lstStyle/>
+          <a:p>
+            <a:pPr algn="l"/>
+            <a:r>
+              <a:rPr sz="1300" b="1" i="0">
+                <a:solidFill>
+                  <a:srgbClr val="A9C8F0"/>
+                </a:solidFill>
+                <a:latin typeface="Calibri"/>
+              </a:rPr>
+              <a:t>REVISE THIS TOPIC</a:t>
+            </a:r>
+          </a:p>
+        </p:txBody>
+      </p:sp>
+      <p:sp>
+        <p:nvSpPr>
+          <p:cNvPr id="12" name="TextBox 11"/>
+          <p:cNvSpPr txBox="1"/>
+          <p:nvPr/>
+        </p:nvSpPr>
+        <p:spPr>
+          <a:xfrm>
+            <a:off x="8503920" y="2286000"/>
+            <a:ext cx="2926080" cy="548640"/>
+          </a:xfrm>
+          <a:prstGeom prst="rect">
+            <a:avLst/>
+          </a:prstGeom>
+          <a:noFill/>
+        </p:spPr>
+        <p:txBody>
+          <a:bodyPr wrap="square" anchor="t" lIns="0" rIns="0" tIns="0" bIns="0"/>
+          <a:lstStyle/>
+          <a:p>
+            <a:pPr algn="l"/>
+            <a:r>
+              <a:rPr sz="1400" b="0" i="0">
+                <a:solidFill>
+                  <a:srgbClr val="FFFFFF"/>
+                </a:solidFill>
+                <a:latin typeface="Calibri"/>
+              </a:rPr>
+              <a:t>Revision notes for this lesson are on the study wiki:</a:t>
+            </a:r>
+          </a:p>
+        </p:txBody>
+      </p:sp>
+      <p:sp>
+        <p:nvSpPr>
+          <p:cNvPr id="13" name="TextBox 12"/>
+          <p:cNvSpPr txBox="1"/>
+          <p:nvPr/>
+        </p:nvSpPr>
+        <p:spPr>
+          <a:xfrm>
+            <a:off x="8503920" y="2926080"/>
+            <a:ext cx="2926080" cy="1463040"/>
+          </a:xfrm>
+          <a:prstGeom prst="rect">
+            <a:avLst/>
+          </a:prstGeom>
+          <a:noFill/>
+        </p:spPr>
+        <p:txBody>
+          <a:bodyPr wrap="square" anchor="t" lIns="0" rIns="0" tIns="0" bIns="0"/>
+          <a:lstStyle/>
+          <a:p>
+            <a:pPr algn="l"/>
+            <a:r>
+              <a:rPr sz="2000" b="1" i="0">
+                <a:solidFill>
+                  <a:srgbClr val="FFFFFF"/>
+                </a:solidFill>
+                <a:latin typeface="Cambria"/>
+              </a:rPr>
+              <a:t>Ethics and Risk</a:t>
+            </a:r>
+          </a:p>
+        </p:txBody>
+      </p:sp>
+      <p:sp>
+        <p:nvSpPr>
+          <p:cNvPr id="14" name="TextBox 13"/>
+          <p:cNvSpPr txBox="1"/>
+          <p:nvPr/>
+        </p:nvSpPr>
+        <p:spPr>
+          <a:xfrm>
+            <a:off x="548640" y="5669280"/>
+            <a:ext cx="11094415" cy="548640"/>
+          </a:xfrm>
+          <a:prstGeom prst="rect">
+            <a:avLst/>
+          </a:prstGeom>
+          <a:noFill/>
+        </p:spPr>
+        <p:txBody>
+          <a:bodyPr wrap="square" anchor="t" lIns="0" rIns="0" tIns="0" bIns="0"/>
+          <a:lstStyle/>
+          <a:p>
+            <a:pPr algn="l"/>
+            <a:r>
+              <a:rPr sz="1200" b="0" i="0">
+                <a:solidFill>
+                  <a:srgbClr val="A9C8F0"/>
+                </a:solidFill>
+                <a:latin typeface="Calibri"/>
+              </a:rPr>
+              <a:t>https://lana6478.github.io/T-level-Digital-Software-Development/#/02-occupational-specialism/02-ethics-and-risk.md</a:t>
+            </a:r>
+          </a:p>
+        </p:txBody>
+      </p:sp>
+    </p:spTree>
+  </p:cSld>
+  <p:clrMapOvr>
+    <a:masterClrMapping/>
+  </p:clrMapOvr>
+</p:sld>
+</file>
+
 <file path=ppt/slides/slide2.xml><?xml version="1.0" encoding="utf-8"?>
 <p:sld xmlns:a="http://schemas.openxmlformats.org/drawingml/2006/main" xmlns:p="http://schemas.openxmlformats.org/presentationml/2006/main" xmlns:r="http://schemas.openxmlformats.org/officeDocument/2006/relationships">
   <p:cSld>
@@ -4772,22 +7112,102 @@
       </p:sp>
       <p:sp>
         <p:nvSpPr>
-          <p:cNvPr id="6" name="Rounded Rectangle 5"/>
+          <p:cNvPr id="6" name="TextBox 5"/>
+          <p:cNvSpPr txBox="1"/>
+          <p:nvPr/>
+        </p:nvSpPr>
+        <p:spPr>
+          <a:xfrm>
+            <a:off x="548640" y="1554480"/>
+            <a:ext cx="6720840" cy="4617720"/>
+          </a:xfrm>
+          <a:prstGeom prst="rect">
+            <a:avLst/>
+          </a:prstGeom>
+          <a:noFill/>
+        </p:spPr>
+        <p:txBody>
+          <a:bodyPr wrap="square" lIns="0" rIns="0" tIns="0" bIns="0">
+            <a:spAutoFit/>
+          </a:bodyPr>
+          <a:lstStyle/>
+          <a:p>
+            <a:pPr>
+              <a:spcAft>
+                <a:spcPts val="1320"/>
+              </a:spcAft>
+            </a:pPr>
+            <a:r>
+              <a:rPr sz="2200" b="0">
+                <a:solidFill>
+                  <a:srgbClr val="202122"/>
+                </a:solidFill>
+                <a:latin typeface="Calibri"/>
+              </a:rPr>
+              <a:t>Software projects face many kinds of risk.</a:t>
+            </a:r>
+          </a:p>
+          <a:p>
+            <a:pPr>
+              <a:spcAft>
+                <a:spcPts val="1320"/>
+              </a:spcAft>
+            </a:pPr>
+            <a:r>
+              <a:rPr sz="2200" b="1">
+                <a:solidFill>
+                  <a:srgbClr val="202122"/>
+                </a:solidFill>
+                <a:latin typeface="Calibri"/>
+              </a:rPr>
+              <a:t>Security:</a:t>
+            </a:r>
+            <a:r>
+              <a:rPr sz="2200" b="0">
+                <a:solidFill>
+                  <a:srgbClr val="202122"/>
+                </a:solidFill>
+                <a:latin typeface="Calibri"/>
+              </a:rPr>
+              <a:t> data or systems damaged maliciously or by accident. Compatibility with other systems. Delivery: development taking too long, or failing to meet requirements and KPIs. Legal and ethical problems. Users: poor engagement or limited reach.</a:t>
+            </a:r>
+          </a:p>
+          <a:p>
+            <a:pPr>
+              <a:spcAft>
+                <a:spcPts val="1320"/>
+              </a:spcAft>
+            </a:pPr>
+            <a:r>
+              <a:rPr sz="2200" b="0">
+                <a:solidFill>
+                  <a:srgbClr val="202122"/>
+                </a:solidFill>
+                <a:latin typeface="Calibri"/>
+              </a:rPr>
+              <a:t>Each risk is assessed by weighing its likelihood against its seriousness and potential impact.</a:t>
+            </a:r>
+          </a:p>
+        </p:txBody>
+      </p:sp>
+      <p:sp>
+        <p:nvSpPr>
+          <p:cNvPr id="7" name="Rounded Rectangle 6"/>
           <p:cNvSpPr/>
           <p:nvPr/>
         </p:nvSpPr>
         <p:spPr>
           <a:xfrm>
-            <a:off x="548640" y="1600200"/>
-            <a:ext cx="3515258" cy="2148840"/>
+            <a:off x="7772400" y="1554480"/>
+            <a:ext cx="3867912" cy="4526280"/>
           </a:xfrm>
           <a:prstGeom prst="roundRect">
             <a:avLst>
-              <a:gd name="adj" fmla="val 6000"/>
+              <a:gd name="adj" fmla="val 8000"/>
             </a:avLst>
           </a:prstGeom>
           <a:solidFill>
-            <a:srgbClr val="EAF3FF"/>
+            <a:srgbClr val="03306E"/>
           </a:solidFill>
           <a:ln>
             <a:noFill/>
@@ -4816,14 +7236,14 @@
       </p:sp>
       <p:sp>
         <p:nvSpPr>
-          <p:cNvPr id="7" name="Oval 6"/>
+          <p:cNvPr id="8" name="Oval 7"/>
           <p:cNvSpPr/>
           <p:nvPr/>
         </p:nvSpPr>
         <p:spPr>
           <a:xfrm>
-            <a:off x="777240" y="1828800"/>
-            <a:ext cx="457200" cy="457200"/>
+            <a:off x="8046720" y="1828800"/>
+            <a:ext cx="548640" cy="548640"/>
           </a:xfrm>
           <a:prstGeom prst="ellipse">
             <a:avLst/>
@@ -4856,46 +7276,13 @@
           <a:p>
             <a:pPr algn="ctr"/>
             <a:r>
-              <a:rPr sz="1500" b="1">
+              <a:rPr sz="1300" b="1">
                 <a:solidFill>
                   <a:srgbClr val="202122"/>
                 </a:solidFill>
                 <a:latin typeface="Calibri"/>
               </a:rPr>
-              <a:t>1</a:t>
-            </a:r>
-          </a:p>
-        </p:txBody>
-      </p:sp>
-      <p:sp>
-        <p:nvSpPr>
-          <p:cNvPr id="8" name="TextBox 7"/>
-          <p:cNvSpPr txBox="1"/>
-          <p:nvPr/>
-        </p:nvSpPr>
-        <p:spPr>
-          <a:xfrm>
-            <a:off x="1371600" y="1801368"/>
-            <a:ext cx="2509418" cy="512064"/>
-          </a:xfrm>
-          <a:prstGeom prst="rect">
-            <a:avLst/>
-          </a:prstGeom>
-          <a:noFill/>
-        </p:spPr>
-        <p:txBody>
-          <a:bodyPr wrap="square" anchor="ctr" lIns="0" rIns="0" tIns="0" bIns="0"/>
-          <a:lstStyle/>
-          <a:p>
-            <a:pPr algn="l"/>
-            <a:r>
-              <a:rPr sz="1900" b="1" i="0">
-                <a:solidFill>
-                  <a:srgbClr val="03306E"/>
-                </a:solidFill>
-                <a:latin typeface="Calibri"/>
-              </a:rPr>
-              <a:t>Security</a:t>
+              <a:t>e.g.</a:t>
             </a:r>
           </a:p>
         </p:txBody>
@@ -4908,8 +7295,8 @@
         </p:nvSpPr>
         <p:spPr>
           <a:xfrm>
-            <a:off x="777240" y="2468880"/>
-            <a:ext cx="3058058" cy="1143000"/>
+            <a:off x="8046720" y="2560320"/>
+            <a:ext cx="3291840" cy="365760"/>
           </a:xfrm>
           <a:prstGeom prst="rect">
             <a:avLst/>
@@ -4922,124 +7309,27 @@
           <a:p>
             <a:pPr algn="l"/>
             <a:r>
-              <a:rPr sz="2000" b="0" i="0">
-                <a:solidFill>
-                  <a:srgbClr val="202122"/>
-                </a:solidFill>
-                <a:latin typeface="Calibri"/>
-              </a:rPr>
-              <a:t>Malicious or accidental damage to data and systems.</a:t>
-            </a:r>
-          </a:p>
-        </p:txBody>
-      </p:sp>
-      <p:sp>
-        <p:nvSpPr>
-          <p:cNvPr id="10" name="Rounded Rectangle 9"/>
-          <p:cNvSpPr/>
-          <p:nvPr/>
-        </p:nvSpPr>
-        <p:spPr>
-          <a:xfrm>
-            <a:off x="4338218" y="1600200"/>
-            <a:ext cx="3515258" cy="2148840"/>
-          </a:xfrm>
-          <a:prstGeom prst="roundRect">
-            <a:avLst>
-              <a:gd name="adj" fmla="val 6000"/>
-            </a:avLst>
-          </a:prstGeom>
-          <a:solidFill>
-            <a:srgbClr val="EAF3FF"/>
-          </a:solidFill>
-          <a:ln>
-            <a:noFill/>
-          </a:ln>
-          <a:effectLst/>
-        </p:spPr>
-        <p:style>
-          <a:lnRef idx="1">
-            <a:schemeClr val="accent1"/>
-          </a:lnRef>
-          <a:fillRef idx="3">
-            <a:schemeClr val="accent1"/>
-          </a:fillRef>
-          <a:effectRef idx="2">
-            <a:schemeClr val="accent1"/>
-          </a:effectRef>
-          <a:fontRef idx="minor">
-            <a:schemeClr val="lt1"/>
-          </a:fontRef>
-        </p:style>
-        <p:txBody>
-          <a:bodyPr rtlCol="0" anchor="ctr"/>
-          <a:lstStyle/>
-          <a:p/>
-        </p:txBody>
-      </p:sp>
-      <p:sp>
-        <p:nvSpPr>
-          <p:cNvPr id="11" name="Oval 10"/>
-          <p:cNvSpPr/>
-          <p:nvPr/>
-        </p:nvSpPr>
-        <p:spPr>
-          <a:xfrm>
-            <a:off x="4566818" y="1828800"/>
-            <a:ext cx="457200" cy="457200"/>
-          </a:xfrm>
-          <a:prstGeom prst="ellipse">
-            <a:avLst/>
-          </a:prstGeom>
-          <a:solidFill>
-            <a:srgbClr val="33C17A"/>
-          </a:solidFill>
-          <a:ln>
-            <a:noFill/>
-          </a:ln>
-          <a:effectLst/>
-        </p:spPr>
-        <p:style>
-          <a:lnRef idx="1">
-            <a:schemeClr val="accent1"/>
-          </a:lnRef>
-          <a:fillRef idx="3">
-            <a:schemeClr val="accent1"/>
-          </a:fillRef>
-          <a:effectRef idx="2">
-            <a:schemeClr val="accent1"/>
-          </a:effectRef>
-          <a:fontRef idx="minor">
-            <a:schemeClr val="lt1"/>
-          </a:fontRef>
-        </p:style>
-        <p:txBody>
-          <a:bodyPr rtlCol="0" anchor="ctr" lIns="0" rIns="0" tIns="0" bIns="0"/>
-          <a:lstStyle/>
-          <a:p>
-            <a:pPr algn="ctr"/>
-            <a:r>
-              <a:rPr sz="1500" b="1">
-                <a:solidFill>
-                  <a:srgbClr val="202122"/>
-                </a:solidFill>
-                <a:latin typeface="Calibri"/>
-              </a:rPr>
-              <a:t>2</a:t>
-            </a:r>
-          </a:p>
-        </p:txBody>
-      </p:sp>
-      <p:sp>
-        <p:nvSpPr>
-          <p:cNvPr id="12" name="TextBox 11"/>
+              <a:rPr sz="1300" b="1" i="0">
+                <a:solidFill>
+                  <a:srgbClr val="A9C8F0"/>
+                </a:solidFill>
+                <a:latin typeface="Calibri"/>
+              </a:rPr>
+              <a:t>EXAMPLE</a:t>
+            </a:r>
+          </a:p>
+        </p:txBody>
+      </p:sp>
+      <p:sp>
+        <p:nvSpPr>
+          <p:cNvPr id="10" name="TextBox 9"/>
           <p:cNvSpPr txBox="1"/>
           <p:nvPr/>
         </p:nvSpPr>
         <p:spPr>
           <a:xfrm>
-            <a:off x="5161178" y="1801368"/>
-            <a:ext cx="2509418" cy="512064"/>
+            <a:off x="8046720" y="2971800"/>
+            <a:ext cx="3291840" cy="2971800"/>
           </a:xfrm>
           <a:prstGeom prst="rect">
             <a:avLst/>
@@ -5047,540 +7337,18 @@
           <a:noFill/>
         </p:spPr>
         <p:txBody>
-          <a:bodyPr wrap="square" anchor="ctr" lIns="0" rIns="0" tIns="0" bIns="0"/>
+          <a:bodyPr wrap="square" anchor="t" lIns="0" rIns="0" tIns="0" bIns="0"/>
           <a:lstStyle/>
           <a:p>
             <a:pPr algn="l"/>
             <a:r>
-              <a:rPr sz="1900" b="1" i="0">
-                <a:solidFill>
-                  <a:srgbClr val="03306E"/>
-                </a:solidFill>
-                <a:latin typeface="Calibri"/>
-              </a:rPr>
-              <a:t>Compatibility</a:t>
-            </a:r>
-          </a:p>
-        </p:txBody>
-      </p:sp>
-      <p:sp>
-        <p:nvSpPr>
-          <p:cNvPr id="13" name="TextBox 12"/>
-          <p:cNvSpPr txBox="1"/>
-          <p:nvPr/>
-        </p:nvSpPr>
-        <p:spPr>
-          <a:xfrm>
-            <a:off x="4566818" y="2468880"/>
-            <a:ext cx="3058058" cy="1143000"/>
-          </a:xfrm>
-          <a:prstGeom prst="rect">
-            <a:avLst/>
-          </a:prstGeom>
-          <a:noFill/>
-        </p:spPr>
-        <p:txBody>
-          <a:bodyPr wrap="square" anchor="t" lIns="0" rIns="0" tIns="0" bIns="0"/>
-          <a:lstStyle/>
-          <a:p>
-            <a:pPr algn="l"/>
-            <a:r>
-              <a:rPr sz="2000" b="0" i="0">
-                <a:solidFill>
-                  <a:srgbClr val="202122"/>
-                </a:solidFill>
-                <a:latin typeface="Calibri"/>
-              </a:rPr>
-              <a:t>With other systems.</a:t>
-            </a:r>
-          </a:p>
-        </p:txBody>
-      </p:sp>
-      <p:sp>
-        <p:nvSpPr>
-          <p:cNvPr id="14" name="Rounded Rectangle 13"/>
-          <p:cNvSpPr/>
-          <p:nvPr/>
-        </p:nvSpPr>
-        <p:spPr>
-          <a:xfrm>
-            <a:off x="8127796" y="1600200"/>
-            <a:ext cx="3515258" cy="2148840"/>
-          </a:xfrm>
-          <a:prstGeom prst="roundRect">
-            <a:avLst>
-              <a:gd name="adj" fmla="val 6000"/>
-            </a:avLst>
-          </a:prstGeom>
-          <a:solidFill>
-            <a:srgbClr val="EAF3FF"/>
-          </a:solidFill>
-          <a:ln>
-            <a:noFill/>
-          </a:ln>
-          <a:effectLst/>
-        </p:spPr>
-        <p:style>
-          <a:lnRef idx="1">
-            <a:schemeClr val="accent1"/>
-          </a:lnRef>
-          <a:fillRef idx="3">
-            <a:schemeClr val="accent1"/>
-          </a:fillRef>
-          <a:effectRef idx="2">
-            <a:schemeClr val="accent1"/>
-          </a:effectRef>
-          <a:fontRef idx="minor">
-            <a:schemeClr val="lt1"/>
-          </a:fontRef>
-        </p:style>
-        <p:txBody>
-          <a:bodyPr rtlCol="0" anchor="ctr"/>
-          <a:lstStyle/>
-          <a:p/>
-        </p:txBody>
-      </p:sp>
-      <p:sp>
-        <p:nvSpPr>
-          <p:cNvPr id="15" name="Oval 14"/>
-          <p:cNvSpPr/>
-          <p:nvPr/>
-        </p:nvSpPr>
-        <p:spPr>
-          <a:xfrm>
-            <a:off x="8356396" y="1828800"/>
-            <a:ext cx="457200" cy="457200"/>
-          </a:xfrm>
-          <a:prstGeom prst="ellipse">
-            <a:avLst/>
-          </a:prstGeom>
-          <a:solidFill>
-            <a:srgbClr val="33C17A"/>
-          </a:solidFill>
-          <a:ln>
-            <a:noFill/>
-          </a:ln>
-          <a:effectLst/>
-        </p:spPr>
-        <p:style>
-          <a:lnRef idx="1">
-            <a:schemeClr val="accent1"/>
-          </a:lnRef>
-          <a:fillRef idx="3">
-            <a:schemeClr val="accent1"/>
-          </a:fillRef>
-          <a:effectRef idx="2">
-            <a:schemeClr val="accent1"/>
-          </a:effectRef>
-          <a:fontRef idx="minor">
-            <a:schemeClr val="lt1"/>
-          </a:fontRef>
-        </p:style>
-        <p:txBody>
-          <a:bodyPr rtlCol="0" anchor="ctr" lIns="0" rIns="0" tIns="0" bIns="0"/>
-          <a:lstStyle/>
-          <a:p>
-            <a:pPr algn="ctr"/>
-            <a:r>
-              <a:rPr sz="1500" b="1">
-                <a:solidFill>
-                  <a:srgbClr val="202122"/>
-                </a:solidFill>
-                <a:latin typeface="Calibri"/>
-              </a:rPr>
-              <a:t>3</a:t>
-            </a:r>
-          </a:p>
-        </p:txBody>
-      </p:sp>
-      <p:sp>
-        <p:nvSpPr>
-          <p:cNvPr id="16" name="TextBox 15"/>
-          <p:cNvSpPr txBox="1"/>
-          <p:nvPr/>
-        </p:nvSpPr>
-        <p:spPr>
-          <a:xfrm>
-            <a:off x="8950756" y="1801368"/>
-            <a:ext cx="2509418" cy="512064"/>
-          </a:xfrm>
-          <a:prstGeom prst="rect">
-            <a:avLst/>
-          </a:prstGeom>
-          <a:noFill/>
-        </p:spPr>
-        <p:txBody>
-          <a:bodyPr wrap="square" anchor="ctr" lIns="0" rIns="0" tIns="0" bIns="0"/>
-          <a:lstStyle/>
-          <a:p>
-            <a:pPr algn="l"/>
-            <a:r>
-              <a:rPr sz="1900" b="1" i="0">
-                <a:solidFill>
-                  <a:srgbClr val="03306E"/>
-                </a:solidFill>
-                <a:latin typeface="Calibri"/>
-              </a:rPr>
-              <a:t>Delivery</a:t>
-            </a:r>
-          </a:p>
-        </p:txBody>
-      </p:sp>
-      <p:sp>
-        <p:nvSpPr>
-          <p:cNvPr id="17" name="TextBox 16"/>
-          <p:cNvSpPr txBox="1"/>
-          <p:nvPr/>
-        </p:nvSpPr>
-        <p:spPr>
-          <a:xfrm>
-            <a:off x="8356396" y="2468880"/>
-            <a:ext cx="3058058" cy="1143000"/>
-          </a:xfrm>
-          <a:prstGeom prst="rect">
-            <a:avLst/>
-          </a:prstGeom>
-          <a:noFill/>
-        </p:spPr>
-        <p:txBody>
-          <a:bodyPr wrap="square" anchor="t" lIns="0" rIns="0" tIns="0" bIns="0"/>
-          <a:lstStyle/>
-          <a:p>
-            <a:pPr algn="l"/>
-            <a:r>
-              <a:rPr sz="2000" b="0" i="0">
-                <a:solidFill>
-                  <a:srgbClr val="202122"/>
-                </a:solidFill>
-                <a:latin typeface="Calibri"/>
-              </a:rPr>
-              <a:t>Speed of development; meeting requirements and KPIs.</a:t>
-            </a:r>
-          </a:p>
-        </p:txBody>
-      </p:sp>
-      <p:sp>
-        <p:nvSpPr>
-          <p:cNvPr id="18" name="Rounded Rectangle 17"/>
-          <p:cNvSpPr/>
-          <p:nvPr/>
-        </p:nvSpPr>
-        <p:spPr>
-          <a:xfrm>
-            <a:off x="548640" y="4023360"/>
-            <a:ext cx="3515258" cy="2148840"/>
-          </a:xfrm>
-          <a:prstGeom prst="roundRect">
-            <a:avLst>
-              <a:gd name="adj" fmla="val 6000"/>
-            </a:avLst>
-          </a:prstGeom>
-          <a:solidFill>
-            <a:srgbClr val="EAF3FF"/>
-          </a:solidFill>
-          <a:ln>
-            <a:noFill/>
-          </a:ln>
-          <a:effectLst/>
-        </p:spPr>
-        <p:style>
-          <a:lnRef idx="1">
-            <a:schemeClr val="accent1"/>
-          </a:lnRef>
-          <a:fillRef idx="3">
-            <a:schemeClr val="accent1"/>
-          </a:fillRef>
-          <a:effectRef idx="2">
-            <a:schemeClr val="accent1"/>
-          </a:effectRef>
-          <a:fontRef idx="minor">
-            <a:schemeClr val="lt1"/>
-          </a:fontRef>
-        </p:style>
-        <p:txBody>
-          <a:bodyPr rtlCol="0" anchor="ctr"/>
-          <a:lstStyle/>
-          <a:p/>
-        </p:txBody>
-      </p:sp>
-      <p:sp>
-        <p:nvSpPr>
-          <p:cNvPr id="19" name="Oval 18"/>
-          <p:cNvSpPr/>
-          <p:nvPr/>
-        </p:nvSpPr>
-        <p:spPr>
-          <a:xfrm>
-            <a:off x="777240" y="4251960"/>
-            <a:ext cx="457200" cy="457200"/>
-          </a:xfrm>
-          <a:prstGeom prst="ellipse">
-            <a:avLst/>
-          </a:prstGeom>
-          <a:solidFill>
-            <a:srgbClr val="33C17A"/>
-          </a:solidFill>
-          <a:ln>
-            <a:noFill/>
-          </a:ln>
-          <a:effectLst/>
-        </p:spPr>
-        <p:style>
-          <a:lnRef idx="1">
-            <a:schemeClr val="accent1"/>
-          </a:lnRef>
-          <a:fillRef idx="3">
-            <a:schemeClr val="accent1"/>
-          </a:fillRef>
-          <a:effectRef idx="2">
-            <a:schemeClr val="accent1"/>
-          </a:effectRef>
-          <a:fontRef idx="minor">
-            <a:schemeClr val="lt1"/>
-          </a:fontRef>
-        </p:style>
-        <p:txBody>
-          <a:bodyPr rtlCol="0" anchor="ctr" lIns="0" rIns="0" tIns="0" bIns="0"/>
-          <a:lstStyle/>
-          <a:p>
-            <a:pPr algn="ctr"/>
-            <a:r>
-              <a:rPr sz="1500" b="1">
-                <a:solidFill>
-                  <a:srgbClr val="202122"/>
-                </a:solidFill>
-                <a:latin typeface="Calibri"/>
-              </a:rPr>
-              <a:t>4</a:t>
-            </a:r>
-          </a:p>
-        </p:txBody>
-      </p:sp>
-      <p:sp>
-        <p:nvSpPr>
-          <p:cNvPr id="20" name="TextBox 19"/>
-          <p:cNvSpPr txBox="1"/>
-          <p:nvPr/>
-        </p:nvSpPr>
-        <p:spPr>
-          <a:xfrm>
-            <a:off x="1371600" y="4224528"/>
-            <a:ext cx="2509418" cy="512064"/>
-          </a:xfrm>
-          <a:prstGeom prst="rect">
-            <a:avLst/>
-          </a:prstGeom>
-          <a:noFill/>
-        </p:spPr>
-        <p:txBody>
-          <a:bodyPr wrap="square" anchor="ctr" lIns="0" rIns="0" tIns="0" bIns="0"/>
-          <a:lstStyle/>
-          <a:p>
-            <a:pPr algn="l"/>
-            <a:r>
-              <a:rPr sz="1900" b="1" i="0">
-                <a:solidFill>
-                  <a:srgbClr val="03306E"/>
-                </a:solidFill>
-                <a:latin typeface="Calibri"/>
-              </a:rPr>
-              <a:t>Legal and ethical</a:t>
-            </a:r>
-          </a:p>
-        </p:txBody>
-      </p:sp>
-      <p:sp>
-        <p:nvSpPr>
-          <p:cNvPr id="21" name="TextBox 20"/>
-          <p:cNvSpPr txBox="1"/>
-          <p:nvPr/>
-        </p:nvSpPr>
-        <p:spPr>
-          <a:xfrm>
-            <a:off x="777240" y="4892040"/>
-            <a:ext cx="3058058" cy="1143000"/>
-          </a:xfrm>
-          <a:prstGeom prst="rect">
-            <a:avLst/>
-          </a:prstGeom>
-          <a:noFill/>
-        </p:spPr>
-        <p:txBody>
-          <a:bodyPr wrap="square" anchor="t" lIns="0" rIns="0" tIns="0" bIns="0"/>
-          <a:lstStyle/>
-          <a:p>
-            <a:pPr algn="l"/>
-            <a:r>
-              <a:rPr sz="2000" b="0" i="0">
-                <a:solidFill>
-                  <a:srgbClr val="202122"/>
-                </a:solidFill>
-                <a:latin typeface="Calibri"/>
-              </a:rPr>
-              <a:t>Breaking laws or harming users.</a:t>
-            </a:r>
-          </a:p>
-        </p:txBody>
-      </p:sp>
-      <p:sp>
-        <p:nvSpPr>
-          <p:cNvPr id="22" name="Rounded Rectangle 21"/>
-          <p:cNvSpPr/>
-          <p:nvPr/>
-        </p:nvSpPr>
-        <p:spPr>
-          <a:xfrm>
-            <a:off x="4338218" y="4023360"/>
-            <a:ext cx="3515258" cy="2148840"/>
-          </a:xfrm>
-          <a:prstGeom prst="roundRect">
-            <a:avLst>
-              <a:gd name="adj" fmla="val 6000"/>
-            </a:avLst>
-          </a:prstGeom>
-          <a:solidFill>
-            <a:srgbClr val="EAF3FF"/>
-          </a:solidFill>
-          <a:ln>
-            <a:noFill/>
-          </a:ln>
-          <a:effectLst/>
-        </p:spPr>
-        <p:style>
-          <a:lnRef idx="1">
-            <a:schemeClr val="accent1"/>
-          </a:lnRef>
-          <a:fillRef idx="3">
-            <a:schemeClr val="accent1"/>
-          </a:fillRef>
-          <a:effectRef idx="2">
-            <a:schemeClr val="accent1"/>
-          </a:effectRef>
-          <a:fontRef idx="minor">
-            <a:schemeClr val="lt1"/>
-          </a:fontRef>
-        </p:style>
-        <p:txBody>
-          <a:bodyPr rtlCol="0" anchor="ctr"/>
-          <a:lstStyle/>
-          <a:p/>
-        </p:txBody>
-      </p:sp>
-      <p:sp>
-        <p:nvSpPr>
-          <p:cNvPr id="23" name="Oval 22"/>
-          <p:cNvSpPr/>
-          <p:nvPr/>
-        </p:nvSpPr>
-        <p:spPr>
-          <a:xfrm>
-            <a:off x="4566818" y="4251960"/>
-            <a:ext cx="457200" cy="457200"/>
-          </a:xfrm>
-          <a:prstGeom prst="ellipse">
-            <a:avLst/>
-          </a:prstGeom>
-          <a:solidFill>
-            <a:srgbClr val="33C17A"/>
-          </a:solidFill>
-          <a:ln>
-            <a:noFill/>
-          </a:ln>
-          <a:effectLst/>
-        </p:spPr>
-        <p:style>
-          <a:lnRef idx="1">
-            <a:schemeClr val="accent1"/>
-          </a:lnRef>
-          <a:fillRef idx="3">
-            <a:schemeClr val="accent1"/>
-          </a:fillRef>
-          <a:effectRef idx="2">
-            <a:schemeClr val="accent1"/>
-          </a:effectRef>
-          <a:fontRef idx="minor">
-            <a:schemeClr val="lt1"/>
-          </a:fontRef>
-        </p:style>
-        <p:txBody>
-          <a:bodyPr rtlCol="0" anchor="ctr" lIns="0" rIns="0" tIns="0" bIns="0"/>
-          <a:lstStyle/>
-          <a:p>
-            <a:pPr algn="ctr"/>
-            <a:r>
-              <a:rPr sz="1500" b="1">
-                <a:solidFill>
-                  <a:srgbClr val="202122"/>
-                </a:solidFill>
-                <a:latin typeface="Calibri"/>
-              </a:rPr>
-              <a:t>5</a:t>
-            </a:r>
-          </a:p>
-        </p:txBody>
-      </p:sp>
-      <p:sp>
-        <p:nvSpPr>
-          <p:cNvPr id="24" name="TextBox 23"/>
-          <p:cNvSpPr txBox="1"/>
-          <p:nvPr/>
-        </p:nvSpPr>
-        <p:spPr>
-          <a:xfrm>
-            <a:off x="5161178" y="4224528"/>
-            <a:ext cx="2509418" cy="512064"/>
-          </a:xfrm>
-          <a:prstGeom prst="rect">
-            <a:avLst/>
-          </a:prstGeom>
-          <a:noFill/>
-        </p:spPr>
-        <p:txBody>
-          <a:bodyPr wrap="square" anchor="ctr" lIns="0" rIns="0" tIns="0" bIns="0"/>
-          <a:lstStyle/>
-          <a:p>
-            <a:pPr algn="l"/>
-            <a:r>
-              <a:rPr sz="1900" b="1" i="0">
-                <a:solidFill>
-                  <a:srgbClr val="03306E"/>
-                </a:solidFill>
-                <a:latin typeface="Calibri"/>
-              </a:rPr>
-              <a:t>Users</a:t>
-            </a:r>
-          </a:p>
-        </p:txBody>
-      </p:sp>
-      <p:sp>
-        <p:nvSpPr>
-          <p:cNvPr id="25" name="TextBox 24"/>
-          <p:cNvSpPr txBox="1"/>
-          <p:nvPr/>
-        </p:nvSpPr>
-        <p:spPr>
-          <a:xfrm>
-            <a:off x="4566818" y="4892040"/>
-            <a:ext cx="3058058" cy="1143000"/>
-          </a:xfrm>
-          <a:prstGeom prst="rect">
-            <a:avLst/>
-          </a:prstGeom>
-          <a:noFill/>
-        </p:spPr>
-        <p:txBody>
-          <a:bodyPr wrap="square" anchor="t" lIns="0" rIns="0" tIns="0" bIns="0"/>
-          <a:lstStyle/>
-          <a:p>
-            <a:pPr algn="l"/>
-            <a:r>
-              <a:rPr sz="2000" b="0" i="0">
-                <a:solidFill>
-                  <a:srgbClr val="202122"/>
-                </a:solidFill>
-                <a:latin typeface="Calibri"/>
-              </a:rPr>
-              <a:t>Poor engagement or limited reach.</a:t>
+              <a:rPr sz="1900" b="0" i="0">
+                <a:solidFill>
+                  <a:srgbClr val="FFFFFF"/>
+                </a:solidFill>
+                <a:latin typeface="Cambria"/>
+              </a:rPr>
+              <a:t>A food delivery app risks: a data breach (security), failing on older phones (compatibility), missing launch day (delivery), and users not returning (engagement).</a:t>
             </a:r>
           </a:p>
         </p:txBody>
@@ -5672,7 +7440,7 @@
                 </a:solidFill>
                 <a:latin typeface="Cambria"/>
               </a:rPr>
-              <a:t>Managing risk</a:t>
+              <a:t>Risks to identify</a:t>
             </a:r>
           </a:p>
         </p:txBody>
@@ -5745,20 +7513,22 @@
       </p:sp>
       <p:sp>
         <p:nvSpPr>
-          <p:cNvPr id="6" name="Rectangle 5"/>
+          <p:cNvPr id="6" name="Rounded Rectangle 5"/>
           <p:cNvSpPr/>
           <p:nvPr/>
         </p:nvSpPr>
         <p:spPr>
           <a:xfrm>
-            <a:off x="1603217" y="2793492"/>
-            <a:ext cx="8985260" cy="36576"/>
-          </a:xfrm>
-          <a:prstGeom prst="rect">
-            <a:avLst/>
+            <a:off x="548640" y="1600200"/>
+            <a:ext cx="3515258" cy="2148840"/>
+          </a:xfrm>
+          <a:prstGeom prst="roundRect">
+            <a:avLst>
+              <a:gd name="adj" fmla="val 6000"/>
+            </a:avLst>
           </a:prstGeom>
           <a:solidFill>
-            <a:srgbClr val="A9C8F0"/>
+            <a:srgbClr val="EAF3FF"/>
           </a:solidFill>
           <a:ln>
             <a:noFill/>
@@ -5793,8 +7563,8 @@
         </p:nvSpPr>
         <p:spPr>
           <a:xfrm>
-            <a:off x="1283177" y="2491740"/>
-            <a:ext cx="640080" cy="640080"/>
+            <a:off x="777240" y="1828800"/>
+            <a:ext cx="457200" cy="457200"/>
           </a:xfrm>
           <a:prstGeom prst="ellipse">
             <a:avLst/>
@@ -5827,7 +7597,7 @@
           <a:p>
             <a:pPr algn="ctr"/>
             <a:r>
-              <a:rPr sz="2000" b="1">
+              <a:rPr sz="1500" b="1">
                 <a:solidFill>
                   <a:srgbClr val="202122"/>
                 </a:solidFill>
@@ -5846,8 +7616,8 @@
         </p:nvSpPr>
         <p:spPr>
           <a:xfrm>
-            <a:off x="548640" y="3268979"/>
-            <a:ext cx="2109155" cy="731520"/>
+            <a:off x="1371600" y="1801368"/>
+            <a:ext cx="2509418" cy="512064"/>
           </a:xfrm>
           <a:prstGeom prst="rect">
             <a:avLst/>
@@ -5855,32 +7625,65 @@
           <a:noFill/>
         </p:spPr>
         <p:txBody>
+          <a:bodyPr wrap="square" anchor="ctr" lIns="0" rIns="0" tIns="0" bIns="0"/>
+          <a:lstStyle/>
+          <a:p>
+            <a:pPr algn="l"/>
+            <a:r>
+              <a:rPr sz="1900" b="1" i="0">
+                <a:solidFill>
+                  <a:srgbClr val="03306E"/>
+                </a:solidFill>
+                <a:latin typeface="Calibri"/>
+              </a:rPr>
+              <a:t>Security</a:t>
+            </a:r>
+          </a:p>
+        </p:txBody>
+      </p:sp>
+      <p:sp>
+        <p:nvSpPr>
+          <p:cNvPr id="9" name="TextBox 8"/>
+          <p:cNvSpPr txBox="1"/>
+          <p:nvPr/>
+        </p:nvSpPr>
+        <p:spPr>
+          <a:xfrm>
+            <a:off x="777240" y="2468880"/>
+            <a:ext cx="3058058" cy="1143000"/>
+          </a:xfrm>
+          <a:prstGeom prst="rect">
+            <a:avLst/>
+          </a:prstGeom>
+          <a:noFill/>
+        </p:spPr>
+        <p:txBody>
           <a:bodyPr wrap="square" anchor="t" lIns="0" rIns="0" tIns="0" bIns="0"/>
           <a:lstStyle/>
           <a:p>
-            <a:pPr algn="ctr"/>
-            <a:r>
-              <a:rPr sz="1700" b="1" i="0">
-                <a:solidFill>
-                  <a:srgbClr val="03306E"/>
-                </a:solidFill>
-                <a:latin typeface="Calibri"/>
-              </a:rPr>
-              <a:t>Identify</a:t>
-            </a:r>
-          </a:p>
-        </p:txBody>
-      </p:sp>
-      <p:sp>
-        <p:nvSpPr>
-          <p:cNvPr id="9" name="Rounded Rectangle 8"/>
+            <a:pPr algn="l"/>
+            <a:r>
+              <a:rPr sz="2000" b="0" i="0">
+                <a:solidFill>
+                  <a:srgbClr val="202122"/>
+                </a:solidFill>
+                <a:latin typeface="Calibri"/>
+              </a:rPr>
+              <a:t>Malicious or accidental damage to data and systems.</a:t>
+            </a:r>
+          </a:p>
+        </p:txBody>
+      </p:sp>
+      <p:sp>
+        <p:nvSpPr>
+          <p:cNvPr id="10" name="Rounded Rectangle 9"/>
           <p:cNvSpPr/>
           <p:nvPr/>
         </p:nvSpPr>
         <p:spPr>
           <a:xfrm>
-            <a:off x="548640" y="4046220"/>
-            <a:ext cx="2109155" cy="1234439"/>
+            <a:off x="4338218" y="1600200"/>
+            <a:ext cx="3515258" cy="2148840"/>
           </a:xfrm>
           <a:prstGeom prst="roundRect">
             <a:avLst>
@@ -5917,47 +7720,14 @@
       </p:sp>
       <p:sp>
         <p:nvSpPr>
-          <p:cNvPr id="10" name="TextBox 9"/>
-          <p:cNvSpPr txBox="1"/>
-          <p:nvPr/>
-        </p:nvSpPr>
-        <p:spPr>
-          <a:xfrm>
-            <a:off x="685800" y="4183380"/>
-            <a:ext cx="1834835" cy="960119"/>
-          </a:xfrm>
-          <a:prstGeom prst="rect">
-            <a:avLst/>
-          </a:prstGeom>
-          <a:noFill/>
-        </p:spPr>
-        <p:txBody>
-          <a:bodyPr wrap="square" anchor="t" lIns="0" rIns="0" tIns="0" bIns="0"/>
-          <a:lstStyle/>
-          <a:p>
-            <a:pPr algn="l"/>
-            <a:r>
-              <a:rPr sz="1800" b="0" i="0">
-                <a:solidFill>
-                  <a:srgbClr val="202122"/>
-                </a:solidFill>
-                <a:latin typeface="Calibri"/>
-              </a:rPr>
-              <a:t>List the risks for the context and market.</a:t>
-            </a:r>
-          </a:p>
-        </p:txBody>
-      </p:sp>
-      <p:sp>
-        <p:nvSpPr>
           <p:cNvPr id="11" name="Oval 10"/>
           <p:cNvSpPr/>
           <p:nvPr/>
         </p:nvSpPr>
         <p:spPr>
           <a:xfrm>
-            <a:off x="3529492" y="2491740"/>
-            <a:ext cx="640080" cy="640080"/>
+            <a:off x="4566818" y="1828800"/>
+            <a:ext cx="457200" cy="457200"/>
           </a:xfrm>
           <a:prstGeom prst="ellipse">
             <a:avLst/>
@@ -5990,7 +7760,7 @@
           <a:p>
             <a:pPr algn="ctr"/>
             <a:r>
-              <a:rPr sz="2000" b="1">
+              <a:rPr sz="1500" b="1">
                 <a:solidFill>
                   <a:srgbClr val="202122"/>
                 </a:solidFill>
@@ -6009,8 +7779,8 @@
         </p:nvSpPr>
         <p:spPr>
           <a:xfrm>
-            <a:off x="2794955" y="3268979"/>
-            <a:ext cx="2109155" cy="731520"/>
+            <a:off x="5161178" y="1801368"/>
+            <a:ext cx="2509418" cy="512064"/>
           </a:xfrm>
           <a:prstGeom prst="rect">
             <a:avLst/>
@@ -6018,32 +7788,65 @@
           <a:noFill/>
         </p:spPr>
         <p:txBody>
+          <a:bodyPr wrap="square" anchor="ctr" lIns="0" rIns="0" tIns="0" bIns="0"/>
+          <a:lstStyle/>
+          <a:p>
+            <a:pPr algn="l"/>
+            <a:r>
+              <a:rPr sz="1900" b="1" i="0">
+                <a:solidFill>
+                  <a:srgbClr val="03306E"/>
+                </a:solidFill>
+                <a:latin typeface="Calibri"/>
+              </a:rPr>
+              <a:t>Compatibility</a:t>
+            </a:r>
+          </a:p>
+        </p:txBody>
+      </p:sp>
+      <p:sp>
+        <p:nvSpPr>
+          <p:cNvPr id="13" name="TextBox 12"/>
+          <p:cNvSpPr txBox="1"/>
+          <p:nvPr/>
+        </p:nvSpPr>
+        <p:spPr>
+          <a:xfrm>
+            <a:off x="4566818" y="2468880"/>
+            <a:ext cx="3058058" cy="1143000"/>
+          </a:xfrm>
+          <a:prstGeom prst="rect">
+            <a:avLst/>
+          </a:prstGeom>
+          <a:noFill/>
+        </p:spPr>
+        <p:txBody>
           <a:bodyPr wrap="square" anchor="t" lIns="0" rIns="0" tIns="0" bIns="0"/>
           <a:lstStyle/>
           <a:p>
-            <a:pPr algn="ctr"/>
-            <a:r>
-              <a:rPr sz="1700" b="1" i="0">
-                <a:solidFill>
-                  <a:srgbClr val="03306E"/>
-                </a:solidFill>
-                <a:latin typeface="Calibri"/>
-              </a:rPr>
-              <a:t>Assess</a:t>
-            </a:r>
-          </a:p>
-        </p:txBody>
-      </p:sp>
-      <p:sp>
-        <p:nvSpPr>
-          <p:cNvPr id="13" name="Rounded Rectangle 12"/>
+            <a:pPr algn="l"/>
+            <a:r>
+              <a:rPr sz="2000" b="0" i="0">
+                <a:solidFill>
+                  <a:srgbClr val="202122"/>
+                </a:solidFill>
+                <a:latin typeface="Calibri"/>
+              </a:rPr>
+              <a:t>With other systems.</a:t>
+            </a:r>
+          </a:p>
+        </p:txBody>
+      </p:sp>
+      <p:sp>
+        <p:nvSpPr>
+          <p:cNvPr id="14" name="Rounded Rectangle 13"/>
           <p:cNvSpPr/>
           <p:nvPr/>
         </p:nvSpPr>
         <p:spPr>
           <a:xfrm>
-            <a:off x="2794955" y="4046220"/>
-            <a:ext cx="2109155" cy="1234439"/>
+            <a:off x="8127796" y="1600200"/>
+            <a:ext cx="3515258" cy="2148840"/>
           </a:xfrm>
           <a:prstGeom prst="roundRect">
             <a:avLst>
@@ -6080,47 +7883,14 @@
       </p:sp>
       <p:sp>
         <p:nvSpPr>
-          <p:cNvPr id="14" name="TextBox 13"/>
-          <p:cNvSpPr txBox="1"/>
-          <p:nvPr/>
-        </p:nvSpPr>
-        <p:spPr>
-          <a:xfrm>
-            <a:off x="2932115" y="4183380"/>
-            <a:ext cx="1834835" cy="960119"/>
-          </a:xfrm>
-          <a:prstGeom prst="rect">
-            <a:avLst/>
-          </a:prstGeom>
-          <a:noFill/>
-        </p:spPr>
-        <p:txBody>
-          <a:bodyPr wrap="square" anchor="t" lIns="0" rIns="0" tIns="0" bIns="0"/>
-          <a:lstStyle/>
-          <a:p>
-            <a:pPr algn="l"/>
-            <a:r>
-              <a:rPr sz="1800" b="0" i="0">
-                <a:solidFill>
-                  <a:srgbClr val="202122"/>
-                </a:solidFill>
-                <a:latin typeface="Calibri"/>
-              </a:rPr>
-              <a:t>Likelihood against seriousness and impact.</a:t>
-            </a:r>
-          </a:p>
-        </p:txBody>
-      </p:sp>
-      <p:sp>
-        <p:nvSpPr>
           <p:cNvPr id="15" name="Oval 14"/>
           <p:cNvSpPr/>
           <p:nvPr/>
         </p:nvSpPr>
         <p:spPr>
           <a:xfrm>
-            <a:off x="5775807" y="2491740"/>
-            <a:ext cx="640080" cy="640080"/>
+            <a:off x="8356396" y="1828800"/>
+            <a:ext cx="457200" cy="457200"/>
           </a:xfrm>
           <a:prstGeom prst="ellipse">
             <a:avLst/>
@@ -6153,7 +7923,7 @@
           <a:p>
             <a:pPr algn="ctr"/>
             <a:r>
-              <a:rPr sz="2000" b="1">
+              <a:rPr sz="1500" b="1">
                 <a:solidFill>
                   <a:srgbClr val="202122"/>
                 </a:solidFill>
@@ -6172,8 +7942,8 @@
         </p:nvSpPr>
         <p:spPr>
           <a:xfrm>
-            <a:off x="5041270" y="3268979"/>
-            <a:ext cx="2109155" cy="731520"/>
+            <a:off x="8950756" y="1801368"/>
+            <a:ext cx="2509418" cy="512064"/>
           </a:xfrm>
           <a:prstGeom prst="rect">
             <a:avLst/>
@@ -6181,32 +7951,65 @@
           <a:noFill/>
         </p:spPr>
         <p:txBody>
+          <a:bodyPr wrap="square" anchor="ctr" lIns="0" rIns="0" tIns="0" bIns="0"/>
+          <a:lstStyle/>
+          <a:p>
+            <a:pPr algn="l"/>
+            <a:r>
+              <a:rPr sz="1900" b="1" i="0">
+                <a:solidFill>
+                  <a:srgbClr val="03306E"/>
+                </a:solidFill>
+                <a:latin typeface="Calibri"/>
+              </a:rPr>
+              <a:t>Delivery</a:t>
+            </a:r>
+          </a:p>
+        </p:txBody>
+      </p:sp>
+      <p:sp>
+        <p:nvSpPr>
+          <p:cNvPr id="17" name="TextBox 16"/>
+          <p:cNvSpPr txBox="1"/>
+          <p:nvPr/>
+        </p:nvSpPr>
+        <p:spPr>
+          <a:xfrm>
+            <a:off x="8356396" y="2468880"/>
+            <a:ext cx="3058058" cy="1143000"/>
+          </a:xfrm>
+          <a:prstGeom prst="rect">
+            <a:avLst/>
+          </a:prstGeom>
+          <a:noFill/>
+        </p:spPr>
+        <p:txBody>
           <a:bodyPr wrap="square" anchor="t" lIns="0" rIns="0" tIns="0" bIns="0"/>
           <a:lstStyle/>
           <a:p>
-            <a:pPr algn="ctr"/>
-            <a:r>
-              <a:rPr sz="1700" b="1" i="0">
-                <a:solidFill>
-                  <a:srgbClr val="03306E"/>
-                </a:solidFill>
-                <a:latin typeface="Calibri"/>
-              </a:rPr>
-              <a:t>Mitigate</a:t>
-            </a:r>
-          </a:p>
-        </p:txBody>
-      </p:sp>
-      <p:sp>
-        <p:nvSpPr>
-          <p:cNvPr id="17" name="Rounded Rectangle 16"/>
+            <a:pPr algn="l"/>
+            <a:r>
+              <a:rPr sz="2000" b="0" i="0">
+                <a:solidFill>
+                  <a:srgbClr val="202122"/>
+                </a:solidFill>
+                <a:latin typeface="Calibri"/>
+              </a:rPr>
+              <a:t>Speed of development; meeting requirements and KPIs.</a:t>
+            </a:r>
+          </a:p>
+        </p:txBody>
+      </p:sp>
+      <p:sp>
+        <p:nvSpPr>
+          <p:cNvPr id="18" name="Rounded Rectangle 17"/>
           <p:cNvSpPr/>
           <p:nvPr/>
         </p:nvSpPr>
         <p:spPr>
           <a:xfrm>
-            <a:off x="5041270" y="4046220"/>
-            <a:ext cx="2109155" cy="1234439"/>
+            <a:off x="548640" y="4023360"/>
+            <a:ext cx="3515258" cy="2148840"/>
           </a:xfrm>
           <a:prstGeom prst="roundRect">
             <a:avLst>
@@ -6243,47 +8046,14 @@
       </p:sp>
       <p:sp>
         <p:nvSpPr>
-          <p:cNvPr id="18" name="TextBox 17"/>
-          <p:cNvSpPr txBox="1"/>
-          <p:nvPr/>
-        </p:nvSpPr>
-        <p:spPr>
-          <a:xfrm>
-            <a:off x="5178430" y="4183380"/>
-            <a:ext cx="1834835" cy="960119"/>
-          </a:xfrm>
-          <a:prstGeom prst="rect">
-            <a:avLst/>
-          </a:prstGeom>
-          <a:noFill/>
-        </p:spPr>
-        <p:txBody>
-          <a:bodyPr wrap="square" anchor="t" lIns="0" rIns="0" tIns="0" bIns="0"/>
-          <a:lstStyle/>
-          <a:p>
-            <a:pPr algn="l"/>
-            <a:r>
-              <a:rPr sz="1800" b="0" i="0">
-                <a:solidFill>
-                  <a:srgbClr val="202122"/>
-                </a:solidFill>
-                <a:latin typeface="Calibri"/>
-              </a:rPr>
-              <a:t>Reduce the likelihood or impact.</a:t>
-            </a:r>
-          </a:p>
-        </p:txBody>
-      </p:sp>
-      <p:sp>
-        <p:nvSpPr>
           <p:cNvPr id="19" name="Oval 18"/>
           <p:cNvSpPr/>
           <p:nvPr/>
         </p:nvSpPr>
         <p:spPr>
           <a:xfrm>
-            <a:off x="8022122" y="2491740"/>
-            <a:ext cx="640080" cy="640080"/>
+            <a:off x="777240" y="4251960"/>
+            <a:ext cx="457200" cy="457200"/>
           </a:xfrm>
           <a:prstGeom prst="ellipse">
             <a:avLst/>
@@ -6316,7 +8086,7 @@
           <a:p>
             <a:pPr algn="ctr"/>
             <a:r>
-              <a:rPr sz="2000" b="1">
+              <a:rPr sz="1500" b="1">
                 <a:solidFill>
                   <a:srgbClr val="202122"/>
                 </a:solidFill>
@@ -6335,8 +8105,8 @@
         </p:nvSpPr>
         <p:spPr>
           <a:xfrm>
-            <a:off x="7287585" y="3268979"/>
-            <a:ext cx="2109155" cy="731520"/>
+            <a:off x="1371600" y="4224528"/>
+            <a:ext cx="2509418" cy="512064"/>
           </a:xfrm>
           <a:prstGeom prst="rect">
             <a:avLst/>
@@ -6344,32 +8114,65 @@
           <a:noFill/>
         </p:spPr>
         <p:txBody>
+          <a:bodyPr wrap="square" anchor="ctr" lIns="0" rIns="0" tIns="0" bIns="0"/>
+          <a:lstStyle/>
+          <a:p>
+            <a:pPr algn="l"/>
+            <a:r>
+              <a:rPr sz="1900" b="1" i="0">
+                <a:solidFill>
+                  <a:srgbClr val="03306E"/>
+                </a:solidFill>
+                <a:latin typeface="Calibri"/>
+              </a:rPr>
+              <a:t>Legal and ethical</a:t>
+            </a:r>
+          </a:p>
+        </p:txBody>
+      </p:sp>
+      <p:sp>
+        <p:nvSpPr>
+          <p:cNvPr id="21" name="TextBox 20"/>
+          <p:cNvSpPr txBox="1"/>
+          <p:nvPr/>
+        </p:nvSpPr>
+        <p:spPr>
+          <a:xfrm>
+            <a:off x="777240" y="4892040"/>
+            <a:ext cx="3058058" cy="1143000"/>
+          </a:xfrm>
+          <a:prstGeom prst="rect">
+            <a:avLst/>
+          </a:prstGeom>
+          <a:noFill/>
+        </p:spPr>
+        <p:txBody>
           <a:bodyPr wrap="square" anchor="t" lIns="0" rIns="0" tIns="0" bIns="0"/>
           <a:lstStyle/>
           <a:p>
-            <a:pPr algn="ctr"/>
-            <a:r>
-              <a:rPr sz="1700" b="1" i="0">
-                <a:solidFill>
-                  <a:srgbClr val="03306E"/>
-                </a:solidFill>
-                <a:latin typeface="Calibri"/>
-              </a:rPr>
-              <a:t>Contingency</a:t>
-            </a:r>
-          </a:p>
-        </p:txBody>
-      </p:sp>
-      <p:sp>
-        <p:nvSpPr>
-          <p:cNvPr id="21" name="Rounded Rectangle 20"/>
+            <a:pPr algn="l"/>
+            <a:r>
+              <a:rPr sz="2000" b="0" i="0">
+                <a:solidFill>
+                  <a:srgbClr val="202122"/>
+                </a:solidFill>
+                <a:latin typeface="Calibri"/>
+              </a:rPr>
+              <a:t>Breaking laws or harming users.</a:t>
+            </a:r>
+          </a:p>
+        </p:txBody>
+      </p:sp>
+      <p:sp>
+        <p:nvSpPr>
+          <p:cNvPr id="22" name="Rounded Rectangle 21"/>
           <p:cNvSpPr/>
           <p:nvPr/>
         </p:nvSpPr>
         <p:spPr>
           <a:xfrm>
-            <a:off x="7287585" y="4046220"/>
-            <a:ext cx="2109155" cy="1234439"/>
+            <a:off x="4338218" y="4023360"/>
+            <a:ext cx="3515258" cy="2148840"/>
           </a:xfrm>
           <a:prstGeom prst="roundRect">
             <a:avLst>
@@ -6406,47 +8209,14 @@
       </p:sp>
       <p:sp>
         <p:nvSpPr>
-          <p:cNvPr id="22" name="TextBox 21"/>
-          <p:cNvSpPr txBox="1"/>
-          <p:nvPr/>
-        </p:nvSpPr>
-        <p:spPr>
-          <a:xfrm>
-            <a:off x="7424745" y="4183380"/>
-            <a:ext cx="1834835" cy="960119"/>
-          </a:xfrm>
-          <a:prstGeom prst="rect">
-            <a:avLst/>
-          </a:prstGeom>
-          <a:noFill/>
-        </p:spPr>
-        <p:txBody>
-          <a:bodyPr wrap="square" anchor="t" lIns="0" rIns="0" tIns="0" bIns="0"/>
-          <a:lstStyle/>
-          <a:p>
-            <a:pPr algn="l"/>
-            <a:r>
-              <a:rPr sz="1800" b="0" i="0">
-                <a:solidFill>
-                  <a:srgbClr val="202122"/>
-                </a:solidFill>
-                <a:latin typeface="Calibri"/>
-              </a:rPr>
-              <a:t>Plan what happens if it occurs.</a:t>
-            </a:r>
-          </a:p>
-        </p:txBody>
-      </p:sp>
-      <p:sp>
-        <p:nvSpPr>
           <p:cNvPr id="23" name="Oval 22"/>
           <p:cNvSpPr/>
           <p:nvPr/>
         </p:nvSpPr>
         <p:spPr>
           <a:xfrm>
-            <a:off x="10268437" y="2491740"/>
-            <a:ext cx="640080" cy="640080"/>
+            <a:off x="4566818" y="4251960"/>
+            <a:ext cx="457200" cy="457200"/>
           </a:xfrm>
           <a:prstGeom prst="ellipse">
             <a:avLst/>
@@ -6479,7 +8249,7 @@
           <a:p>
             <a:pPr algn="ctr"/>
             <a:r>
-              <a:rPr sz="2000" b="1">
+              <a:rPr sz="1500" b="1">
                 <a:solidFill>
                   <a:srgbClr val="202122"/>
                 </a:solidFill>
@@ -6498,8 +8268,8 @@
         </p:nvSpPr>
         <p:spPr>
           <a:xfrm>
-            <a:off x="9533900" y="3268979"/>
-            <a:ext cx="2109155" cy="731520"/>
+            <a:off x="5161178" y="4224528"/>
+            <a:ext cx="2509418" cy="512064"/>
           </a:xfrm>
           <a:prstGeom prst="rect">
             <a:avLst/>
@@ -6507,95 +8277,51 @@
           <a:noFill/>
         </p:spPr>
         <p:txBody>
+          <a:bodyPr wrap="square" anchor="ctr" lIns="0" rIns="0" tIns="0" bIns="0"/>
+          <a:lstStyle/>
+          <a:p>
+            <a:pPr algn="l"/>
+            <a:r>
+              <a:rPr sz="1900" b="1" i="0">
+                <a:solidFill>
+                  <a:srgbClr val="03306E"/>
+                </a:solidFill>
+                <a:latin typeface="Calibri"/>
+              </a:rPr>
+              <a:t>Users</a:t>
+            </a:r>
+          </a:p>
+        </p:txBody>
+      </p:sp>
+      <p:sp>
+        <p:nvSpPr>
+          <p:cNvPr id="25" name="TextBox 24"/>
+          <p:cNvSpPr txBox="1"/>
+          <p:nvPr/>
+        </p:nvSpPr>
+        <p:spPr>
+          <a:xfrm>
+            <a:off x="4566818" y="4892040"/>
+            <a:ext cx="3058058" cy="1143000"/>
+          </a:xfrm>
+          <a:prstGeom prst="rect">
+            <a:avLst/>
+          </a:prstGeom>
+          <a:noFill/>
+        </p:spPr>
+        <p:txBody>
           <a:bodyPr wrap="square" anchor="t" lIns="0" rIns="0" tIns="0" bIns="0"/>
           <a:lstStyle/>
           <a:p>
-            <a:pPr algn="ctr"/>
-            <a:r>
-              <a:rPr sz="1700" b="1" i="0">
-                <a:solidFill>
-                  <a:srgbClr val="03306E"/>
-                </a:solidFill>
-                <a:latin typeface="Calibri"/>
-              </a:rPr>
-              <a:t>Monitor</a:t>
-            </a:r>
-          </a:p>
-        </p:txBody>
-      </p:sp>
-      <p:sp>
-        <p:nvSpPr>
-          <p:cNvPr id="25" name="Rounded Rectangle 24"/>
-          <p:cNvSpPr/>
-          <p:nvPr/>
-        </p:nvSpPr>
-        <p:spPr>
-          <a:xfrm>
-            <a:off x="9533900" y="4046220"/>
-            <a:ext cx="2109155" cy="1234439"/>
-          </a:xfrm>
-          <a:prstGeom prst="roundRect">
-            <a:avLst>
-              <a:gd name="adj" fmla="val 6000"/>
-            </a:avLst>
-          </a:prstGeom>
-          <a:solidFill>
-            <a:srgbClr val="EAF3FF"/>
-          </a:solidFill>
-          <a:ln>
-            <a:noFill/>
-          </a:ln>
-          <a:effectLst/>
-        </p:spPr>
-        <p:style>
-          <a:lnRef idx="1">
-            <a:schemeClr val="accent1"/>
-          </a:lnRef>
-          <a:fillRef idx="3">
-            <a:schemeClr val="accent1"/>
-          </a:fillRef>
-          <a:effectRef idx="2">
-            <a:schemeClr val="accent1"/>
-          </a:effectRef>
-          <a:fontRef idx="minor">
-            <a:schemeClr val="lt1"/>
-          </a:fontRef>
-        </p:style>
-        <p:txBody>
-          <a:bodyPr rtlCol="0" anchor="ctr"/>
-          <a:lstStyle/>
-          <a:p/>
-        </p:txBody>
-      </p:sp>
-      <p:sp>
-        <p:nvSpPr>
-          <p:cNvPr id="26" name="TextBox 25"/>
-          <p:cNvSpPr txBox="1"/>
-          <p:nvPr/>
-        </p:nvSpPr>
-        <p:spPr>
-          <a:xfrm>
-            <a:off x="9671060" y="4183380"/>
-            <a:ext cx="1834835" cy="960119"/>
-          </a:xfrm>
-          <a:prstGeom prst="rect">
-            <a:avLst/>
-          </a:prstGeom>
-          <a:noFill/>
-        </p:spPr>
-        <p:txBody>
-          <a:bodyPr wrap="square" anchor="t" lIns="0" rIns="0" tIns="0" bIns="0"/>
-          <a:lstStyle/>
-          <a:p>
             <a:pPr algn="l"/>
             <a:r>
-              <a:rPr sz="1800" b="0" i="0">
+              <a:rPr sz="2000" b="0" i="0">
                 <a:solidFill>
                   <a:srgbClr val="202122"/>
                 </a:solidFill>
                 <a:latin typeface="Calibri"/>
               </a:rPr>
-              <a:t>Keep checking.</a:t>
+              <a:t>Poor engagement or limited reach.</a:t>
             </a:r>
           </a:p>
         </p:txBody>
@@ -6687,7 +8413,7 @@
                 </a:solidFill>
                 <a:latin typeface="Cambria"/>
               </a:rPr>
-              <a:t>Organisational policies</a:t>
+              <a:t>Quick check: Risks to identify</a:t>
             </a:r>
           </a:p>
         </p:txBody>
@@ -6760,186 +8486,14 @@
       </p:sp>
       <p:sp>
         <p:nvSpPr>
-          <p:cNvPr id="6" name="TextBox 5"/>
-          <p:cNvSpPr txBox="1"/>
-          <p:nvPr/>
-        </p:nvSpPr>
-        <p:spPr>
-          <a:xfrm>
-            <a:off x="548640" y="1600200"/>
-            <a:ext cx="6675120" cy="4572000"/>
-          </a:xfrm>
-          <a:prstGeom prst="rect">
-            <a:avLst/>
-          </a:prstGeom>
-          <a:noFill/>
-        </p:spPr>
-        <p:txBody>
-          <a:bodyPr wrap="square" lIns="0" rIns="0" tIns="0" bIns="0">
-            <a:spAutoFit/>
-          </a:bodyPr>
-          <a:lstStyle/>
-          <a:p>
-            <a:pPr marL="274320" indent="-274320">
-              <a:spcAft>
-                <a:spcPts val="1080"/>
-              </a:spcAft>
-              <a:buClr>
-                <a:srgbClr val="0645AD"/>
-              </a:buClr>
-              <a:buFont typeface="Arial"/>
-              <a:buChar char="•"/>
-            </a:pPr>
-            <a:r>
-              <a:rPr sz="2400" b="0">
-                <a:solidFill>
-                  <a:srgbClr val="202122"/>
-                </a:solidFill>
-                <a:latin typeface="Calibri"/>
-              </a:rPr>
-              <a:t>Backup and security policies</a:t>
-            </a:r>
-          </a:p>
-          <a:p>
-            <a:pPr marL="274320" indent="-274320">
-              <a:spcAft>
-                <a:spcPts val="1080"/>
-              </a:spcAft>
-              <a:buClr>
-                <a:srgbClr val="0645AD"/>
-              </a:buClr>
-              <a:buFont typeface="Arial"/>
-              <a:buChar char="•"/>
-            </a:pPr>
-            <a:r>
-              <a:rPr sz="2400" b="0">
-                <a:solidFill>
-                  <a:srgbClr val="202122"/>
-                </a:solidFill>
-                <a:latin typeface="Calibri"/>
-              </a:rPr>
-              <a:t>Confidentiality, integrity and availability (CIA)</a:t>
-            </a:r>
-          </a:p>
-          <a:p>
-            <a:pPr marL="274320" indent="-274320">
-              <a:spcAft>
-                <a:spcPts val="1080"/>
-              </a:spcAft>
-              <a:buClr>
-                <a:srgbClr val="0645AD"/>
-              </a:buClr>
-              <a:buFont typeface="Arial"/>
-              <a:buChar char="•"/>
-            </a:pPr>
-            <a:r>
-              <a:rPr sz="2400" b="0">
-                <a:solidFill>
-                  <a:srgbClr val="202122"/>
-                </a:solidFill>
-                <a:latin typeface="Calibri"/>
-              </a:rPr>
-              <a:t>Personnel, skills and training</a:t>
-            </a:r>
-          </a:p>
-          <a:p>
-            <a:pPr marL="274320" indent="-274320">
-              <a:spcAft>
-                <a:spcPts val="1080"/>
-              </a:spcAft>
-              <a:buClr>
-                <a:srgbClr val="0645AD"/>
-              </a:buClr>
-              <a:buFont typeface="Arial"/>
-              <a:buChar char="•"/>
-            </a:pPr>
-            <a:r>
-              <a:rPr sz="2400" b="0">
-                <a:solidFill>
-                  <a:srgbClr val="202122"/>
-                </a:solidFill>
-                <a:latin typeface="Calibri"/>
-              </a:rPr>
-              <a:t>Business continuity planning</a:t>
-            </a:r>
-          </a:p>
-          <a:p>
-            <a:pPr marL="274320" indent="-274320">
-              <a:spcAft>
-                <a:spcPts val="1080"/>
-              </a:spcAft>
-              <a:buClr>
-                <a:srgbClr val="0645AD"/>
-              </a:buClr>
-              <a:buFont typeface="Arial"/>
-              <a:buChar char="•"/>
-            </a:pPr>
-            <a:r>
-              <a:rPr sz="2400" b="0">
-                <a:solidFill>
-                  <a:srgbClr val="202122"/>
-                </a:solidFill>
-                <a:latin typeface="Calibri"/>
-              </a:rPr>
-              <a:t>Disaster recovery planning</a:t>
-            </a:r>
-          </a:p>
-        </p:txBody>
-      </p:sp>
-      <p:sp>
-        <p:nvSpPr>
-          <p:cNvPr id="7" name="Rounded Rectangle 6"/>
+          <p:cNvPr id="6" name="Oval 5"/>
           <p:cNvSpPr/>
           <p:nvPr/>
         </p:nvSpPr>
         <p:spPr>
           <a:xfrm>
-            <a:off x="7772400" y="1600200"/>
-            <a:ext cx="3867912" cy="4434840"/>
-          </a:xfrm>
-          <a:prstGeom prst="roundRect">
-            <a:avLst>
-              <a:gd name="adj" fmla="val 8000"/>
-            </a:avLst>
-          </a:prstGeom>
-          <a:solidFill>
-            <a:srgbClr val="03306E"/>
-          </a:solidFill>
-          <a:ln>
-            <a:noFill/>
-          </a:ln>
-          <a:effectLst/>
-        </p:spPr>
-        <p:style>
-          <a:lnRef idx="1">
-            <a:schemeClr val="accent1"/>
-          </a:lnRef>
-          <a:fillRef idx="3">
-            <a:schemeClr val="accent1"/>
-          </a:fillRef>
-          <a:effectRef idx="2">
-            <a:schemeClr val="accent1"/>
-          </a:effectRef>
-          <a:fontRef idx="minor">
-            <a:schemeClr val="lt1"/>
-          </a:fontRef>
-        </p:style>
-        <p:txBody>
-          <a:bodyPr rtlCol="0" anchor="ctr"/>
-          <a:lstStyle/>
-          <a:p/>
-        </p:txBody>
-      </p:sp>
-      <p:sp>
-        <p:nvSpPr>
-          <p:cNvPr id="8" name="Oval 7"/>
-          <p:cNvSpPr/>
-          <p:nvPr/>
-        </p:nvSpPr>
-        <p:spPr>
-          <a:xfrm>
-            <a:off x="8046720" y="1874519"/>
-            <a:ext cx="548640" cy="548640"/>
+            <a:off x="548640" y="1691640"/>
+            <a:ext cx="502920" cy="502920"/>
           </a:xfrm>
           <a:prstGeom prst="ellipse">
             <a:avLst/>
@@ -6972,13 +8526,99 @@
           <a:p>
             <a:pPr algn="ctr"/>
             <a:r>
-              <a:rPr sz="2000" b="1">
+              <a:rPr sz="1600" b="1">
                 <a:solidFill>
                   <a:srgbClr val="202122"/>
                 </a:solidFill>
                 <a:latin typeface="Calibri"/>
               </a:rPr>
-              <a:t>!</a:t>
+              <a:t>1</a:t>
+            </a:r>
+          </a:p>
+        </p:txBody>
+      </p:sp>
+      <p:sp>
+        <p:nvSpPr>
+          <p:cNvPr id="7" name="TextBox 6"/>
+          <p:cNvSpPr txBox="1"/>
+          <p:nvPr/>
+        </p:nvSpPr>
+        <p:spPr>
+          <a:xfrm>
+            <a:off x="1371600" y="1645920"/>
+            <a:ext cx="10271455" cy="1188720"/>
+          </a:xfrm>
+          <a:prstGeom prst="rect">
+            <a:avLst/>
+          </a:prstGeom>
+          <a:noFill/>
+        </p:spPr>
+        <p:txBody>
+          <a:bodyPr wrap="square" anchor="t" lIns="0" rIns="0" tIns="0" bIns="0"/>
+          <a:lstStyle/>
+          <a:p>
+            <a:pPr algn="l"/>
+            <a:r>
+              <a:rPr sz="2400" b="0" i="0">
+                <a:solidFill>
+                  <a:srgbClr val="202122"/>
+                </a:solidFill>
+                <a:latin typeface="Calibri"/>
+              </a:rPr>
+              <a:t>Name three types of project risk.</a:t>
+            </a:r>
+          </a:p>
+        </p:txBody>
+      </p:sp>
+      <p:sp>
+        <p:nvSpPr>
+          <p:cNvPr id="8" name="Oval 7"/>
+          <p:cNvSpPr/>
+          <p:nvPr/>
+        </p:nvSpPr>
+        <p:spPr>
+          <a:xfrm>
+            <a:off x="548640" y="3108960"/>
+            <a:ext cx="502920" cy="502920"/>
+          </a:xfrm>
+          <a:prstGeom prst="ellipse">
+            <a:avLst/>
+          </a:prstGeom>
+          <a:solidFill>
+            <a:srgbClr val="33C17A"/>
+          </a:solidFill>
+          <a:ln>
+            <a:noFill/>
+          </a:ln>
+          <a:effectLst/>
+        </p:spPr>
+        <p:style>
+          <a:lnRef idx="1">
+            <a:schemeClr val="accent1"/>
+          </a:lnRef>
+          <a:fillRef idx="3">
+            <a:schemeClr val="accent1"/>
+          </a:fillRef>
+          <a:effectRef idx="2">
+            <a:schemeClr val="accent1"/>
+          </a:effectRef>
+          <a:fontRef idx="minor">
+            <a:schemeClr val="lt1"/>
+          </a:fontRef>
+        </p:style>
+        <p:txBody>
+          <a:bodyPr rtlCol="0" anchor="ctr" lIns="0" rIns="0" tIns="0" bIns="0"/>
+          <a:lstStyle/>
+          <a:p>
+            <a:pPr algn="ctr"/>
+            <a:r>
+              <a:rPr sz="1600" b="1">
+                <a:solidFill>
+                  <a:srgbClr val="202122"/>
+                </a:solidFill>
+                <a:latin typeface="Calibri"/>
+              </a:rPr>
+              <a:t>2</a:t>
             </a:r>
           </a:p>
         </p:txBody>
@@ -6991,8 +8631,8 @@
         </p:nvSpPr>
         <p:spPr>
           <a:xfrm>
-            <a:off x="8046720" y="2606040"/>
-            <a:ext cx="3291840" cy="365760"/>
+            <a:off x="1371600" y="3063240"/>
+            <a:ext cx="10271455" cy="1188720"/>
           </a:xfrm>
           <a:prstGeom prst="rect">
             <a:avLst/>
@@ -7005,27 +8645,80 @@
           <a:p>
             <a:pPr algn="l"/>
             <a:r>
-              <a:rPr sz="1300" b="1" i="0">
-                <a:solidFill>
-                  <a:srgbClr val="A9C8F0"/>
-                </a:solidFill>
-                <a:latin typeface="Calibri"/>
-              </a:rPr>
-              <a:t>KEY IDEA</a:t>
-            </a:r>
-          </a:p>
-        </p:txBody>
-      </p:sp>
-      <p:sp>
-        <p:nvSpPr>
-          <p:cNvPr id="10" name="TextBox 9"/>
+              <a:rPr sz="2400" b="0" i="0">
+                <a:solidFill>
+                  <a:srgbClr val="202122"/>
+                </a:solidFill>
+                <a:latin typeface="Calibri"/>
+              </a:rPr>
+              <a:t>How is a risk assessed?</a:t>
+            </a:r>
+          </a:p>
+        </p:txBody>
+      </p:sp>
+      <p:sp>
+        <p:nvSpPr>
+          <p:cNvPr id="10" name="Oval 9"/>
+          <p:cNvSpPr/>
+          <p:nvPr/>
+        </p:nvSpPr>
+        <p:spPr>
+          <a:xfrm>
+            <a:off x="548640" y="4526280"/>
+            <a:ext cx="502920" cy="502920"/>
+          </a:xfrm>
+          <a:prstGeom prst="ellipse">
+            <a:avLst/>
+          </a:prstGeom>
+          <a:solidFill>
+            <a:srgbClr val="33C17A"/>
+          </a:solidFill>
+          <a:ln>
+            <a:noFill/>
+          </a:ln>
+          <a:effectLst/>
+        </p:spPr>
+        <p:style>
+          <a:lnRef idx="1">
+            <a:schemeClr val="accent1"/>
+          </a:lnRef>
+          <a:fillRef idx="3">
+            <a:schemeClr val="accent1"/>
+          </a:fillRef>
+          <a:effectRef idx="2">
+            <a:schemeClr val="accent1"/>
+          </a:effectRef>
+          <a:fontRef idx="minor">
+            <a:schemeClr val="lt1"/>
+          </a:fontRef>
+        </p:style>
+        <p:txBody>
+          <a:bodyPr rtlCol="0" anchor="ctr" lIns="0" rIns="0" tIns="0" bIns="0"/>
+          <a:lstStyle/>
+          <a:p>
+            <a:pPr algn="ctr"/>
+            <a:r>
+              <a:rPr sz="1600" b="1">
+                <a:solidFill>
+                  <a:srgbClr val="202122"/>
+                </a:solidFill>
+                <a:latin typeface="Calibri"/>
+              </a:rPr>
+              <a:t>3</a:t>
+            </a:r>
+          </a:p>
+        </p:txBody>
+      </p:sp>
+      <p:sp>
+        <p:nvSpPr>
+          <p:cNvPr id="11" name="TextBox 10"/>
           <p:cNvSpPr txBox="1"/>
           <p:nvPr/>
         </p:nvSpPr>
         <p:spPr>
           <a:xfrm>
-            <a:off x="8046720" y="3017520"/>
-            <a:ext cx="3291840" cy="2926080"/>
+            <a:off x="1371600" y="4480560"/>
+            <a:ext cx="10271455" cy="1188720"/>
           </a:xfrm>
           <a:prstGeom prst="rect">
             <a:avLst/>
@@ -7038,13 +8731,46 @@
           <a:p>
             <a:pPr algn="l"/>
             <a:r>
-              <a:rPr sz="2200" b="0" i="0">
-                <a:solidFill>
-                  <a:srgbClr val="FFFFFF"/>
-                </a:solidFill>
-                <a:latin typeface="Cambria"/>
-              </a:rPr>
-              <a:t>Good decisions weigh risk against reward for the specific context and market.</a:t>
+              <a:rPr sz="2400" b="0" i="0">
+                <a:solidFill>
+                  <a:srgbClr val="202122"/>
+                </a:solidFill>
+                <a:latin typeface="Calibri"/>
+              </a:rPr>
+              <a:t>Give an example of a compatibility risk.</a:t>
+            </a:r>
+          </a:p>
+        </p:txBody>
+      </p:sp>
+      <p:sp>
+        <p:nvSpPr>
+          <p:cNvPr id="12" name="TextBox 11"/>
+          <p:cNvSpPr txBox="1"/>
+          <p:nvPr/>
+        </p:nvSpPr>
+        <p:spPr>
+          <a:xfrm>
+            <a:off x="548640" y="5852160"/>
+            <a:ext cx="11094415" cy="365760"/>
+          </a:xfrm>
+          <a:prstGeom prst="rect">
+            <a:avLst/>
+          </a:prstGeom>
+          <a:noFill/>
+        </p:spPr>
+        <p:txBody>
+          <a:bodyPr wrap="square" anchor="t" lIns="0" rIns="0" tIns="0" bIns="0"/>
+          <a:lstStyle/>
+          <a:p>
+            <a:pPr algn="l"/>
+            <a:r>
+              <a:rPr sz="1300" b="0" i="1">
+                <a:solidFill>
+                  <a:srgbClr val="54595D"/>
+                </a:solidFill>
+                <a:latin typeface="Calibri"/>
+              </a:rPr>
+              <a:t>Answer on mini whiteboards or in your book. Answers are in the speaker notes.</a:t>
             </a:r>
           </a:p>
         </p:txBody>
@@ -7136,7 +8862,7 @@
                 </a:solidFill>
                 <a:latin typeface="Cambria"/>
               </a:rPr>
-              <a:t>Check your understanding</a:t>
+              <a:t>Managing risk</a:t>
             </a:r>
           </a:p>
         </p:txBody>
@@ -7209,14 +8935,129 @@
       </p:sp>
       <p:sp>
         <p:nvSpPr>
-          <p:cNvPr id="6" name="Oval 5"/>
+          <p:cNvPr id="6" name="TextBox 5"/>
+          <p:cNvSpPr txBox="1"/>
+          <p:nvPr/>
+        </p:nvSpPr>
+        <p:spPr>
+          <a:xfrm>
+            <a:off x="548640" y="1554480"/>
+            <a:ext cx="6720840" cy="4617720"/>
+          </a:xfrm>
+          <a:prstGeom prst="rect">
+            <a:avLst/>
+          </a:prstGeom>
+          <a:noFill/>
+        </p:spPr>
+        <p:txBody>
+          <a:bodyPr wrap="square" lIns="0" rIns="0" tIns="0" bIns="0">
+            <a:spAutoFit/>
+          </a:bodyPr>
+          <a:lstStyle/>
+          <a:p>
+            <a:pPr>
+              <a:spcAft>
+                <a:spcPts val="1320"/>
+              </a:spcAft>
+            </a:pPr>
+            <a:r>
+              <a:rPr sz="2200" b="0">
+                <a:solidFill>
+                  <a:srgbClr val="202122"/>
+                </a:solidFill>
+                <a:latin typeface="Calibri"/>
+              </a:rPr>
+              <a:t>Risk management is a cycle.</a:t>
+            </a:r>
+          </a:p>
+          <a:p>
+            <a:pPr>
+              <a:spcAft>
+                <a:spcPts val="1320"/>
+              </a:spcAft>
+            </a:pPr>
+            <a:r>
+              <a:rPr sz="2200" b="0">
+                <a:solidFill>
+                  <a:srgbClr val="202122"/>
+                </a:solidFill>
+                <a:latin typeface="Calibri"/>
+              </a:rPr>
+              <a:t>Identify the risks for your specific context and market. Assess each for likelihood and seriousness. Mitigate: reduce the likelihood or impact. Plan contingencies: what you'll do if the risk happens. Monitor: keep checking, because risks change.</a:t>
+            </a:r>
+          </a:p>
+          <a:p>
+            <a:pPr>
+              <a:spcAft>
+                <a:spcPts val="1320"/>
+              </a:spcAft>
+            </a:pPr>
+            <a:r>
+              <a:rPr sz="2200" b="0">
+                <a:solidFill>
+                  <a:srgbClr val="202122"/>
+                </a:solidFill>
+                <a:latin typeface="Calibri"/>
+              </a:rPr>
+              <a:t>Organisations support this with policies for backup, security, the CIA triad, staff skills and training, business continuity and disaster recovery. Good decisions weigh risk against reward.</a:t>
+            </a:r>
+          </a:p>
+        </p:txBody>
+      </p:sp>
+      <p:sp>
+        <p:nvSpPr>
+          <p:cNvPr id="7" name="Rounded Rectangle 6"/>
           <p:cNvSpPr/>
           <p:nvPr/>
         </p:nvSpPr>
         <p:spPr>
           <a:xfrm>
-            <a:off x="548640" y="1618488"/>
-            <a:ext cx="411480" cy="411480"/>
+            <a:off x="7772400" y="1554480"/>
+            <a:ext cx="3867912" cy="4526280"/>
+          </a:xfrm>
+          <a:prstGeom prst="roundRect">
+            <a:avLst>
+              <a:gd name="adj" fmla="val 8000"/>
+            </a:avLst>
+          </a:prstGeom>
+          <a:solidFill>
+            <a:srgbClr val="03306E"/>
+          </a:solidFill>
+          <a:ln>
+            <a:noFill/>
+          </a:ln>
+          <a:effectLst/>
+        </p:spPr>
+        <p:style>
+          <a:lnRef idx="1">
+            <a:schemeClr val="accent1"/>
+          </a:lnRef>
+          <a:fillRef idx="3">
+            <a:schemeClr val="accent1"/>
+          </a:fillRef>
+          <a:effectRef idx="2">
+            <a:schemeClr val="accent1"/>
+          </a:effectRef>
+          <a:fontRef idx="minor">
+            <a:schemeClr val="lt1"/>
+          </a:fontRef>
+        </p:style>
+        <p:txBody>
+          <a:bodyPr rtlCol="0" anchor="ctr"/>
+          <a:lstStyle/>
+          <a:p/>
+        </p:txBody>
+      </p:sp>
+      <p:sp>
+        <p:nvSpPr>
+          <p:cNvPr id="8" name="Oval 7"/>
+          <p:cNvSpPr/>
+          <p:nvPr/>
+        </p:nvSpPr>
+        <p:spPr>
+          <a:xfrm>
+            <a:off x="8046720" y="1828800"/>
+            <a:ext cx="548640" cy="548640"/>
           </a:xfrm>
           <a:prstGeom prst="ellipse">
             <a:avLst/>
@@ -7249,99 +9090,13 @@
           <a:p>
             <a:pPr algn="ctr"/>
             <a:r>
-              <a:rPr sz="1400" b="1">
+              <a:rPr sz="1300" b="1">
                 <a:solidFill>
                   <a:srgbClr val="202122"/>
                 </a:solidFill>
                 <a:latin typeface="Calibri"/>
               </a:rPr>
-              <a:t>1</a:t>
-            </a:r>
-          </a:p>
-        </p:txBody>
-      </p:sp>
-      <p:sp>
-        <p:nvSpPr>
-          <p:cNvPr id="7" name="TextBox 6"/>
-          <p:cNvSpPr txBox="1"/>
-          <p:nvPr/>
-        </p:nvSpPr>
-        <p:spPr>
-          <a:xfrm>
-            <a:off x="1234440" y="1600200"/>
-            <a:ext cx="10408615" cy="1429512"/>
-          </a:xfrm>
-          <a:prstGeom prst="rect">
-            <a:avLst/>
-          </a:prstGeom>
-          <a:noFill/>
-        </p:spPr>
-        <p:txBody>
-          <a:bodyPr wrap="square" anchor="t" lIns="0" rIns="0" tIns="0" bIns="0"/>
-          <a:lstStyle/>
-          <a:p>
-            <a:pPr algn="l"/>
-            <a:r>
-              <a:rPr sz="2200" b="0" i="0">
-                <a:solidFill>
-                  <a:srgbClr val="202122"/>
-                </a:solidFill>
-                <a:latin typeface="Calibri"/>
-              </a:rPr>
-              <a:t>What two things are weighed in risk assessment?</a:t>
-            </a:r>
-          </a:p>
-        </p:txBody>
-      </p:sp>
-      <p:sp>
-        <p:nvSpPr>
-          <p:cNvPr id="8" name="Oval 7"/>
-          <p:cNvSpPr/>
-          <p:nvPr/>
-        </p:nvSpPr>
-        <p:spPr>
-          <a:xfrm>
-            <a:off x="548640" y="3212592"/>
-            <a:ext cx="411480" cy="411480"/>
-          </a:xfrm>
-          <a:prstGeom prst="ellipse">
-            <a:avLst/>
-          </a:prstGeom>
-          <a:solidFill>
-            <a:srgbClr val="33C17A"/>
-          </a:solidFill>
-          <a:ln>
-            <a:noFill/>
-          </a:ln>
-          <a:effectLst/>
-        </p:spPr>
-        <p:style>
-          <a:lnRef idx="1">
-            <a:schemeClr val="accent1"/>
-          </a:lnRef>
-          <a:fillRef idx="3">
-            <a:schemeClr val="accent1"/>
-          </a:fillRef>
-          <a:effectRef idx="2">
-            <a:schemeClr val="accent1"/>
-          </a:effectRef>
-          <a:fontRef idx="minor">
-            <a:schemeClr val="lt1"/>
-          </a:fontRef>
-        </p:style>
-        <p:txBody>
-          <a:bodyPr rtlCol="0" anchor="ctr" lIns="0" rIns="0" tIns="0" bIns="0"/>
-          <a:lstStyle/>
-          <a:p>
-            <a:pPr algn="ctr"/>
-            <a:r>
-              <a:rPr sz="1400" b="1">
-                <a:solidFill>
-                  <a:srgbClr val="202122"/>
-                </a:solidFill>
-                <a:latin typeface="Calibri"/>
-              </a:rPr>
-              <a:t>2</a:t>
+              <a:t>e.g.</a:t>
             </a:r>
           </a:p>
         </p:txBody>
@@ -7354,8 +9109,8 @@
         </p:nvSpPr>
         <p:spPr>
           <a:xfrm>
-            <a:off x="1234440" y="3194304"/>
-            <a:ext cx="10408615" cy="1429512"/>
+            <a:off x="8046720" y="2560320"/>
+            <a:ext cx="3291840" cy="365760"/>
           </a:xfrm>
           <a:prstGeom prst="rect">
             <a:avLst/>
@@ -7368,80 +9123,27 @@
           <a:p>
             <a:pPr algn="l"/>
             <a:r>
-              <a:rPr sz="2200" b="0" i="0">
-                <a:solidFill>
-                  <a:srgbClr val="202122"/>
-                </a:solidFill>
-                <a:latin typeface="Calibri"/>
-              </a:rPr>
-              <a:t>What is a contingency plan?</a:t>
-            </a:r>
-          </a:p>
-        </p:txBody>
-      </p:sp>
-      <p:sp>
-        <p:nvSpPr>
-          <p:cNvPr id="10" name="Oval 9"/>
-          <p:cNvSpPr/>
-          <p:nvPr/>
-        </p:nvSpPr>
-        <p:spPr>
-          <a:xfrm>
-            <a:off x="548640" y="4806695"/>
-            <a:ext cx="411480" cy="411480"/>
-          </a:xfrm>
-          <a:prstGeom prst="ellipse">
-            <a:avLst/>
-          </a:prstGeom>
-          <a:solidFill>
-            <a:srgbClr val="33C17A"/>
-          </a:solidFill>
-          <a:ln>
-            <a:noFill/>
-          </a:ln>
-          <a:effectLst/>
-        </p:spPr>
-        <p:style>
-          <a:lnRef idx="1">
-            <a:schemeClr val="accent1"/>
-          </a:lnRef>
-          <a:fillRef idx="3">
-            <a:schemeClr val="accent1"/>
-          </a:fillRef>
-          <a:effectRef idx="2">
-            <a:schemeClr val="accent1"/>
-          </a:effectRef>
-          <a:fontRef idx="minor">
-            <a:schemeClr val="lt1"/>
-          </a:fontRef>
-        </p:style>
-        <p:txBody>
-          <a:bodyPr rtlCol="0" anchor="ctr" lIns="0" rIns="0" tIns="0" bIns="0"/>
-          <a:lstStyle/>
-          <a:p>
-            <a:pPr algn="ctr"/>
-            <a:r>
-              <a:rPr sz="1400" b="1">
-                <a:solidFill>
-                  <a:srgbClr val="202122"/>
-                </a:solidFill>
-                <a:latin typeface="Calibri"/>
-              </a:rPr>
-              <a:t>3</a:t>
-            </a:r>
-          </a:p>
-        </p:txBody>
-      </p:sp>
-      <p:sp>
-        <p:nvSpPr>
-          <p:cNvPr id="11" name="TextBox 10"/>
+              <a:rPr sz="1300" b="1" i="0">
+                <a:solidFill>
+                  <a:srgbClr val="A9C8F0"/>
+                </a:solidFill>
+                <a:latin typeface="Calibri"/>
+              </a:rPr>
+              <a:t>EXAMPLE</a:t>
+            </a:r>
+          </a:p>
+        </p:txBody>
+      </p:sp>
+      <p:sp>
+        <p:nvSpPr>
+          <p:cNvPr id="10" name="TextBox 9"/>
           <p:cNvSpPr txBox="1"/>
           <p:nvPr/>
         </p:nvSpPr>
         <p:spPr>
           <a:xfrm>
-            <a:off x="1234440" y="4788408"/>
-            <a:ext cx="10408615" cy="1429512"/>
+            <a:off x="8046720" y="2971800"/>
+            <a:ext cx="3291840" cy="2971800"/>
           </a:xfrm>
           <a:prstGeom prst="rect">
             <a:avLst/>
@@ -7454,13 +9156,13 @@
           <a:p>
             <a:pPr algn="l"/>
             <a:r>
-              <a:rPr sz="2200" b="0" i="0">
-                <a:solidFill>
-                  <a:srgbClr val="202122"/>
-                </a:solidFill>
-                <a:latin typeface="Calibri"/>
-              </a:rPr>
-              <a:t>Give one organisational policy that reduces risk.</a:t>
+              <a:rPr sz="1900" b="0" i="0">
+                <a:solidFill>
+                  <a:srgbClr val="FFFFFF"/>
+                </a:solidFill>
+                <a:latin typeface="Cambria"/>
+              </a:rPr>
+              <a:t>Risk: the payment provider goes down. Mitigation: use a reliable provider. Contingency: a second provider ready to switch to. Monitoring: uptime alerts.</a:t>
             </a:r>
           </a:p>
         </p:txBody>
@@ -7552,7 +9254,7 @@
                 </a:solidFill>
                 <a:latin typeface="Cambria"/>
               </a:rPr>
-              <a:t>Answers</a:t>
+              <a:t>Managing risk</a:t>
             </a:r>
           </a:p>
         </p:txBody>
@@ -7625,14 +9327,56 @@
       </p:sp>
       <p:sp>
         <p:nvSpPr>
-          <p:cNvPr id="6" name="Oval 5"/>
+          <p:cNvPr id="6" name="Rectangle 5"/>
           <p:cNvSpPr/>
           <p:nvPr/>
         </p:nvSpPr>
         <p:spPr>
           <a:xfrm>
-            <a:off x="548640" y="1618488"/>
-            <a:ext cx="411480" cy="411480"/>
+            <a:off x="1603217" y="2793492"/>
+            <a:ext cx="8985260" cy="36576"/>
+          </a:xfrm>
+          <a:prstGeom prst="rect">
+            <a:avLst/>
+          </a:prstGeom>
+          <a:solidFill>
+            <a:srgbClr val="A9C8F0"/>
+          </a:solidFill>
+          <a:ln>
+            <a:noFill/>
+          </a:ln>
+          <a:effectLst/>
+        </p:spPr>
+        <p:style>
+          <a:lnRef idx="1">
+            <a:schemeClr val="accent1"/>
+          </a:lnRef>
+          <a:fillRef idx="3">
+            <a:schemeClr val="accent1"/>
+          </a:fillRef>
+          <a:effectRef idx="2">
+            <a:schemeClr val="accent1"/>
+          </a:effectRef>
+          <a:fontRef idx="minor">
+            <a:schemeClr val="lt1"/>
+          </a:fontRef>
+        </p:style>
+        <p:txBody>
+          <a:bodyPr rtlCol="0" anchor="ctr"/>
+          <a:lstStyle/>
+          <a:p/>
+        </p:txBody>
+      </p:sp>
+      <p:sp>
+        <p:nvSpPr>
+          <p:cNvPr id="7" name="Oval 6"/>
+          <p:cNvSpPr/>
+          <p:nvPr/>
+        </p:nvSpPr>
+        <p:spPr>
+          <a:xfrm>
+            <a:off x="1283177" y="2491740"/>
+            <a:ext cx="640080" cy="640080"/>
           </a:xfrm>
           <a:prstGeom prst="ellipse">
             <a:avLst/>
@@ -7665,7 +9409,7 @@
           <a:p>
             <a:pPr algn="ctr"/>
             <a:r>
-              <a:rPr sz="1400" b="1">
+              <a:rPr sz="2000" b="1">
                 <a:solidFill>
                   <a:srgbClr val="202122"/>
                 </a:solidFill>
@@ -7678,14 +9422,14 @@
       </p:sp>
       <p:sp>
         <p:nvSpPr>
-          <p:cNvPr id="7" name="TextBox 6"/>
+          <p:cNvPr id="8" name="TextBox 7"/>
           <p:cNvSpPr txBox="1"/>
           <p:nvPr/>
         </p:nvSpPr>
         <p:spPr>
           <a:xfrm>
-            <a:off x="1234440" y="1600200"/>
-            <a:ext cx="10408615" cy="1429512"/>
+            <a:off x="548640" y="3268979"/>
+            <a:ext cx="2109155" cy="731520"/>
           </a:xfrm>
           <a:prstGeom prst="rect">
             <a:avLst/>
@@ -7696,40 +9440,106 @@
           <a:bodyPr wrap="square" anchor="t" lIns="0" rIns="0" tIns="0" bIns="0"/>
           <a:lstStyle/>
           <a:p>
+            <a:pPr algn="ctr"/>
+            <a:r>
+              <a:rPr sz="1700" b="1" i="0">
+                <a:solidFill>
+                  <a:srgbClr val="03306E"/>
+                </a:solidFill>
+                <a:latin typeface="Calibri"/>
+              </a:rPr>
+              <a:t>Identify</a:t>
+            </a:r>
+          </a:p>
+        </p:txBody>
+      </p:sp>
+      <p:sp>
+        <p:nvSpPr>
+          <p:cNvPr id="9" name="Rounded Rectangle 8"/>
+          <p:cNvSpPr/>
+          <p:nvPr/>
+        </p:nvSpPr>
+        <p:spPr>
+          <a:xfrm>
+            <a:off x="548640" y="4046220"/>
+            <a:ext cx="2109155" cy="1234439"/>
+          </a:xfrm>
+          <a:prstGeom prst="roundRect">
+            <a:avLst>
+              <a:gd name="adj" fmla="val 6000"/>
+            </a:avLst>
+          </a:prstGeom>
+          <a:solidFill>
+            <a:srgbClr val="EAF3FF"/>
+          </a:solidFill>
+          <a:ln>
+            <a:noFill/>
+          </a:ln>
+          <a:effectLst/>
+        </p:spPr>
+        <p:style>
+          <a:lnRef idx="1">
+            <a:schemeClr val="accent1"/>
+          </a:lnRef>
+          <a:fillRef idx="3">
+            <a:schemeClr val="accent1"/>
+          </a:fillRef>
+          <a:effectRef idx="2">
+            <a:schemeClr val="accent1"/>
+          </a:effectRef>
+          <a:fontRef idx="minor">
+            <a:schemeClr val="lt1"/>
+          </a:fontRef>
+        </p:style>
+        <p:txBody>
+          <a:bodyPr rtlCol="0" anchor="ctr"/>
+          <a:lstStyle/>
+          <a:p/>
+        </p:txBody>
+      </p:sp>
+      <p:sp>
+        <p:nvSpPr>
+          <p:cNvPr id="10" name="TextBox 9"/>
+          <p:cNvSpPr txBox="1"/>
+          <p:nvPr/>
+        </p:nvSpPr>
+        <p:spPr>
+          <a:xfrm>
+            <a:off x="685800" y="4183380"/>
+            <a:ext cx="1834835" cy="960119"/>
+          </a:xfrm>
+          <a:prstGeom prst="rect">
+            <a:avLst/>
+          </a:prstGeom>
+          <a:noFill/>
+        </p:spPr>
+        <p:txBody>
+          <a:bodyPr wrap="square" anchor="t" lIns="0" rIns="0" tIns="0" bIns="0"/>
+          <a:lstStyle/>
+          <a:p>
             <a:pPr algn="l"/>
             <a:r>
               <a:rPr sz="1800" b="0" i="0">
                 <a:solidFill>
-                  <a:srgbClr val="54595D"/>
-                </a:solidFill>
-                <a:latin typeface="Calibri"/>
-              </a:rPr>
-              <a:t>What two things are weighed in risk assessment?</a:t>
-            </a:r>
-          </a:p>
-          <a:p>
-            <a:r>
-              <a:rPr sz="1800" b="1">
-                <a:solidFill>
-                  <a:srgbClr val="03306E"/>
-                </a:solidFill>
-                <a:latin typeface="Calibri"/>
-              </a:rPr>
-              <a:t>Likelihood and seriousness (impact).</a:t>
-            </a:r>
-          </a:p>
-        </p:txBody>
-      </p:sp>
-      <p:sp>
-        <p:nvSpPr>
-          <p:cNvPr id="8" name="Oval 7"/>
+                  <a:srgbClr val="202122"/>
+                </a:solidFill>
+                <a:latin typeface="Calibri"/>
+              </a:rPr>
+              <a:t>List the risks for the context and market.</a:t>
+            </a:r>
+          </a:p>
+        </p:txBody>
+      </p:sp>
+      <p:sp>
+        <p:nvSpPr>
+          <p:cNvPr id="11" name="Oval 10"/>
           <p:cNvSpPr/>
           <p:nvPr/>
         </p:nvSpPr>
         <p:spPr>
           <a:xfrm>
-            <a:off x="548640" y="3212592"/>
-            <a:ext cx="411480" cy="411480"/>
+            <a:off x="3529492" y="2491740"/>
+            <a:ext cx="640080" cy="640080"/>
           </a:xfrm>
           <a:prstGeom prst="ellipse">
             <a:avLst/>
@@ -7762,7 +9572,7 @@
           <a:p>
             <a:pPr algn="ctr"/>
             <a:r>
-              <a:rPr sz="1400" b="1">
+              <a:rPr sz="2000" b="1">
                 <a:solidFill>
                   <a:srgbClr val="202122"/>
                 </a:solidFill>
@@ -7775,14 +9585,14 @@
       </p:sp>
       <p:sp>
         <p:nvSpPr>
-          <p:cNvPr id="9" name="TextBox 8"/>
+          <p:cNvPr id="12" name="TextBox 11"/>
           <p:cNvSpPr txBox="1"/>
           <p:nvPr/>
         </p:nvSpPr>
         <p:spPr>
           <a:xfrm>
-            <a:off x="1234440" y="3194304"/>
-            <a:ext cx="10408615" cy="1429512"/>
+            <a:off x="2794955" y="3268979"/>
+            <a:ext cx="2109155" cy="731520"/>
           </a:xfrm>
           <a:prstGeom prst="rect">
             <a:avLst/>
@@ -7793,40 +9603,106 @@
           <a:bodyPr wrap="square" anchor="t" lIns="0" rIns="0" tIns="0" bIns="0"/>
           <a:lstStyle/>
           <a:p>
+            <a:pPr algn="ctr"/>
+            <a:r>
+              <a:rPr sz="1700" b="1" i="0">
+                <a:solidFill>
+                  <a:srgbClr val="03306E"/>
+                </a:solidFill>
+                <a:latin typeface="Calibri"/>
+              </a:rPr>
+              <a:t>Assess</a:t>
+            </a:r>
+          </a:p>
+        </p:txBody>
+      </p:sp>
+      <p:sp>
+        <p:nvSpPr>
+          <p:cNvPr id="13" name="Rounded Rectangle 12"/>
+          <p:cNvSpPr/>
+          <p:nvPr/>
+        </p:nvSpPr>
+        <p:spPr>
+          <a:xfrm>
+            <a:off x="2794955" y="4046220"/>
+            <a:ext cx="2109155" cy="1234439"/>
+          </a:xfrm>
+          <a:prstGeom prst="roundRect">
+            <a:avLst>
+              <a:gd name="adj" fmla="val 6000"/>
+            </a:avLst>
+          </a:prstGeom>
+          <a:solidFill>
+            <a:srgbClr val="EAF3FF"/>
+          </a:solidFill>
+          <a:ln>
+            <a:noFill/>
+          </a:ln>
+          <a:effectLst/>
+        </p:spPr>
+        <p:style>
+          <a:lnRef idx="1">
+            <a:schemeClr val="accent1"/>
+          </a:lnRef>
+          <a:fillRef idx="3">
+            <a:schemeClr val="accent1"/>
+          </a:fillRef>
+          <a:effectRef idx="2">
+            <a:schemeClr val="accent1"/>
+          </a:effectRef>
+          <a:fontRef idx="minor">
+            <a:schemeClr val="lt1"/>
+          </a:fontRef>
+        </p:style>
+        <p:txBody>
+          <a:bodyPr rtlCol="0" anchor="ctr"/>
+          <a:lstStyle/>
+          <a:p/>
+        </p:txBody>
+      </p:sp>
+      <p:sp>
+        <p:nvSpPr>
+          <p:cNvPr id="14" name="TextBox 13"/>
+          <p:cNvSpPr txBox="1"/>
+          <p:nvPr/>
+        </p:nvSpPr>
+        <p:spPr>
+          <a:xfrm>
+            <a:off x="2932115" y="4183380"/>
+            <a:ext cx="1834835" cy="960119"/>
+          </a:xfrm>
+          <a:prstGeom prst="rect">
+            <a:avLst/>
+          </a:prstGeom>
+          <a:noFill/>
+        </p:spPr>
+        <p:txBody>
+          <a:bodyPr wrap="square" anchor="t" lIns="0" rIns="0" tIns="0" bIns="0"/>
+          <a:lstStyle/>
+          <a:p>
             <a:pPr algn="l"/>
             <a:r>
               <a:rPr sz="1800" b="0" i="0">
                 <a:solidFill>
-                  <a:srgbClr val="54595D"/>
-                </a:solidFill>
-                <a:latin typeface="Calibri"/>
-              </a:rPr>
-              <a:t>What is a contingency plan?</a:t>
-            </a:r>
-          </a:p>
-          <a:p>
-            <a:r>
-              <a:rPr sz="1800" b="1">
-                <a:solidFill>
-                  <a:srgbClr val="03306E"/>
-                </a:solidFill>
-                <a:latin typeface="Calibri"/>
-              </a:rPr>
-              <a:t>A plan for what to do if the risk happens.</a:t>
-            </a:r>
-          </a:p>
-        </p:txBody>
-      </p:sp>
-      <p:sp>
-        <p:nvSpPr>
-          <p:cNvPr id="10" name="Oval 9"/>
+                  <a:srgbClr val="202122"/>
+                </a:solidFill>
+                <a:latin typeface="Calibri"/>
+              </a:rPr>
+              <a:t>Likelihood against seriousness and impact.</a:t>
+            </a:r>
+          </a:p>
+        </p:txBody>
+      </p:sp>
+      <p:sp>
+        <p:nvSpPr>
+          <p:cNvPr id="15" name="Oval 14"/>
           <p:cNvSpPr/>
           <p:nvPr/>
         </p:nvSpPr>
         <p:spPr>
           <a:xfrm>
-            <a:off x="548640" y="4806695"/>
-            <a:ext cx="411480" cy="411480"/>
+            <a:off x="5775807" y="2491740"/>
+            <a:ext cx="640080" cy="640080"/>
           </a:xfrm>
           <a:prstGeom prst="ellipse">
             <a:avLst/>
@@ -7859,7 +9735,7 @@
           <a:p>
             <a:pPr algn="ctr"/>
             <a:r>
-              <a:rPr sz="1400" b="1">
+              <a:rPr sz="2000" b="1">
                 <a:solidFill>
                   <a:srgbClr val="202122"/>
                 </a:solidFill>
@@ -7872,14 +9748,14 @@
       </p:sp>
       <p:sp>
         <p:nvSpPr>
-          <p:cNvPr id="11" name="TextBox 10"/>
+          <p:cNvPr id="16" name="TextBox 15"/>
           <p:cNvSpPr txBox="1"/>
           <p:nvPr/>
         </p:nvSpPr>
         <p:spPr>
           <a:xfrm>
-            <a:off x="1234440" y="4788408"/>
-            <a:ext cx="10408615" cy="1429512"/>
+            <a:off x="5041270" y="3268979"/>
+            <a:ext cx="2109155" cy="731520"/>
           </a:xfrm>
           <a:prstGeom prst="rect">
             <a:avLst/>
@@ -7890,26 +9766,418 @@
           <a:bodyPr wrap="square" anchor="t" lIns="0" rIns="0" tIns="0" bIns="0"/>
           <a:lstStyle/>
           <a:p>
+            <a:pPr algn="ctr"/>
+            <a:r>
+              <a:rPr sz="1700" b="1" i="0">
+                <a:solidFill>
+                  <a:srgbClr val="03306E"/>
+                </a:solidFill>
+                <a:latin typeface="Calibri"/>
+              </a:rPr>
+              <a:t>Mitigate</a:t>
+            </a:r>
+          </a:p>
+        </p:txBody>
+      </p:sp>
+      <p:sp>
+        <p:nvSpPr>
+          <p:cNvPr id="17" name="Rounded Rectangle 16"/>
+          <p:cNvSpPr/>
+          <p:nvPr/>
+        </p:nvSpPr>
+        <p:spPr>
+          <a:xfrm>
+            <a:off x="5041270" y="4046220"/>
+            <a:ext cx="2109155" cy="1234439"/>
+          </a:xfrm>
+          <a:prstGeom prst="roundRect">
+            <a:avLst>
+              <a:gd name="adj" fmla="val 6000"/>
+            </a:avLst>
+          </a:prstGeom>
+          <a:solidFill>
+            <a:srgbClr val="EAF3FF"/>
+          </a:solidFill>
+          <a:ln>
+            <a:noFill/>
+          </a:ln>
+          <a:effectLst/>
+        </p:spPr>
+        <p:style>
+          <a:lnRef idx="1">
+            <a:schemeClr val="accent1"/>
+          </a:lnRef>
+          <a:fillRef idx="3">
+            <a:schemeClr val="accent1"/>
+          </a:fillRef>
+          <a:effectRef idx="2">
+            <a:schemeClr val="accent1"/>
+          </a:effectRef>
+          <a:fontRef idx="minor">
+            <a:schemeClr val="lt1"/>
+          </a:fontRef>
+        </p:style>
+        <p:txBody>
+          <a:bodyPr rtlCol="0" anchor="ctr"/>
+          <a:lstStyle/>
+          <a:p/>
+        </p:txBody>
+      </p:sp>
+      <p:sp>
+        <p:nvSpPr>
+          <p:cNvPr id="18" name="TextBox 17"/>
+          <p:cNvSpPr txBox="1"/>
+          <p:nvPr/>
+        </p:nvSpPr>
+        <p:spPr>
+          <a:xfrm>
+            <a:off x="5178430" y="4183380"/>
+            <a:ext cx="1834835" cy="960119"/>
+          </a:xfrm>
+          <a:prstGeom prst="rect">
+            <a:avLst/>
+          </a:prstGeom>
+          <a:noFill/>
+        </p:spPr>
+        <p:txBody>
+          <a:bodyPr wrap="square" anchor="t" lIns="0" rIns="0" tIns="0" bIns="0"/>
+          <a:lstStyle/>
+          <a:p>
             <a:pPr algn="l"/>
             <a:r>
               <a:rPr sz="1800" b="0" i="0">
                 <a:solidFill>
-                  <a:srgbClr val="54595D"/>
-                </a:solidFill>
-                <a:latin typeface="Calibri"/>
-              </a:rPr>
-              <a:t>Give one organisational policy that reduces risk.</a:t>
-            </a:r>
-          </a:p>
-          <a:p>
-            <a:r>
-              <a:rPr sz="1800" b="1">
+                  <a:srgbClr val="202122"/>
+                </a:solidFill>
+                <a:latin typeface="Calibri"/>
+              </a:rPr>
+              <a:t>Reduce the likelihood or impact.</a:t>
+            </a:r>
+          </a:p>
+        </p:txBody>
+      </p:sp>
+      <p:sp>
+        <p:nvSpPr>
+          <p:cNvPr id="19" name="Oval 18"/>
+          <p:cNvSpPr/>
+          <p:nvPr/>
+        </p:nvSpPr>
+        <p:spPr>
+          <a:xfrm>
+            <a:off x="8022122" y="2491740"/>
+            <a:ext cx="640080" cy="640080"/>
+          </a:xfrm>
+          <a:prstGeom prst="ellipse">
+            <a:avLst/>
+          </a:prstGeom>
+          <a:solidFill>
+            <a:srgbClr val="33C17A"/>
+          </a:solidFill>
+          <a:ln>
+            <a:noFill/>
+          </a:ln>
+          <a:effectLst/>
+        </p:spPr>
+        <p:style>
+          <a:lnRef idx="1">
+            <a:schemeClr val="accent1"/>
+          </a:lnRef>
+          <a:fillRef idx="3">
+            <a:schemeClr val="accent1"/>
+          </a:fillRef>
+          <a:effectRef idx="2">
+            <a:schemeClr val="accent1"/>
+          </a:effectRef>
+          <a:fontRef idx="minor">
+            <a:schemeClr val="lt1"/>
+          </a:fontRef>
+        </p:style>
+        <p:txBody>
+          <a:bodyPr rtlCol="0" anchor="ctr" lIns="0" rIns="0" tIns="0" bIns="0"/>
+          <a:lstStyle/>
+          <a:p>
+            <a:pPr algn="ctr"/>
+            <a:r>
+              <a:rPr sz="2000" b="1">
+                <a:solidFill>
+                  <a:srgbClr val="202122"/>
+                </a:solidFill>
+                <a:latin typeface="Calibri"/>
+              </a:rPr>
+              <a:t>4</a:t>
+            </a:r>
+          </a:p>
+        </p:txBody>
+      </p:sp>
+      <p:sp>
+        <p:nvSpPr>
+          <p:cNvPr id="20" name="TextBox 19"/>
+          <p:cNvSpPr txBox="1"/>
+          <p:nvPr/>
+        </p:nvSpPr>
+        <p:spPr>
+          <a:xfrm>
+            <a:off x="7287585" y="3268979"/>
+            <a:ext cx="2109155" cy="731520"/>
+          </a:xfrm>
+          <a:prstGeom prst="rect">
+            <a:avLst/>
+          </a:prstGeom>
+          <a:noFill/>
+        </p:spPr>
+        <p:txBody>
+          <a:bodyPr wrap="square" anchor="t" lIns="0" rIns="0" tIns="0" bIns="0"/>
+          <a:lstStyle/>
+          <a:p>
+            <a:pPr algn="ctr"/>
+            <a:r>
+              <a:rPr sz="1700" b="1" i="0">
                 <a:solidFill>
                   <a:srgbClr val="03306E"/>
                 </a:solidFill>
                 <a:latin typeface="Calibri"/>
               </a:rPr>
-              <a:t>E.g. backup, security, business continuity or disaster recovery policy.</a:t>
+              <a:t>Contingency</a:t>
+            </a:r>
+          </a:p>
+        </p:txBody>
+      </p:sp>
+      <p:sp>
+        <p:nvSpPr>
+          <p:cNvPr id="21" name="Rounded Rectangle 20"/>
+          <p:cNvSpPr/>
+          <p:nvPr/>
+        </p:nvSpPr>
+        <p:spPr>
+          <a:xfrm>
+            <a:off x="7287585" y="4046220"/>
+            <a:ext cx="2109155" cy="1234439"/>
+          </a:xfrm>
+          <a:prstGeom prst="roundRect">
+            <a:avLst>
+              <a:gd name="adj" fmla="val 6000"/>
+            </a:avLst>
+          </a:prstGeom>
+          <a:solidFill>
+            <a:srgbClr val="EAF3FF"/>
+          </a:solidFill>
+          <a:ln>
+            <a:noFill/>
+          </a:ln>
+          <a:effectLst/>
+        </p:spPr>
+        <p:style>
+          <a:lnRef idx="1">
+            <a:schemeClr val="accent1"/>
+          </a:lnRef>
+          <a:fillRef idx="3">
+            <a:schemeClr val="accent1"/>
+          </a:fillRef>
+          <a:effectRef idx="2">
+            <a:schemeClr val="accent1"/>
+          </a:effectRef>
+          <a:fontRef idx="minor">
+            <a:schemeClr val="lt1"/>
+          </a:fontRef>
+        </p:style>
+        <p:txBody>
+          <a:bodyPr rtlCol="0" anchor="ctr"/>
+          <a:lstStyle/>
+          <a:p/>
+        </p:txBody>
+      </p:sp>
+      <p:sp>
+        <p:nvSpPr>
+          <p:cNvPr id="22" name="TextBox 21"/>
+          <p:cNvSpPr txBox="1"/>
+          <p:nvPr/>
+        </p:nvSpPr>
+        <p:spPr>
+          <a:xfrm>
+            <a:off x="7424745" y="4183380"/>
+            <a:ext cx="1834835" cy="960119"/>
+          </a:xfrm>
+          <a:prstGeom prst="rect">
+            <a:avLst/>
+          </a:prstGeom>
+          <a:noFill/>
+        </p:spPr>
+        <p:txBody>
+          <a:bodyPr wrap="square" anchor="t" lIns="0" rIns="0" tIns="0" bIns="0"/>
+          <a:lstStyle/>
+          <a:p>
+            <a:pPr algn="l"/>
+            <a:r>
+              <a:rPr sz="1800" b="0" i="0">
+                <a:solidFill>
+                  <a:srgbClr val="202122"/>
+                </a:solidFill>
+                <a:latin typeface="Calibri"/>
+              </a:rPr>
+              <a:t>Plan what happens if it occurs.</a:t>
+            </a:r>
+          </a:p>
+        </p:txBody>
+      </p:sp>
+      <p:sp>
+        <p:nvSpPr>
+          <p:cNvPr id="23" name="Oval 22"/>
+          <p:cNvSpPr/>
+          <p:nvPr/>
+        </p:nvSpPr>
+        <p:spPr>
+          <a:xfrm>
+            <a:off x="10268437" y="2491740"/>
+            <a:ext cx="640080" cy="640080"/>
+          </a:xfrm>
+          <a:prstGeom prst="ellipse">
+            <a:avLst/>
+          </a:prstGeom>
+          <a:solidFill>
+            <a:srgbClr val="33C17A"/>
+          </a:solidFill>
+          <a:ln>
+            <a:noFill/>
+          </a:ln>
+          <a:effectLst/>
+        </p:spPr>
+        <p:style>
+          <a:lnRef idx="1">
+            <a:schemeClr val="accent1"/>
+          </a:lnRef>
+          <a:fillRef idx="3">
+            <a:schemeClr val="accent1"/>
+          </a:fillRef>
+          <a:effectRef idx="2">
+            <a:schemeClr val="accent1"/>
+          </a:effectRef>
+          <a:fontRef idx="minor">
+            <a:schemeClr val="lt1"/>
+          </a:fontRef>
+        </p:style>
+        <p:txBody>
+          <a:bodyPr rtlCol="0" anchor="ctr" lIns="0" rIns="0" tIns="0" bIns="0"/>
+          <a:lstStyle/>
+          <a:p>
+            <a:pPr algn="ctr"/>
+            <a:r>
+              <a:rPr sz="2000" b="1">
+                <a:solidFill>
+                  <a:srgbClr val="202122"/>
+                </a:solidFill>
+                <a:latin typeface="Calibri"/>
+              </a:rPr>
+              <a:t>5</a:t>
+            </a:r>
+          </a:p>
+        </p:txBody>
+      </p:sp>
+      <p:sp>
+        <p:nvSpPr>
+          <p:cNvPr id="24" name="TextBox 23"/>
+          <p:cNvSpPr txBox="1"/>
+          <p:nvPr/>
+        </p:nvSpPr>
+        <p:spPr>
+          <a:xfrm>
+            <a:off x="9533900" y="3268979"/>
+            <a:ext cx="2109155" cy="731520"/>
+          </a:xfrm>
+          <a:prstGeom prst="rect">
+            <a:avLst/>
+          </a:prstGeom>
+          <a:noFill/>
+        </p:spPr>
+        <p:txBody>
+          <a:bodyPr wrap="square" anchor="t" lIns="0" rIns="0" tIns="0" bIns="0"/>
+          <a:lstStyle/>
+          <a:p>
+            <a:pPr algn="ctr"/>
+            <a:r>
+              <a:rPr sz="1700" b="1" i="0">
+                <a:solidFill>
+                  <a:srgbClr val="03306E"/>
+                </a:solidFill>
+                <a:latin typeface="Calibri"/>
+              </a:rPr>
+              <a:t>Monitor</a:t>
+            </a:r>
+          </a:p>
+        </p:txBody>
+      </p:sp>
+      <p:sp>
+        <p:nvSpPr>
+          <p:cNvPr id="25" name="Rounded Rectangle 24"/>
+          <p:cNvSpPr/>
+          <p:nvPr/>
+        </p:nvSpPr>
+        <p:spPr>
+          <a:xfrm>
+            <a:off x="9533900" y="4046220"/>
+            <a:ext cx="2109155" cy="1234439"/>
+          </a:xfrm>
+          <a:prstGeom prst="roundRect">
+            <a:avLst>
+              <a:gd name="adj" fmla="val 6000"/>
+            </a:avLst>
+          </a:prstGeom>
+          <a:solidFill>
+            <a:srgbClr val="EAF3FF"/>
+          </a:solidFill>
+          <a:ln>
+            <a:noFill/>
+          </a:ln>
+          <a:effectLst/>
+        </p:spPr>
+        <p:style>
+          <a:lnRef idx="1">
+            <a:schemeClr val="accent1"/>
+          </a:lnRef>
+          <a:fillRef idx="3">
+            <a:schemeClr val="accent1"/>
+          </a:fillRef>
+          <a:effectRef idx="2">
+            <a:schemeClr val="accent1"/>
+          </a:effectRef>
+          <a:fontRef idx="minor">
+            <a:schemeClr val="lt1"/>
+          </a:fontRef>
+        </p:style>
+        <p:txBody>
+          <a:bodyPr rtlCol="0" anchor="ctr"/>
+          <a:lstStyle/>
+          <a:p/>
+        </p:txBody>
+      </p:sp>
+      <p:sp>
+        <p:nvSpPr>
+          <p:cNvPr id="26" name="TextBox 25"/>
+          <p:cNvSpPr txBox="1"/>
+          <p:nvPr/>
+        </p:nvSpPr>
+        <p:spPr>
+          <a:xfrm>
+            <a:off x="9671060" y="4183380"/>
+            <a:ext cx="1834835" cy="960119"/>
+          </a:xfrm>
+          <a:prstGeom prst="rect">
+            <a:avLst/>
+          </a:prstGeom>
+          <a:noFill/>
+        </p:spPr>
+        <p:txBody>
+          <a:bodyPr wrap="square" anchor="t" lIns="0" rIns="0" tIns="0" bIns="0"/>
+          <a:lstStyle/>
+          <a:p>
+            <a:pPr algn="l"/>
+            <a:r>
+              <a:rPr sz="1800" b="0" i="0">
+                <a:solidFill>
+                  <a:srgbClr val="202122"/>
+                </a:solidFill>
+                <a:latin typeface="Calibri"/>
+              </a:rPr>
+              <a:t>Keep checking.</a:t>
             </a:r>
           </a:p>
         </p:txBody>
@@ -8001,7 +10269,7 @@
                 </a:solidFill>
                 <a:latin typeface="Cambria"/>
               </a:rPr>
-              <a:t>Activity: Risk register</a:t>
+              <a:t>Quick check: Managing risk</a:t>
             </a:r>
           </a:p>
         </p:txBody>
@@ -8074,19 +10342,17 @@
       </p:sp>
       <p:sp>
         <p:nvSpPr>
-          <p:cNvPr id="6" name="Rounded Rectangle 5"/>
+          <p:cNvPr id="6" name="Oval 5"/>
           <p:cNvSpPr/>
           <p:nvPr/>
         </p:nvSpPr>
         <p:spPr>
           <a:xfrm>
-            <a:off x="548640" y="1508760"/>
-            <a:ext cx="2011680" cy="457200"/>
-          </a:xfrm>
-          <a:prstGeom prst="roundRect">
-            <a:avLst>
-              <a:gd name="adj" fmla="val 50000"/>
-            </a:avLst>
+            <a:off x="548640" y="1691640"/>
+            <a:ext cx="502920" cy="502920"/>
+          </a:xfrm>
+          <a:prstGeom prst="ellipse">
+            <a:avLst/>
           </a:prstGeom>
           <a:solidFill>
             <a:srgbClr val="33C17A"/>
@@ -8111,9 +10377,20 @@
           </a:fontRef>
         </p:style>
         <p:txBody>
-          <a:bodyPr rtlCol="0" anchor="ctr"/>
-          <a:lstStyle/>
-          <a:p/>
+          <a:bodyPr rtlCol="0" anchor="ctr" lIns="0" rIns="0" tIns="0" bIns="0"/>
+          <a:lstStyle/>
+          <a:p>
+            <a:pPr algn="ctr"/>
+            <a:r>
+              <a:rPr sz="1600" b="1">
+                <a:solidFill>
+                  <a:srgbClr val="202122"/>
+                </a:solidFill>
+                <a:latin typeface="Calibri"/>
+              </a:rPr>
+              <a:t>1</a:t>
+            </a:r>
+          </a:p>
         </p:txBody>
       </p:sp>
       <p:sp>
@@ -8124,8 +10401,8 @@
         </p:nvSpPr>
         <p:spPr>
           <a:xfrm>
-            <a:off x="548640" y="1508760"/>
-            <a:ext cx="2011680" cy="457200"/>
+            <a:off x="1371600" y="1645920"/>
+            <a:ext cx="10271455" cy="1188720"/>
           </a:xfrm>
           <a:prstGeom prst="rect">
             <a:avLst/>
@@ -8133,71 +10410,38 @@
           <a:noFill/>
         </p:spPr>
         <p:txBody>
-          <a:bodyPr wrap="square" anchor="ctr" lIns="0" rIns="0" tIns="0" bIns="0"/>
-          <a:lstStyle/>
-          <a:p>
-            <a:pPr algn="ctr"/>
-            <a:r>
-              <a:rPr sz="1400" b="1" i="0">
+          <a:bodyPr wrap="square" anchor="t" lIns="0" rIns="0" tIns="0" bIns="0"/>
+          <a:lstStyle/>
+          <a:p>
+            <a:pPr algn="l"/>
+            <a:r>
+              <a:rPr sz="2400" b="0" i="0">
                 <a:solidFill>
                   <a:srgbClr val="202122"/>
                 </a:solidFill>
                 <a:latin typeface="Calibri"/>
               </a:rPr>
-              <a:t>25 minutes</a:t>
-            </a:r>
-          </a:p>
-        </p:txBody>
-      </p:sp>
-      <p:sp>
-        <p:nvSpPr>
-          <p:cNvPr id="8" name="TextBox 7"/>
-          <p:cNvSpPr txBox="1"/>
-          <p:nvPr/>
-        </p:nvSpPr>
-        <p:spPr>
-          <a:xfrm>
-            <a:off x="2743200" y="1508760"/>
-            <a:ext cx="4754880" cy="457200"/>
-          </a:xfrm>
-          <a:prstGeom prst="rect">
-            <a:avLst/>
-          </a:prstGeom>
-          <a:noFill/>
-        </p:spPr>
-        <p:txBody>
-          <a:bodyPr wrap="square" anchor="ctr" lIns="0" rIns="0" tIns="0" bIns="0"/>
-          <a:lstStyle/>
-          <a:p>
-            <a:pPr algn="l"/>
-            <a:r>
-              <a:rPr sz="1400" b="0" i="1">
-                <a:solidFill>
-                  <a:srgbClr val="54595D"/>
-                </a:solidFill>
-                <a:latin typeface="Calibri"/>
-              </a:rPr>
-              <a:t>Pairs</a:t>
-            </a:r>
-          </a:p>
-        </p:txBody>
-      </p:sp>
-      <p:sp>
-        <p:nvSpPr>
-          <p:cNvPr id="9" name="Oval 8"/>
+              <a:t>What is a contingency plan?</a:t>
+            </a:r>
+          </a:p>
+        </p:txBody>
+      </p:sp>
+      <p:sp>
+        <p:nvSpPr>
+          <p:cNvPr id="8" name="Oval 7"/>
           <p:cNvSpPr/>
           <p:nvPr/>
         </p:nvSpPr>
         <p:spPr>
           <a:xfrm>
-            <a:off x="548640" y="2482596"/>
-            <a:ext cx="384048" cy="384048"/>
+            <a:off x="548640" y="3108960"/>
+            <a:ext cx="502920" cy="502920"/>
           </a:xfrm>
           <a:prstGeom prst="ellipse">
             <a:avLst/>
           </a:prstGeom>
           <a:solidFill>
-            <a:srgbClr val="0645AD"/>
+            <a:srgbClr val="33C17A"/>
           </a:solidFill>
           <a:ln>
             <a:noFill/>
@@ -8224,27 +10468,27 @@
           <a:p>
             <a:pPr algn="ctr"/>
             <a:r>
-              <a:rPr sz="1300" b="1">
-                <a:solidFill>
-                  <a:srgbClr val="FFFFFF"/>
-                </a:solidFill>
-                <a:latin typeface="Calibri"/>
-              </a:rPr>
-              <a:t>1</a:t>
-            </a:r>
-          </a:p>
-        </p:txBody>
-      </p:sp>
-      <p:sp>
-        <p:nvSpPr>
-          <p:cNvPr id="10" name="TextBox 9"/>
+              <a:rPr sz="1600" b="1">
+                <a:solidFill>
+                  <a:srgbClr val="202122"/>
+                </a:solidFill>
+                <a:latin typeface="Calibri"/>
+              </a:rPr>
+              <a:t>2</a:t>
+            </a:r>
+          </a:p>
+        </p:txBody>
+      </p:sp>
+      <p:sp>
+        <p:nvSpPr>
+          <p:cNvPr id="9" name="TextBox 8"/>
           <p:cNvSpPr txBox="1"/>
           <p:nvPr/>
         </p:nvSpPr>
         <p:spPr>
           <a:xfrm>
-            <a:off x="1143000" y="2240280"/>
-            <a:ext cx="5943600" cy="868680"/>
+            <a:off x="1371600" y="3063240"/>
+            <a:ext cx="10271455" cy="1188720"/>
           </a:xfrm>
           <a:prstGeom prst="rect">
             <a:avLst/>
@@ -8252,38 +10496,38 @@
           <a:noFill/>
         </p:spPr>
         <p:txBody>
-          <a:bodyPr wrap="square" anchor="ctr" lIns="0" rIns="0" tIns="0" bIns="0"/>
+          <a:bodyPr wrap="square" anchor="t" lIns="0" rIns="0" tIns="0" bIns="0"/>
           <a:lstStyle/>
           <a:p>
             <a:pPr algn="l"/>
             <a:r>
-              <a:rPr sz="1700" b="0" i="0">
+              <a:rPr sz="2400" b="0" i="0">
                 <a:solidFill>
                   <a:srgbClr val="202122"/>
                 </a:solidFill>
                 <a:latin typeface="Calibri"/>
               </a:rPr>
-              <a:t>Build a risk register for a new online booking system.</a:t>
-            </a:r>
-          </a:p>
-        </p:txBody>
-      </p:sp>
-      <p:sp>
-        <p:nvSpPr>
-          <p:cNvPr id="11" name="Oval 10"/>
+              <a:t>Why keep monitoring risks?</a:t>
+            </a:r>
+          </a:p>
+        </p:txBody>
+      </p:sp>
+      <p:sp>
+        <p:nvSpPr>
+          <p:cNvPr id="10" name="Oval 9"/>
           <p:cNvSpPr/>
           <p:nvPr/>
         </p:nvSpPr>
         <p:spPr>
           <a:xfrm>
-            <a:off x="548640" y="3461004"/>
-            <a:ext cx="384048" cy="384048"/>
+            <a:off x="548640" y="4526280"/>
+            <a:ext cx="502920" cy="502920"/>
           </a:xfrm>
           <a:prstGeom prst="ellipse">
             <a:avLst/>
           </a:prstGeom>
           <a:solidFill>
-            <a:srgbClr val="0645AD"/>
+            <a:srgbClr val="33C17A"/>
           </a:solidFill>
           <a:ln>
             <a:noFill/>
@@ -8310,13 +10554,46 @@
           <a:p>
             <a:pPr algn="ctr"/>
             <a:r>
-              <a:rPr sz="1300" b="1">
-                <a:solidFill>
-                  <a:srgbClr val="FFFFFF"/>
-                </a:solidFill>
-                <a:latin typeface="Calibri"/>
-              </a:rPr>
-              <a:t>2</a:t>
+              <a:rPr sz="1600" b="1">
+                <a:solidFill>
+                  <a:srgbClr val="202122"/>
+                </a:solidFill>
+                <a:latin typeface="Calibri"/>
+              </a:rPr>
+              <a:t>3</a:t>
+            </a:r>
+          </a:p>
+        </p:txBody>
+      </p:sp>
+      <p:sp>
+        <p:nvSpPr>
+          <p:cNvPr id="11" name="TextBox 10"/>
+          <p:cNvSpPr txBox="1"/>
+          <p:nvPr/>
+        </p:nvSpPr>
+        <p:spPr>
+          <a:xfrm>
+            <a:off x="1371600" y="4480560"/>
+            <a:ext cx="10271455" cy="1188720"/>
+          </a:xfrm>
+          <a:prstGeom prst="rect">
+            <a:avLst/>
+          </a:prstGeom>
+          <a:noFill/>
+        </p:spPr>
+        <p:txBody>
+          <a:bodyPr wrap="square" anchor="t" lIns="0" rIns="0" tIns="0" bIns="0"/>
+          <a:lstStyle/>
+          <a:p>
+            <a:pPr algn="l"/>
+            <a:r>
+              <a:rPr sz="2400" b="0" i="0">
+                <a:solidFill>
+                  <a:srgbClr val="202122"/>
+                </a:solidFill>
+                <a:latin typeface="Calibri"/>
+              </a:rPr>
+              <a:t>Name two organisational policies that reduce risk.</a:t>
             </a:r>
           </a:p>
         </p:txBody>
@@ -8329,8 +10606,8 @@
         </p:nvSpPr>
         <p:spPr>
           <a:xfrm>
-            <a:off x="1143000" y="3218688"/>
-            <a:ext cx="5943600" cy="868680"/>
+            <a:off x="548640" y="5852160"/>
+            <a:ext cx="11094415" cy="365760"/>
           </a:xfrm>
           <a:prstGeom prst="rect">
             <a:avLst/>
@@ -8338,353 +10615,18 @@
           <a:noFill/>
         </p:spPr>
         <p:txBody>
-          <a:bodyPr wrap="square" anchor="ctr" lIns="0" rIns="0" tIns="0" bIns="0"/>
+          <a:bodyPr wrap="square" anchor="t" lIns="0" rIns="0" tIns="0" bIns="0"/>
           <a:lstStyle/>
           <a:p>
             <a:pPr algn="l"/>
             <a:r>
-              <a:rPr sz="1700" b="0" i="0">
-                <a:solidFill>
-                  <a:srgbClr val="202122"/>
-                </a:solidFill>
-                <a:latin typeface="Calibri"/>
-              </a:rPr>
-              <a:t>Include at least six risks.</a:t>
-            </a:r>
-          </a:p>
-        </p:txBody>
-      </p:sp>
-      <p:sp>
-        <p:nvSpPr>
-          <p:cNvPr id="13" name="Oval 12"/>
-          <p:cNvSpPr/>
-          <p:nvPr/>
-        </p:nvSpPr>
-        <p:spPr>
-          <a:xfrm>
-            <a:off x="548640" y="4439412"/>
-            <a:ext cx="384048" cy="384048"/>
-          </a:xfrm>
-          <a:prstGeom prst="ellipse">
-            <a:avLst/>
-          </a:prstGeom>
-          <a:solidFill>
-            <a:srgbClr val="0645AD"/>
-          </a:solidFill>
-          <a:ln>
-            <a:noFill/>
-          </a:ln>
-          <a:effectLst/>
-        </p:spPr>
-        <p:style>
-          <a:lnRef idx="1">
-            <a:schemeClr val="accent1"/>
-          </a:lnRef>
-          <a:fillRef idx="3">
-            <a:schemeClr val="accent1"/>
-          </a:fillRef>
-          <a:effectRef idx="2">
-            <a:schemeClr val="accent1"/>
-          </a:effectRef>
-          <a:fontRef idx="minor">
-            <a:schemeClr val="lt1"/>
-          </a:fontRef>
-        </p:style>
-        <p:txBody>
-          <a:bodyPr rtlCol="0" anchor="ctr" lIns="0" rIns="0" tIns="0" bIns="0"/>
-          <a:lstStyle/>
-          <a:p>
-            <a:pPr algn="ctr"/>
-            <a:r>
-              <a:rPr sz="1300" b="1">
-                <a:solidFill>
-                  <a:srgbClr val="FFFFFF"/>
-                </a:solidFill>
-                <a:latin typeface="Calibri"/>
-              </a:rPr>
-              <a:t>3</a:t>
-            </a:r>
-          </a:p>
-        </p:txBody>
-      </p:sp>
-      <p:sp>
-        <p:nvSpPr>
-          <p:cNvPr id="14" name="TextBox 13"/>
-          <p:cNvSpPr txBox="1"/>
-          <p:nvPr/>
-        </p:nvSpPr>
-        <p:spPr>
-          <a:xfrm>
-            <a:off x="1143000" y="4197096"/>
-            <a:ext cx="5943600" cy="868680"/>
-          </a:xfrm>
-          <a:prstGeom prst="rect">
-            <a:avLst/>
-          </a:prstGeom>
-          <a:noFill/>
-        </p:spPr>
-        <p:txBody>
-          <a:bodyPr wrap="square" anchor="ctr" lIns="0" rIns="0" tIns="0" bIns="0"/>
-          <a:lstStyle/>
-          <a:p>
-            <a:pPr algn="l"/>
-            <a:r>
-              <a:rPr sz="1700" b="0" i="0">
-                <a:solidFill>
-                  <a:srgbClr val="202122"/>
-                </a:solidFill>
-                <a:latin typeface="Calibri"/>
-              </a:rPr>
-              <a:t>Score likelihood and seriousness from 1 to 5.</a:t>
-            </a:r>
-          </a:p>
-        </p:txBody>
-      </p:sp>
-      <p:sp>
-        <p:nvSpPr>
-          <p:cNvPr id="15" name="Oval 14"/>
-          <p:cNvSpPr/>
-          <p:nvPr/>
-        </p:nvSpPr>
-        <p:spPr>
-          <a:xfrm>
-            <a:off x="548640" y="5417820"/>
-            <a:ext cx="384048" cy="384048"/>
-          </a:xfrm>
-          <a:prstGeom prst="ellipse">
-            <a:avLst/>
-          </a:prstGeom>
-          <a:solidFill>
-            <a:srgbClr val="0645AD"/>
-          </a:solidFill>
-          <a:ln>
-            <a:noFill/>
-          </a:ln>
-          <a:effectLst/>
-        </p:spPr>
-        <p:style>
-          <a:lnRef idx="1">
-            <a:schemeClr val="accent1"/>
-          </a:lnRef>
-          <a:fillRef idx="3">
-            <a:schemeClr val="accent1"/>
-          </a:fillRef>
-          <a:effectRef idx="2">
-            <a:schemeClr val="accent1"/>
-          </a:effectRef>
-          <a:fontRef idx="minor">
-            <a:schemeClr val="lt1"/>
-          </a:fontRef>
-        </p:style>
-        <p:txBody>
-          <a:bodyPr rtlCol="0" anchor="ctr" lIns="0" rIns="0" tIns="0" bIns="0"/>
-          <a:lstStyle/>
-          <a:p>
-            <a:pPr algn="ctr"/>
-            <a:r>
-              <a:rPr sz="1300" b="1">
-                <a:solidFill>
-                  <a:srgbClr val="FFFFFF"/>
-                </a:solidFill>
-                <a:latin typeface="Calibri"/>
-              </a:rPr>
-              <a:t>4</a:t>
-            </a:r>
-          </a:p>
-        </p:txBody>
-      </p:sp>
-      <p:sp>
-        <p:nvSpPr>
-          <p:cNvPr id="16" name="TextBox 15"/>
-          <p:cNvSpPr txBox="1"/>
-          <p:nvPr/>
-        </p:nvSpPr>
-        <p:spPr>
-          <a:xfrm>
-            <a:off x="1143000" y="5175504"/>
-            <a:ext cx="5943600" cy="868680"/>
-          </a:xfrm>
-          <a:prstGeom prst="rect">
-            <a:avLst/>
-          </a:prstGeom>
-          <a:noFill/>
-        </p:spPr>
-        <p:txBody>
-          <a:bodyPr wrap="square" anchor="ctr" lIns="0" rIns="0" tIns="0" bIns="0"/>
-          <a:lstStyle/>
-          <a:p>
-            <a:pPr algn="l"/>
-            <a:r>
-              <a:rPr sz="1700" b="0" i="0">
-                <a:solidFill>
-                  <a:srgbClr val="202122"/>
-                </a:solidFill>
-                <a:latin typeface="Calibri"/>
-              </a:rPr>
-              <a:t>Add mitigation, contingency and an owner for each.</a:t>
-            </a:r>
-          </a:p>
-        </p:txBody>
-      </p:sp>
-      <p:sp>
-        <p:nvSpPr>
-          <p:cNvPr id="17" name="Rounded Rectangle 16"/>
-          <p:cNvSpPr/>
-          <p:nvPr/>
-        </p:nvSpPr>
-        <p:spPr>
-          <a:xfrm>
-            <a:off x="7772400" y="1508760"/>
-            <a:ext cx="3867912" cy="4572000"/>
-          </a:xfrm>
-          <a:prstGeom prst="roundRect">
-            <a:avLst>
-              <a:gd name="adj" fmla="val 8000"/>
-            </a:avLst>
-          </a:prstGeom>
-          <a:solidFill>
-            <a:srgbClr val="EAF3FF"/>
-          </a:solidFill>
-          <a:ln>
-            <a:noFill/>
-          </a:ln>
-          <a:effectLst/>
-        </p:spPr>
-        <p:style>
-          <a:lnRef idx="1">
-            <a:schemeClr val="accent1"/>
-          </a:lnRef>
-          <a:fillRef idx="3">
-            <a:schemeClr val="accent1"/>
-          </a:fillRef>
-          <a:effectRef idx="2">
-            <a:schemeClr val="accent1"/>
-          </a:effectRef>
-          <a:fontRef idx="minor">
-            <a:schemeClr val="lt1"/>
-          </a:fontRef>
-        </p:style>
-        <p:txBody>
-          <a:bodyPr rtlCol="0" anchor="ctr"/>
-          <a:lstStyle/>
-          <a:p/>
-        </p:txBody>
-      </p:sp>
-      <p:sp>
-        <p:nvSpPr>
-          <p:cNvPr id="18" name="TextBox 17"/>
-          <p:cNvSpPr txBox="1"/>
-          <p:nvPr/>
-        </p:nvSpPr>
-        <p:spPr>
-          <a:xfrm>
-            <a:off x="8046720" y="1737360"/>
-            <a:ext cx="3291840" cy="365760"/>
-          </a:xfrm>
-          <a:prstGeom prst="rect">
-            <a:avLst/>
-          </a:prstGeom>
-          <a:noFill/>
-        </p:spPr>
-        <p:txBody>
-          <a:bodyPr wrap="square" anchor="t" lIns="0" rIns="0" tIns="0" bIns="0"/>
-          <a:lstStyle/>
-          <a:p>
-            <a:pPr algn="l"/>
-            <a:r>
-              <a:rPr sz="1300" b="1" i="0">
-                <a:solidFill>
-                  <a:srgbClr val="0645AD"/>
-                </a:solidFill>
-                <a:latin typeface="Calibri"/>
-              </a:rPr>
-              <a:t>SUCCESS CRITERIA</a:t>
-            </a:r>
-          </a:p>
-        </p:txBody>
-      </p:sp>
-      <p:sp>
-        <p:nvSpPr>
-          <p:cNvPr id="19" name="TextBox 18"/>
-          <p:cNvSpPr txBox="1"/>
-          <p:nvPr/>
-        </p:nvSpPr>
-        <p:spPr>
-          <a:xfrm>
-            <a:off x="8046720" y="2240280"/>
-            <a:ext cx="3337560" cy="3657600"/>
-          </a:xfrm>
-          <a:prstGeom prst="rect">
-            <a:avLst/>
-          </a:prstGeom>
-          <a:noFill/>
-        </p:spPr>
-        <p:txBody>
-          <a:bodyPr wrap="square" lIns="0" rIns="0" tIns="0" bIns="0">
-            <a:spAutoFit/>
-          </a:bodyPr>
-          <a:lstStyle/>
-          <a:p>
-            <a:pPr marL="274320" indent="-274320">
-              <a:spcAft>
-                <a:spcPts val="810"/>
-              </a:spcAft>
-              <a:buClr>
-                <a:srgbClr val="0645AD"/>
-              </a:buClr>
-              <a:buFont typeface="Arial"/>
-              <a:buChar char="•"/>
-            </a:pPr>
-            <a:r>
-              <a:rPr sz="1800" b="0">
-                <a:solidFill>
-                  <a:srgbClr val="202122"/>
-                </a:solidFill>
-                <a:latin typeface="Calibri"/>
-              </a:rPr>
-              <a:t>Covers security, legal and user risks</a:t>
-            </a:r>
-          </a:p>
-          <a:p>
-            <a:pPr marL="274320" indent="-274320">
-              <a:spcAft>
-                <a:spcPts val="810"/>
-              </a:spcAft>
-              <a:buClr>
-                <a:srgbClr val="0645AD"/>
-              </a:buClr>
-              <a:buFont typeface="Arial"/>
-              <a:buChar char="•"/>
-            </a:pPr>
-            <a:r>
-              <a:rPr sz="1800" b="0">
-                <a:solidFill>
-                  <a:srgbClr val="202122"/>
-                </a:solidFill>
-                <a:latin typeface="Calibri"/>
-              </a:rPr>
-              <a:t>Scores justified</a:t>
-            </a:r>
-          </a:p>
-          <a:p>
-            <a:pPr marL="274320" indent="-274320">
-              <a:spcAft>
-                <a:spcPts val="810"/>
-              </a:spcAft>
-              <a:buClr>
-                <a:srgbClr val="0645AD"/>
-              </a:buClr>
-              <a:buFont typeface="Arial"/>
-              <a:buChar char="•"/>
-            </a:pPr>
-            <a:r>
-              <a:rPr sz="1800" b="0">
-                <a:solidFill>
-                  <a:srgbClr val="202122"/>
-                </a:solidFill>
-                <a:latin typeface="Calibri"/>
-              </a:rPr>
-              <a:t>Every risk has an owner</a:t>
+              <a:rPr sz="1300" b="0" i="1">
+                <a:solidFill>
+                  <a:srgbClr val="54595D"/>
+                </a:solidFill>
+                <a:latin typeface="Calibri"/>
+              </a:rPr>
+              <a:t>Answer on mini whiteboards or in your book. Answers are in the speaker notes.</a:t>
             </a:r>
           </a:p>
         </p:txBody>
@@ -8703,7 +10645,7 @@
     <p:bg>
       <p:bgPr>
         <a:solidFill>
-          <a:srgbClr val="03306E"/>
+          <a:srgbClr val="FFFFFF"/>
         </a:solidFill>
         <a:effectLst/>
       </p:bgPr>
@@ -8739,7 +10681,7 @@
             <a:r>
               <a:rPr sz="1100" b="1" i="0">
                 <a:solidFill>
-                  <a:srgbClr val="A9C8F0"/>
+                  <a:srgbClr val="54595D"/>
                 </a:solidFill>
                 <a:latin typeface="Calibri"/>
               </a:rPr>
@@ -8772,25 +10714,263 @@
             <a:r>
               <a:rPr sz="3200" b="1" i="0">
                 <a:solidFill>
-                  <a:srgbClr val="FFFFFF"/>
+                  <a:srgbClr val="03306E"/>
                 </a:solidFill>
                 <a:latin typeface="Cambria"/>
               </a:rPr>
-              <a:t>Exit ticket</a:t>
-            </a:r>
-          </a:p>
-        </p:txBody>
-      </p:sp>
-      <p:sp>
-        <p:nvSpPr>
-          <p:cNvPr id="4" name="Oval 3"/>
+              <a:t>Organisational policies</a:t>
+            </a:r>
+          </a:p>
+        </p:txBody>
+      </p:sp>
+      <p:sp>
+        <p:nvSpPr>
+          <p:cNvPr id="4" name="TextBox 3"/>
+          <p:cNvSpPr txBox="1"/>
+          <p:nvPr/>
+        </p:nvSpPr>
+        <p:spPr>
+          <a:xfrm>
+            <a:off x="548640" y="6446520"/>
+            <a:ext cx="8229600" cy="274320"/>
+          </a:xfrm>
+          <a:prstGeom prst="rect">
+            <a:avLst/>
+          </a:prstGeom>
+          <a:noFill/>
+        </p:spPr>
+        <p:txBody>
+          <a:bodyPr wrap="square" anchor="t" lIns="0" rIns="0" tIns="0" bIns="0"/>
+          <a:lstStyle/>
+          <a:p>
+            <a:pPr algn="l"/>
+            <a:r>
+              <a:rPr sz="1000" b="0" i="0">
+                <a:solidFill>
+                  <a:srgbClr val="54595D"/>
+                </a:solidFill>
+                <a:latin typeface="Calibri"/>
+              </a:rPr>
+              <a:t>Digital Software Development T Level  ·  Identifying and Managing Risk</a:t>
+            </a:r>
+          </a:p>
+        </p:txBody>
+      </p:sp>
+      <p:sp>
+        <p:nvSpPr>
+          <p:cNvPr id="5" name="TextBox 4"/>
+          <p:cNvSpPr txBox="1"/>
+          <p:nvPr/>
+        </p:nvSpPr>
+        <p:spPr>
+          <a:xfrm>
+            <a:off x="10728655" y="6446520"/>
+            <a:ext cx="914400" cy="274320"/>
+          </a:xfrm>
+          <a:prstGeom prst="rect">
+            <a:avLst/>
+          </a:prstGeom>
+          <a:noFill/>
+        </p:spPr>
+        <p:txBody>
+          <a:bodyPr wrap="square" anchor="t" lIns="0" rIns="0" tIns="0" bIns="0"/>
+          <a:lstStyle/>
+          <a:p>
+            <a:pPr algn="r"/>
+            <a:r>
+              <a:rPr sz="1000" b="0" i="0">
+                <a:solidFill>
+                  <a:srgbClr val="54595D"/>
+                </a:solidFill>
+                <a:latin typeface="Calibri"/>
+              </a:rPr>
+              <a:t>9</a:t>
+            </a:r>
+          </a:p>
+        </p:txBody>
+      </p:sp>
+      <p:sp>
+        <p:nvSpPr>
+          <p:cNvPr id="6" name="TextBox 5"/>
+          <p:cNvSpPr txBox="1"/>
+          <p:nvPr/>
+        </p:nvSpPr>
+        <p:spPr>
+          <a:xfrm>
+            <a:off x="548640" y="1600200"/>
+            <a:ext cx="6675120" cy="4572000"/>
+          </a:xfrm>
+          <a:prstGeom prst="rect">
+            <a:avLst/>
+          </a:prstGeom>
+          <a:noFill/>
+        </p:spPr>
+        <p:txBody>
+          <a:bodyPr wrap="square" lIns="0" rIns="0" tIns="0" bIns="0">
+            <a:spAutoFit/>
+          </a:bodyPr>
+          <a:lstStyle/>
+          <a:p>
+            <a:pPr marL="274320" indent="-274320">
+              <a:spcAft>
+                <a:spcPts val="1080"/>
+              </a:spcAft>
+              <a:buClr>
+                <a:srgbClr val="0645AD"/>
+              </a:buClr>
+              <a:buFont typeface="Arial"/>
+              <a:buChar char="•"/>
+            </a:pPr>
+            <a:r>
+              <a:rPr sz="2400" b="0">
+                <a:solidFill>
+                  <a:srgbClr val="202122"/>
+                </a:solidFill>
+                <a:latin typeface="Calibri"/>
+              </a:rPr>
+              <a:t>Backup and security policies</a:t>
+            </a:r>
+          </a:p>
+          <a:p>
+            <a:pPr marL="274320" indent="-274320">
+              <a:spcAft>
+                <a:spcPts val="1080"/>
+              </a:spcAft>
+              <a:buClr>
+                <a:srgbClr val="0645AD"/>
+              </a:buClr>
+              <a:buFont typeface="Arial"/>
+              <a:buChar char="•"/>
+            </a:pPr>
+            <a:r>
+              <a:rPr sz="2400" b="0">
+                <a:solidFill>
+                  <a:srgbClr val="202122"/>
+                </a:solidFill>
+                <a:latin typeface="Calibri"/>
+              </a:rPr>
+              <a:t>Confidentiality, integrity and availability (CIA)</a:t>
+            </a:r>
+          </a:p>
+          <a:p>
+            <a:pPr marL="274320" indent="-274320">
+              <a:spcAft>
+                <a:spcPts val="1080"/>
+              </a:spcAft>
+              <a:buClr>
+                <a:srgbClr val="0645AD"/>
+              </a:buClr>
+              <a:buFont typeface="Arial"/>
+              <a:buChar char="•"/>
+            </a:pPr>
+            <a:r>
+              <a:rPr sz="2400" b="0">
+                <a:solidFill>
+                  <a:srgbClr val="202122"/>
+                </a:solidFill>
+                <a:latin typeface="Calibri"/>
+              </a:rPr>
+              <a:t>Personnel, skills and training</a:t>
+            </a:r>
+          </a:p>
+          <a:p>
+            <a:pPr marL="274320" indent="-274320">
+              <a:spcAft>
+                <a:spcPts val="1080"/>
+              </a:spcAft>
+              <a:buClr>
+                <a:srgbClr val="0645AD"/>
+              </a:buClr>
+              <a:buFont typeface="Arial"/>
+              <a:buChar char="•"/>
+            </a:pPr>
+            <a:r>
+              <a:rPr sz="2400" b="0">
+                <a:solidFill>
+                  <a:srgbClr val="202122"/>
+                </a:solidFill>
+                <a:latin typeface="Calibri"/>
+              </a:rPr>
+              <a:t>Business continuity planning</a:t>
+            </a:r>
+          </a:p>
+          <a:p>
+            <a:pPr marL="274320" indent="-274320">
+              <a:spcAft>
+                <a:spcPts val="1080"/>
+              </a:spcAft>
+              <a:buClr>
+                <a:srgbClr val="0645AD"/>
+              </a:buClr>
+              <a:buFont typeface="Arial"/>
+              <a:buChar char="•"/>
+            </a:pPr>
+            <a:r>
+              <a:rPr sz="2400" b="0">
+                <a:solidFill>
+                  <a:srgbClr val="202122"/>
+                </a:solidFill>
+                <a:latin typeface="Calibri"/>
+              </a:rPr>
+              <a:t>Disaster recovery planning</a:t>
+            </a:r>
+          </a:p>
+        </p:txBody>
+      </p:sp>
+      <p:sp>
+        <p:nvSpPr>
+          <p:cNvPr id="7" name="Rounded Rectangle 6"/>
           <p:cNvSpPr/>
           <p:nvPr/>
         </p:nvSpPr>
         <p:spPr>
           <a:xfrm>
-            <a:off x="548640" y="1737360"/>
-            <a:ext cx="502920" cy="502920"/>
+            <a:off x="7772400" y="1600200"/>
+            <a:ext cx="3867912" cy="4434840"/>
+          </a:xfrm>
+          <a:prstGeom prst="roundRect">
+            <a:avLst>
+              <a:gd name="adj" fmla="val 8000"/>
+            </a:avLst>
+          </a:prstGeom>
+          <a:solidFill>
+            <a:srgbClr val="03306E"/>
+          </a:solidFill>
+          <a:ln>
+            <a:noFill/>
+          </a:ln>
+          <a:effectLst/>
+        </p:spPr>
+        <p:style>
+          <a:lnRef idx="1">
+            <a:schemeClr val="accent1"/>
+          </a:lnRef>
+          <a:fillRef idx="3">
+            <a:schemeClr val="accent1"/>
+          </a:fillRef>
+          <a:effectRef idx="2">
+            <a:schemeClr val="accent1"/>
+          </a:effectRef>
+          <a:fontRef idx="minor">
+            <a:schemeClr val="lt1"/>
+          </a:fontRef>
+        </p:style>
+        <p:txBody>
+          <a:bodyPr rtlCol="0" anchor="ctr"/>
+          <a:lstStyle/>
+          <a:p/>
+        </p:txBody>
+      </p:sp>
+      <p:sp>
+        <p:nvSpPr>
+          <p:cNvPr id="8" name="Oval 7"/>
+          <p:cNvSpPr/>
+          <p:nvPr/>
+        </p:nvSpPr>
+        <p:spPr>
+          <a:xfrm>
+            <a:off x="8046720" y="1874519"/>
+            <a:ext cx="548640" cy="548640"/>
           </a:xfrm>
           <a:prstGeom prst="ellipse">
             <a:avLst/>
@@ -8823,185 +11003,13 @@
           <a:p>
             <a:pPr algn="ctr"/>
             <a:r>
-              <a:rPr sz="1700" b="1">
+              <a:rPr sz="2000" b="1">
                 <a:solidFill>
                   <a:srgbClr val="202122"/>
                 </a:solidFill>
                 <a:latin typeface="Calibri"/>
               </a:rPr>
-              <a:t>1</a:t>
-            </a:r>
-          </a:p>
-        </p:txBody>
-      </p:sp>
-      <p:sp>
-        <p:nvSpPr>
-          <p:cNvPr id="5" name="TextBox 4"/>
-          <p:cNvSpPr txBox="1"/>
-          <p:nvPr/>
-        </p:nvSpPr>
-        <p:spPr>
-          <a:xfrm>
-            <a:off x="1325880" y="1645920"/>
-            <a:ext cx="6583680" cy="822960"/>
-          </a:xfrm>
-          <a:prstGeom prst="rect">
-            <a:avLst/>
-          </a:prstGeom>
-          <a:noFill/>
-        </p:spPr>
-        <p:txBody>
-          <a:bodyPr wrap="square" anchor="ctr" lIns="0" rIns="0" tIns="0" bIns="0"/>
-          <a:lstStyle/>
-          <a:p>
-            <a:pPr algn="l"/>
-            <a:r>
-              <a:rPr sz="2000" b="0" i="0">
-                <a:solidFill>
-                  <a:srgbClr val="FFFFFF"/>
-                </a:solidFill>
-                <a:latin typeface="Calibri"/>
-              </a:rPr>
-              <a:t>Which risk would stop you launching?</a:t>
-            </a:r>
-          </a:p>
-        </p:txBody>
-      </p:sp>
-      <p:sp>
-        <p:nvSpPr>
-          <p:cNvPr id="6" name="Oval 5"/>
-          <p:cNvSpPr/>
-          <p:nvPr/>
-        </p:nvSpPr>
-        <p:spPr>
-          <a:xfrm>
-            <a:off x="548640" y="2697480"/>
-            <a:ext cx="502920" cy="502920"/>
-          </a:xfrm>
-          <a:prstGeom prst="ellipse">
-            <a:avLst/>
-          </a:prstGeom>
-          <a:solidFill>
-            <a:srgbClr val="33C17A"/>
-          </a:solidFill>
-          <a:ln>
-            <a:noFill/>
-          </a:ln>
-          <a:effectLst/>
-        </p:spPr>
-        <p:style>
-          <a:lnRef idx="1">
-            <a:schemeClr val="accent1"/>
-          </a:lnRef>
-          <a:fillRef idx="3">
-            <a:schemeClr val="accent1"/>
-          </a:fillRef>
-          <a:effectRef idx="2">
-            <a:schemeClr val="accent1"/>
-          </a:effectRef>
-          <a:fontRef idx="minor">
-            <a:schemeClr val="lt1"/>
-          </a:fontRef>
-        </p:style>
-        <p:txBody>
-          <a:bodyPr rtlCol="0" anchor="ctr" lIns="0" rIns="0" tIns="0" bIns="0"/>
-          <a:lstStyle/>
-          <a:p>
-            <a:pPr algn="ctr"/>
-            <a:r>
-              <a:rPr sz="1700" b="1">
-                <a:solidFill>
-                  <a:srgbClr val="202122"/>
-                </a:solidFill>
-                <a:latin typeface="Calibri"/>
-              </a:rPr>
-              <a:t>2</a:t>
-            </a:r>
-          </a:p>
-        </p:txBody>
-      </p:sp>
-      <p:sp>
-        <p:nvSpPr>
-          <p:cNvPr id="7" name="TextBox 6"/>
-          <p:cNvSpPr txBox="1"/>
-          <p:nvPr/>
-        </p:nvSpPr>
-        <p:spPr>
-          <a:xfrm>
-            <a:off x="1325880" y="2606040"/>
-            <a:ext cx="6583680" cy="822960"/>
-          </a:xfrm>
-          <a:prstGeom prst="rect">
-            <a:avLst/>
-          </a:prstGeom>
-          <a:noFill/>
-        </p:spPr>
-        <p:txBody>
-          <a:bodyPr wrap="square" anchor="ctr" lIns="0" rIns="0" tIns="0" bIns="0"/>
-          <a:lstStyle/>
-          <a:p>
-            <a:pPr algn="l"/>
-            <a:r>
-              <a:rPr sz="2000" b="0" i="0">
-                <a:solidFill>
-                  <a:srgbClr val="FFFFFF"/>
-                </a:solidFill>
-                <a:latin typeface="Calibri"/>
-              </a:rPr>
-              <a:t>Why monitor risks after launch?</a:t>
-            </a:r>
-          </a:p>
-        </p:txBody>
-      </p:sp>
-      <p:sp>
-        <p:nvSpPr>
-          <p:cNvPr id="8" name="Oval 7"/>
-          <p:cNvSpPr/>
-          <p:nvPr/>
-        </p:nvSpPr>
-        <p:spPr>
-          <a:xfrm>
-            <a:off x="548640" y="3657600"/>
-            <a:ext cx="502920" cy="502920"/>
-          </a:xfrm>
-          <a:prstGeom prst="ellipse">
-            <a:avLst/>
-          </a:prstGeom>
-          <a:solidFill>
-            <a:srgbClr val="33C17A"/>
-          </a:solidFill>
-          <a:ln>
-            <a:noFill/>
-          </a:ln>
-          <a:effectLst/>
-        </p:spPr>
-        <p:style>
-          <a:lnRef idx="1">
-            <a:schemeClr val="accent1"/>
-          </a:lnRef>
-          <a:fillRef idx="3">
-            <a:schemeClr val="accent1"/>
-          </a:fillRef>
-          <a:effectRef idx="2">
-            <a:schemeClr val="accent1"/>
-          </a:effectRef>
-          <a:fontRef idx="minor">
-            <a:schemeClr val="lt1"/>
-          </a:fontRef>
-        </p:style>
-        <p:txBody>
-          <a:bodyPr rtlCol="0" anchor="ctr" lIns="0" rIns="0" tIns="0" bIns="0"/>
-          <a:lstStyle/>
-          <a:p>
-            <a:pPr algn="ctr"/>
-            <a:r>
-              <a:rPr sz="1700" b="1">
-                <a:solidFill>
-                  <a:srgbClr val="202122"/>
-                </a:solidFill>
-                <a:latin typeface="Calibri"/>
-              </a:rPr>
-              <a:t>3</a:t>
+              <a:t>!</a:t>
             </a:r>
           </a:p>
         </p:txBody>
@@ -9014,8 +11022,8 @@
         </p:nvSpPr>
         <p:spPr>
           <a:xfrm>
-            <a:off x="1325880" y="3566160"/>
-            <a:ext cx="6583680" cy="822960"/>
+            <a:off x="8046720" y="2606040"/>
+            <a:ext cx="3291840" cy="365760"/>
           </a:xfrm>
           <a:prstGeom prst="rect">
             <a:avLst/>
@@ -9023,194 +11031,51 @@
           <a:noFill/>
         </p:spPr>
         <p:txBody>
-          <a:bodyPr wrap="square" anchor="ctr" lIns="0" rIns="0" tIns="0" bIns="0"/>
+          <a:bodyPr wrap="square" anchor="t" lIns="0" rIns="0" tIns="0" bIns="0"/>
           <a:lstStyle/>
           <a:p>
             <a:pPr algn="l"/>
             <a:r>
-              <a:rPr sz="2000" b="0" i="0">
+              <a:rPr sz="1300" b="1" i="0">
+                <a:solidFill>
+                  <a:srgbClr val="A9C8F0"/>
+                </a:solidFill>
+                <a:latin typeface="Calibri"/>
+              </a:rPr>
+              <a:t>KEY IDEA</a:t>
+            </a:r>
+          </a:p>
+        </p:txBody>
+      </p:sp>
+      <p:sp>
+        <p:nvSpPr>
+          <p:cNvPr id="10" name="TextBox 9"/>
+          <p:cNvSpPr txBox="1"/>
+          <p:nvPr/>
+        </p:nvSpPr>
+        <p:spPr>
+          <a:xfrm>
+            <a:off x="8046720" y="3017520"/>
+            <a:ext cx="3291840" cy="2926080"/>
+          </a:xfrm>
+          <a:prstGeom prst="rect">
+            <a:avLst/>
+          </a:prstGeom>
+          <a:noFill/>
+        </p:spPr>
+        <p:txBody>
+          <a:bodyPr wrap="square" anchor="t" lIns="0" rIns="0" tIns="0" bIns="0"/>
+          <a:lstStyle/>
+          <a:p>
+            <a:pPr algn="l"/>
+            <a:r>
+              <a:rPr sz="2200" b="0" i="0">
                 <a:solidFill>
                   <a:srgbClr val="FFFFFF"/>
                 </a:solidFill>
-                <a:latin typeface="Calibri"/>
-              </a:rPr>
-              <a:t>Give one reward that might justify a risk.</a:t>
-            </a:r>
-          </a:p>
-        </p:txBody>
-      </p:sp>
-      <p:sp>
-        <p:nvSpPr>
-          <p:cNvPr id="10" name="Rounded Rectangle 9"/>
-          <p:cNvSpPr/>
-          <p:nvPr/>
-        </p:nvSpPr>
-        <p:spPr>
-          <a:xfrm>
-            <a:off x="8229600" y="1645920"/>
-            <a:ext cx="3410712" cy="2926080"/>
-          </a:xfrm>
-          <a:prstGeom prst="roundRect">
-            <a:avLst>
-              <a:gd name="adj" fmla="val 8000"/>
-            </a:avLst>
-          </a:prstGeom>
-          <a:solidFill>
-            <a:srgbClr val="0645AD"/>
-          </a:solidFill>
-          <a:ln>
-            <a:noFill/>
-          </a:ln>
-          <a:effectLst/>
-        </p:spPr>
-        <p:style>
-          <a:lnRef idx="1">
-            <a:schemeClr val="accent1"/>
-          </a:lnRef>
-          <a:fillRef idx="3">
-            <a:schemeClr val="accent1"/>
-          </a:fillRef>
-          <a:effectRef idx="2">
-            <a:schemeClr val="accent1"/>
-          </a:effectRef>
-          <a:fontRef idx="minor">
-            <a:schemeClr val="lt1"/>
-          </a:fontRef>
-        </p:style>
-        <p:txBody>
-          <a:bodyPr rtlCol="0" anchor="ctr"/>
-          <a:lstStyle/>
-          <a:p/>
-        </p:txBody>
-      </p:sp>
-      <p:sp>
-        <p:nvSpPr>
-          <p:cNvPr id="11" name="TextBox 10"/>
-          <p:cNvSpPr txBox="1"/>
-          <p:nvPr/>
-        </p:nvSpPr>
-        <p:spPr>
-          <a:xfrm>
-            <a:off x="8503920" y="1874519"/>
-            <a:ext cx="2926080" cy="365760"/>
-          </a:xfrm>
-          <a:prstGeom prst="rect">
-            <a:avLst/>
-          </a:prstGeom>
-          <a:noFill/>
-        </p:spPr>
-        <p:txBody>
-          <a:bodyPr wrap="square" anchor="t" lIns="0" rIns="0" tIns="0" bIns="0"/>
-          <a:lstStyle/>
-          <a:p>
-            <a:pPr algn="l"/>
-            <a:r>
-              <a:rPr sz="1300" b="1" i="0">
-                <a:solidFill>
-                  <a:srgbClr val="A9C8F0"/>
-                </a:solidFill>
-                <a:latin typeface="Calibri"/>
-              </a:rPr>
-              <a:t>REVISE THIS TOPIC</a:t>
-            </a:r>
-          </a:p>
-        </p:txBody>
-      </p:sp>
-      <p:sp>
-        <p:nvSpPr>
-          <p:cNvPr id="12" name="TextBox 11"/>
-          <p:cNvSpPr txBox="1"/>
-          <p:nvPr/>
-        </p:nvSpPr>
-        <p:spPr>
-          <a:xfrm>
-            <a:off x="8503920" y="2286000"/>
-            <a:ext cx="2926080" cy="548640"/>
-          </a:xfrm>
-          <a:prstGeom prst="rect">
-            <a:avLst/>
-          </a:prstGeom>
-          <a:noFill/>
-        </p:spPr>
-        <p:txBody>
-          <a:bodyPr wrap="square" anchor="t" lIns="0" rIns="0" tIns="0" bIns="0"/>
-          <a:lstStyle/>
-          <a:p>
-            <a:pPr algn="l"/>
-            <a:r>
-              <a:rPr sz="1400" b="0" i="0">
-                <a:solidFill>
-                  <a:srgbClr val="FFFFFF"/>
-                </a:solidFill>
-                <a:latin typeface="Calibri"/>
-              </a:rPr>
-              <a:t>Revision notes for this lesson are on the study wiki:</a:t>
-            </a:r>
-          </a:p>
-        </p:txBody>
-      </p:sp>
-      <p:sp>
-        <p:nvSpPr>
-          <p:cNvPr id="13" name="TextBox 12"/>
-          <p:cNvSpPr txBox="1"/>
-          <p:nvPr/>
-        </p:nvSpPr>
-        <p:spPr>
-          <a:xfrm>
-            <a:off x="8503920" y="2926080"/>
-            <a:ext cx="2926080" cy="1463040"/>
-          </a:xfrm>
-          <a:prstGeom prst="rect">
-            <a:avLst/>
-          </a:prstGeom>
-          <a:noFill/>
-        </p:spPr>
-        <p:txBody>
-          <a:bodyPr wrap="square" anchor="t" lIns="0" rIns="0" tIns="0" bIns="0"/>
-          <a:lstStyle/>
-          <a:p>
-            <a:pPr algn="l"/>
-            <a:r>
-              <a:rPr sz="2000" b="1" i="0">
-                <a:solidFill>
-                  <a:srgbClr val="FFFFFF"/>
-                </a:solidFill>
                 <a:latin typeface="Cambria"/>
               </a:rPr>
-              <a:t>Ethics and Risk</a:t>
-            </a:r>
-          </a:p>
-        </p:txBody>
-      </p:sp>
-      <p:sp>
-        <p:nvSpPr>
-          <p:cNvPr id="14" name="TextBox 13"/>
-          <p:cNvSpPr txBox="1"/>
-          <p:nvPr/>
-        </p:nvSpPr>
-        <p:spPr>
-          <a:xfrm>
-            <a:off x="548640" y="5669280"/>
-            <a:ext cx="11094415" cy="548640"/>
-          </a:xfrm>
-          <a:prstGeom prst="rect">
-            <a:avLst/>
-          </a:prstGeom>
-          <a:noFill/>
-        </p:spPr>
-        <p:txBody>
-          <a:bodyPr wrap="square" anchor="t" lIns="0" rIns="0" tIns="0" bIns="0"/>
-          <a:lstStyle/>
-          <a:p>
-            <a:pPr algn="l"/>
-            <a:r>
-              <a:rPr sz="1200" b="0" i="0">
-                <a:solidFill>
-                  <a:srgbClr val="A9C8F0"/>
-                </a:solidFill>
-                <a:latin typeface="Calibri"/>
-              </a:rPr>
-              <a:t>https://lana6478.github.io/T-level-Digital-Software-Development/#/02-occupational-specialism/02-ethics-and-risk.md</a:t>
+              <a:t>Good decisions weigh risk against reward for the specific context and market.</a:t>
             </a:r>
           </a:p>
         </p:txBody>
